--- a/Presentation/southwest_q3_2026_presentation.pptx
+++ b/Presentation/southwest_q3_2026_presentation.pptx
@@ -113,930 +113,6 @@
 
 <file path=ppt/charts/chart1.xml><?xml version="1.0" encoding="utf-8"?>
 <c:chartSpace xmlns:c="http://schemas.openxmlformats.org/drawingml/2006/chart" xmlns:a="http://schemas.openxmlformats.org/drawingml/2006/main" xmlns:r="http://schemas.openxmlformats.org/officeDocument/2006/relationships">
-  <c:chart>
-    <c:plotArea>
-      <c:scatterChart>
-        <c:scatterStyle val="lineMarker"/>
-        <c:varyColors val="0"/>
-        <c:ser>
-          <c:idx val="0"/>
-          <c:order val="0"/>
-          <c:tx>
-            <c:strRef>
-              <c:f>Sheet1!$B$1</c:f>
-              <c:strCache>
-                <c:ptCount val="1"/>
-                <c:pt idx="0">
-                  <c:v>Guidance band</c:v>
-                </c:pt>
-              </c:strCache>
-            </c:strRef>
-          </c:tx>
-          <c:spPr>
-            <a:ln w="28575">
-              <a:solidFill>
-                <a:srgbClr val="2A9D8F"/>
-              </a:solidFill>
-            </a:ln>
-          </c:spPr>
-          <c:marker>
-            <c:symbol val="none"/>
-          </c:marker>
-          <c:xVal>
-            <c:numRef>
-              <c:f>Sheet1!$A$2:$A$26</c:f>
-              <c:numCache>
-                <c:formatCode>General</c:formatCode>
-                <c:ptCount val="25"/>
-                <c:pt idx="0">
-                  <c:v>208.3</c:v>
-                </c:pt>
-                <c:pt idx="1">
-                  <c:v>209.56</c:v>
-                </c:pt>
-                <c:pt idx="2">
-                  <c:v>210.82</c:v>
-                </c:pt>
-                <c:pt idx="3">
-                  <c:v>212.08</c:v>
-                </c:pt>
-                <c:pt idx="4">
-                  <c:v>213.34</c:v>
-                </c:pt>
-                <c:pt idx="5">
-                  <c:v>214.6</c:v>
-                </c:pt>
-                <c:pt idx="6">
-                  <c:v>215.86</c:v>
-                </c:pt>
-                <c:pt idx="7">
-                  <c:v>217.12</c:v>
-                </c:pt>
-                <c:pt idx="8">
-                  <c:v>218.38</c:v>
-                </c:pt>
-                <c:pt idx="9">
-                  <c:v>219.64</c:v>
-                </c:pt>
-                <c:pt idx="10">
-                  <c:v>220.9</c:v>
-                </c:pt>
-                <c:pt idx="11">
-                  <c:v>222.16</c:v>
-                </c:pt>
-                <c:pt idx="12">
-                  <c:v>223.42</c:v>
-                </c:pt>
-                <c:pt idx="13">
-                  <c:v>224.68</c:v>
-                </c:pt>
-                <c:pt idx="14">
-                  <c:v>225.94</c:v>
-                </c:pt>
-                <c:pt idx="15">
-                  <c:v>227.2</c:v>
-                </c:pt>
-                <c:pt idx="16">
-                  <c:v>228.46</c:v>
-                </c:pt>
-                <c:pt idx="17">
-                  <c:v>229.72</c:v>
-                </c:pt>
-                <c:pt idx="18">
-                  <c:v>230.98</c:v>
-                </c:pt>
-                <c:pt idx="19">
-                  <c:v>232.24</c:v>
-                </c:pt>
-                <c:pt idx="20">
-                  <c:v>233.5</c:v>
-                </c:pt>
-                <c:pt idx="21">
-                  <c:v>234.76</c:v>
-                </c:pt>
-                <c:pt idx="22">
-                  <c:v>236.02</c:v>
-                </c:pt>
-                <c:pt idx="23">
-                  <c:v>237.28</c:v>
-                </c:pt>
-                <c:pt idx="24">
-                  <c:v>238.54</c:v>
-                </c:pt>
-              </c:numCache>
-            </c:numRef>
-          </c:xVal>
-          <c:yVal>
-            <c:numRef>
-              <c:f>Sheet1!$B$2:$B$26</c:f>
-              <c:numCache>
-                <c:formatCode>General</c:formatCode>
-                <c:ptCount val="25"/>
-                <c:pt idx="0">
-                  <c:v>35500.0</c:v>
-                </c:pt>
-                <c:pt idx="1">
-                  <c:v>35286.6</c:v>
-                </c:pt>
-                <c:pt idx="2">
-                  <c:v>35075.7</c:v>
-                </c:pt>
-                <c:pt idx="3">
-                  <c:v>34867.3</c:v>
-                </c:pt>
-                <c:pt idx="4">
-                  <c:v>34661.4</c:v>
-                </c:pt>
-                <c:pt idx="5">
-                  <c:v>34457.9</c:v>
-                </c:pt>
-                <c:pt idx="6">
-                  <c:v>34256.8</c:v>
-                </c:pt>
-                <c:pt idx="7">
-                  <c:v>34058.0</c:v>
-                </c:pt>
-                <c:pt idx="8">
-                  <c:v>33861.5</c:v>
-                </c:pt>
-                <c:pt idx="9">
-                  <c:v>33667.3</c:v>
-                </c:pt>
-                <c:pt idx="10">
-                  <c:v>33475.3</c:v>
-                </c:pt>
-                <c:pt idx="11">
-                  <c:v>33285.4</c:v>
-                </c:pt>
-                <c:pt idx="12">
-                  <c:v>33097.7</c:v>
-                </c:pt>
-                <c:pt idx="13">
-                  <c:v>32912.1</c:v>
-                </c:pt>
-                <c:pt idx="14">
-                  <c:v>32728.6</c:v>
-                </c:pt>
-                <c:pt idx="15">
-                  <c:v>32547.1</c:v>
-                </c:pt>
-                <c:pt idx="16">
-                  <c:v>32367.6</c:v>
-                </c:pt>
-                <c:pt idx="17">
-                  <c:v>32190.1</c:v>
-                </c:pt>
-                <c:pt idx="18">
-                  <c:v>32014.5</c:v>
-                </c:pt>
-                <c:pt idx="19">
-                  <c:v>31840.9</c:v>
-                </c:pt>
-                <c:pt idx="20">
-                  <c:v>31669.1</c:v>
-                </c:pt>
-                <c:pt idx="21">
-                  <c:v>31499.1</c:v>
-                </c:pt>
-                <c:pt idx="22">
-                  <c:v>31331.0</c:v>
-                </c:pt>
-                <c:pt idx="23">
-                  <c:v>31164.6</c:v>
-                </c:pt>
-                <c:pt idx="24">
-                  <c:v>31000.0</c:v>
-                </c:pt>
-              </c:numCache>
-            </c:numRef>
-          </c:yVal>
-          <c:smooth val="0"/>
-        </c:ser>
-        <c:ser>
-          <c:idx val="1"/>
-          <c:order val="1"/>
-          <c:tx>
-            <c:strRef>
-              <c:f>Sheet1!$B$28</c:f>
-              <c:strCache>
-                <c:ptCount val="1"/>
-                <c:pt idx="0">
-                  <c:v>Guidance band (upper edge)</c:v>
-                </c:pt>
-              </c:strCache>
-            </c:strRef>
-          </c:tx>
-          <c:spPr>
-            <a:ln w="28575">
-              <a:solidFill>
-                <a:srgbClr val="2A9D8F"/>
-              </a:solidFill>
-            </a:ln>
-          </c:spPr>
-          <c:marker>
-            <c:symbol val="none"/>
-          </c:marker>
-          <c:xVal>
-            <c:numRef>
-              <c:f>Sheet1!$A$29:$A$53</c:f>
-              <c:numCache>
-                <c:formatCode>General</c:formatCode>
-                <c:ptCount val="25"/>
-                <c:pt idx="0">
-                  <c:v>213.98</c:v>
-                </c:pt>
-                <c:pt idx="1">
-                  <c:v>215.28</c:v>
-                </c:pt>
-                <c:pt idx="2">
-                  <c:v>216.57</c:v>
-                </c:pt>
-                <c:pt idx="3">
-                  <c:v>217.87</c:v>
-                </c:pt>
-                <c:pt idx="4">
-                  <c:v>219.16</c:v>
-                </c:pt>
-                <c:pt idx="5">
-                  <c:v>220.46</c:v>
-                </c:pt>
-                <c:pt idx="6">
-                  <c:v>221.75</c:v>
-                </c:pt>
-                <c:pt idx="7">
-                  <c:v>223.04</c:v>
-                </c:pt>
-                <c:pt idx="8">
-                  <c:v>224.34</c:v>
-                </c:pt>
-                <c:pt idx="9">
-                  <c:v>225.63</c:v>
-                </c:pt>
-                <c:pt idx="10">
-                  <c:v>226.93</c:v>
-                </c:pt>
-                <c:pt idx="11">
-                  <c:v>228.22</c:v>
-                </c:pt>
-                <c:pt idx="12">
-                  <c:v>229.52</c:v>
-                </c:pt>
-                <c:pt idx="13">
-                  <c:v>230.81</c:v>
-                </c:pt>
-                <c:pt idx="14">
-                  <c:v>232.1</c:v>
-                </c:pt>
-                <c:pt idx="15">
-                  <c:v>233.4</c:v>
-                </c:pt>
-                <c:pt idx="16">
-                  <c:v>234.69</c:v>
-                </c:pt>
-                <c:pt idx="17">
-                  <c:v>235.99</c:v>
-                </c:pt>
-                <c:pt idx="18">
-                  <c:v>237.28</c:v>
-                </c:pt>
-                <c:pt idx="19">
-                  <c:v>238.58</c:v>
-                </c:pt>
-                <c:pt idx="20">
-                  <c:v>239.87</c:v>
-                </c:pt>
-                <c:pt idx="21">
-                  <c:v>241.16</c:v>
-                </c:pt>
-                <c:pt idx="22">
-                  <c:v>242.46</c:v>
-                </c:pt>
-                <c:pt idx="23">
-                  <c:v>243.75</c:v>
-                </c:pt>
-                <c:pt idx="24">
-                  <c:v>245.05</c:v>
-                </c:pt>
-              </c:numCache>
-            </c:numRef>
-          </c:xVal>
-          <c:yVal>
-            <c:numRef>
-              <c:f>Sheet1!$B$29:$B$53</c:f>
-              <c:numCache>
-                <c:formatCode>General</c:formatCode>
-                <c:ptCount val="25"/>
-                <c:pt idx="0">
-                  <c:v>35500.0</c:v>
-                </c:pt>
-                <c:pt idx="1">
-                  <c:v>35286.6</c:v>
-                </c:pt>
-                <c:pt idx="2">
-                  <c:v>35075.7</c:v>
-                </c:pt>
-                <c:pt idx="3">
-                  <c:v>34867.3</c:v>
-                </c:pt>
-                <c:pt idx="4">
-                  <c:v>34661.4</c:v>
-                </c:pt>
-                <c:pt idx="5">
-                  <c:v>34457.9</c:v>
-                </c:pt>
-                <c:pt idx="6">
-                  <c:v>34256.8</c:v>
-                </c:pt>
-                <c:pt idx="7">
-                  <c:v>34058.0</c:v>
-                </c:pt>
-                <c:pt idx="8">
-                  <c:v>33861.5</c:v>
-                </c:pt>
-                <c:pt idx="9">
-                  <c:v>33667.3</c:v>
-                </c:pt>
-                <c:pt idx="10">
-                  <c:v>33475.3</c:v>
-                </c:pt>
-                <c:pt idx="11">
-                  <c:v>33285.4</c:v>
-                </c:pt>
-                <c:pt idx="12">
-                  <c:v>33097.7</c:v>
-                </c:pt>
-                <c:pt idx="13">
-                  <c:v>32912.1</c:v>
-                </c:pt>
-                <c:pt idx="14">
-                  <c:v>32728.6</c:v>
-                </c:pt>
-                <c:pt idx="15">
-                  <c:v>32547.1</c:v>
-                </c:pt>
-                <c:pt idx="16">
-                  <c:v>32367.6</c:v>
-                </c:pt>
-                <c:pt idx="17">
-                  <c:v>32190.1</c:v>
-                </c:pt>
-                <c:pt idx="18">
-                  <c:v>32014.5</c:v>
-                </c:pt>
-                <c:pt idx="19">
-                  <c:v>31840.9</c:v>
-                </c:pt>
-                <c:pt idx="20">
-                  <c:v>31669.1</c:v>
-                </c:pt>
-                <c:pt idx="21">
-                  <c:v>31499.1</c:v>
-                </c:pt>
-                <c:pt idx="22">
-                  <c:v>31331.0</c:v>
-                </c:pt>
-                <c:pt idx="23">
-                  <c:v>31164.6</c:v>
-                </c:pt>
-                <c:pt idx="24">
-                  <c:v>31000.0</c:v>
-                </c:pt>
-              </c:numCache>
-            </c:numRef>
-          </c:yVal>
-          <c:smooth val="0"/>
-        </c:ser>
-        <c:ser>
-          <c:idx val="2"/>
-          <c:order val="2"/>
-          <c:tx>
-            <c:strRef>
-              <c:f>Sheet1!$B$55</c:f>
-              <c:strCache>
-                <c:ptCount val="1"/>
-                <c:pt idx="0">
-                  <c:v>Team forecast</c:v>
-                </c:pt>
-              </c:strCache>
-            </c:strRef>
-          </c:tx>
-          <c:spPr>
-            <a:ln>
-              <a:noFill/>
-            </a:ln>
-          </c:spPr>
-          <c:marker>
-            <c:symbol val="diamond"/>
-            <c:size val="12"/>
-            <c:spPr>
-              <a:solidFill>
-                <a:srgbClr val="E9A13B"/>
-              </a:solidFill>
-              <a:ln>
-                <a:solidFill>
-                  <a:srgbClr val="FFFFFF"/>
-                </a:solidFill>
-              </a:ln>
-            </c:spPr>
-          </c:marker>
-          <c:xVal>
-            <c:numRef>
-              <c:f>Sheet1!$A$56:$A$56</c:f>
-              <c:numCache>
-                <c:formatCode>General</c:formatCode>
-                <c:ptCount val="1"/>
-                <c:pt idx="0">
-                  <c:v>229.34</c:v>
-                </c:pt>
-              </c:numCache>
-            </c:numRef>
-          </c:xVal>
-          <c:yVal>
-            <c:numRef>
-              <c:f>Sheet1!$B$56:$B$56</c:f>
-              <c:numCache>
-                <c:formatCode>General</c:formatCode>
-                <c:ptCount val="1"/>
-                <c:pt idx="0">
-                  <c:v>32912.0</c:v>
-                </c:pt>
-              </c:numCache>
-            </c:numRef>
-          </c:yVal>
-          <c:smooth val="0"/>
-        </c:ser>
-        <c:ser>
-          <c:idx val="3"/>
-          <c:order val="3"/>
-          <c:tx>
-            <c:strRef>
-              <c:f>Sheet1!$B$58</c:f>
-              <c:strCache>
-                <c:ptCount val="1"/>
-                <c:pt idx="0">
-                  <c:v>B0 last year</c:v>
-                </c:pt>
-              </c:strCache>
-            </c:strRef>
-          </c:tx>
-          <c:spPr>
-            <a:ln>
-              <a:noFill/>
-            </a:ln>
-          </c:spPr>
-          <c:marker>
-            <c:symbol val="circle"/>
-            <c:size val="10"/>
-            <c:spPr>
-              <a:solidFill>
-                <a:srgbClr val="8A94A3"/>
-              </a:solidFill>
-              <a:ln>
-                <a:solidFill>
-                  <a:srgbClr val="FFFFFF"/>
-                </a:solidFill>
-              </a:ln>
-            </c:spPr>
-          </c:marker>
-          <c:xVal>
-            <c:numRef>
-              <c:f>Sheet1!$A$59:$A$59</c:f>
-              <c:numCache>
-                <c:formatCode>General</c:formatCode>
-                <c:ptCount val="1"/>
-                <c:pt idx="0">
-                  <c:v>182.56</c:v>
-                </c:pt>
-              </c:numCache>
-            </c:numRef>
-          </c:xVal>
-          <c:yVal>
-            <c:numRef>
-              <c:f>Sheet1!$B$59:$B$59</c:f>
-              <c:numCache>
-                <c:formatCode>General</c:formatCode>
-                <c:ptCount val="1"/>
-                <c:pt idx="0">
-                  <c:v>34581.0</c:v>
-                </c:pt>
-              </c:numCache>
-            </c:numRef>
-          </c:yVal>
-          <c:smooth val="0"/>
-        </c:ser>
-        <c:ser>
-          <c:idx val="4"/>
-          <c:order val="4"/>
-          <c:tx>
-            <c:strRef>
-              <c:f>Sheet1!$B$61</c:f>
-              <c:strCache>
-                <c:ptCount val="1"/>
-                <c:pt idx="0">
-                  <c:v>B1 packet</c:v>
-                </c:pt>
-              </c:strCache>
-            </c:strRef>
-          </c:tx>
-          <c:spPr>
-            <a:ln>
-              <a:noFill/>
-            </a:ln>
-          </c:spPr>
-          <c:marker>
-            <c:symbol val="circle"/>
-            <c:size val="10"/>
-            <c:spPr>
-              <a:solidFill>
-                <a:srgbClr val="D1495B"/>
-              </a:solidFill>
-              <a:ln>
-                <a:solidFill>
-                  <a:srgbClr val="FFFFFF"/>
-                </a:solidFill>
-              </a:ln>
-            </c:spPr>
-          </c:marker>
-          <c:xVal>
-            <c:numRef>
-              <c:f>Sheet1!$A$62:$A$62</c:f>
-              <c:numCache>
-                <c:formatCode>General</c:formatCode>
-                <c:ptCount val="1"/>
-                <c:pt idx="0">
-                  <c:v>220.67</c:v>
-                </c:pt>
-              </c:numCache>
-            </c:numRef>
-          </c:xVal>
-          <c:yVal>
-            <c:numRef>
-              <c:f>Sheet1!$B$62:$B$62</c:f>
-              <c:numCache>
-                <c:formatCode>General</c:formatCode>
-                <c:ptCount val="1"/>
-                <c:pt idx="0">
-                  <c:v>33435.67</c:v>
-                </c:pt>
-              </c:numCache>
-            </c:numRef>
-          </c:yVal>
-          <c:smooth val="0"/>
-        </c:ser>
-        <c:ser>
-          <c:idx val="5"/>
-          <c:order val="5"/>
-          <c:tx>
-            <c:strRef>
-              <c:f>Sheet1!$B$64</c:f>
-              <c:strCache>
-                <c:ptCount val="1"/>
-                <c:pt idx="0">
-                  <c:v>B1 ex-breakage</c:v>
-                </c:pt>
-              </c:strCache>
-            </c:strRef>
-          </c:tx>
-          <c:spPr>
-            <a:ln>
-              <a:noFill/>
-            </a:ln>
-          </c:spPr>
-          <c:marker>
-            <c:symbol val="circle"/>
-            <c:size val="10"/>
-            <c:spPr>
-              <a:solidFill>
-                <a:srgbClr val="8E2C3A"/>
-              </a:solidFill>
-              <a:ln>
-                <a:solidFill>
-                  <a:srgbClr val="FFFFFF"/>
-                </a:solidFill>
-              </a:ln>
-            </c:spPr>
-          </c:marker>
-          <c:xVal>
-            <c:numRef>
-              <c:f>Sheet1!$A$65:$A$65</c:f>
-              <c:numCache>
-                <c:formatCode>General</c:formatCode>
-                <c:ptCount val="1"/>
-                <c:pt idx="0">
-                  <c:v>228.78</c:v>
-                </c:pt>
-              </c:numCache>
-            </c:numRef>
-          </c:xVal>
-          <c:yVal>
-            <c:numRef>
-              <c:f>Sheet1!$B$65:$B$65</c:f>
-              <c:numCache>
-                <c:formatCode>General</c:formatCode>
-                <c:ptCount val="1"/>
-                <c:pt idx="0">
-                  <c:v>33435.67</c:v>
-                </c:pt>
-              </c:numCache>
-            </c:numRef>
-          </c:yVal>
-          <c:smooth val="0"/>
-        </c:ser>
-        <c:ser>
-          <c:idx val="6"/>
-          <c:order val="6"/>
-          <c:tx>
-            <c:strRef>
-              <c:f>Sheet1!$B$67</c:f>
-              <c:strCache>
-                <c:ptCount val="1"/>
-                <c:pt idx="0">
-                  <c:v>Team 80% interval</c:v>
-                </c:pt>
-              </c:strCache>
-            </c:strRef>
-          </c:tx>
-          <c:spPr>
-            <a:ln w="19050">
-              <a:solidFill>
-                <a:srgbClr val="E9A13B"/>
-              </a:solidFill>
-            </a:ln>
-          </c:spPr>
-          <c:marker>
-            <c:symbol val="none"/>
-          </c:marker>
-          <c:xVal>
-            <c:numRef>
-              <c:f>Sheet1!$A$68:$A$69</c:f>
-              <c:numCache>
-                <c:formatCode>General</c:formatCode>
-                <c:ptCount val="2"/>
-                <c:pt idx="0">
-                  <c:v>215.865</c:v>
-                </c:pt>
-                <c:pt idx="1">
-                  <c:v>242.815</c:v>
-                </c:pt>
-              </c:numCache>
-            </c:numRef>
-          </c:xVal>
-          <c:yVal>
-            <c:numRef>
-              <c:f>Sheet1!$B$68:$B$69</c:f>
-              <c:numCache>
-                <c:formatCode>General</c:formatCode>
-                <c:ptCount val="2"/>
-                <c:pt idx="0">
-                  <c:v>32912.0</c:v>
-                </c:pt>
-                <c:pt idx="1">
-                  <c:v>32912.0</c:v>
-                </c:pt>
-              </c:numCache>
-            </c:numRef>
-          </c:yVal>
-          <c:smooth val="0"/>
-        </c:ser>
-        <c:ser>
-          <c:idx val="7"/>
-          <c:order val="7"/>
-          <c:tx>
-            <c:strRef>
-              <c:f>Sheet1!$B$71</c:f>
-              <c:strCache>
-                <c:ptCount val="1"/>
-                <c:pt idx="0">
-                  <c:v>Team 80% interval (passengers)</c:v>
-                </c:pt>
-              </c:strCache>
-            </c:strRef>
-          </c:tx>
-          <c:spPr>
-            <a:ln w="19050">
-              <a:solidFill>
-                <a:srgbClr val="E9A13B"/>
-              </a:solidFill>
-            </a:ln>
-          </c:spPr>
-          <c:marker>
-            <c:symbol val="none"/>
-          </c:marker>
-          <c:xVal>
-            <c:numRef>
-              <c:f>Sheet1!$A$72:$A$73</c:f>
-              <c:numCache>
-                <c:formatCode>General</c:formatCode>
-                <c:ptCount val="2"/>
-                <c:pt idx="0">
-                  <c:v>229.34</c:v>
-                </c:pt>
-                <c:pt idx="1">
-                  <c:v>229.34</c:v>
-                </c:pt>
-              </c:numCache>
-            </c:numRef>
-          </c:xVal>
-          <c:yVal>
-            <c:numRef>
-              <c:f>Sheet1!$B$72:$B$73</c:f>
-              <c:numCache>
-                <c:formatCode>General</c:formatCode>
-                <c:ptCount val="2"/>
-                <c:pt idx="0">
-                  <c:v>31911.5439</c:v>
-                </c:pt>
-                <c:pt idx="1">
-                  <c:v>33912.4561</c:v>
-                </c:pt>
-              </c:numCache>
-            </c:numRef>
-          </c:yVal>
-          <c:smooth val="0"/>
-        </c:ser>
-        <c:axId val="-2128940872"/>
-        <c:axId val="-2129643912"/>
-      </c:scatterChart>
-      <c:valAx>
-        <c:axId val="-2128940872"/>
-        <c:scaling>
-          <c:orientation val="minMax"/>
-          <c:max val="250.0"/>
-          <c:min val="180.0"/>
-        </c:scaling>
-        <c:delete val="0"/>
-        <c:axPos val="b"/>
-        <c:title>
-          <c:tx>
-            <c:rich>
-              <a:bodyPr/>
-              <a:lstStyle/>
-              <a:p>
-                <a:r>
-                  <a:rPr sz="1200" b="0">
-                    <a:solidFill>
-                      <a:srgbClr val="5B6573"/>
-                    </a:solidFill>
-                    <a:latin typeface="Calibri"/>
-                  </a:rPr>
-                  <a:t>Average fare ($)</a:t>
-                </a:r>
-              </a:p>
-            </c:rich>
-          </c:tx>
-          <c:layout/>
-          <c:overlay val="0"/>
-        </c:title>
-        <c:numFmt formatCode="&quot;$&quot;0" sourceLinked="0"/>
-        <c:majorTickMark val="out"/>
-        <c:minorTickMark val="none"/>
-        <c:tickLblPos val="nextTo"/>
-        <c:spPr>
-          <a:ln>
-            <a:solidFill>
-              <a:srgbClr val="C9D1DC"/>
-            </a:solidFill>
-          </a:ln>
-        </c:spPr>
-        <c:txPr>
-          <a:bodyPr/>
-          <a:lstStyle/>
-          <a:p>
-            <a:pPr>
-              <a:defRPr sz="1200">
-                <a:solidFill>
-                  <a:srgbClr val="5B6573"/>
-                </a:solidFill>
-                <a:latin typeface="Calibri"/>
-              </a:defRPr>
-            </a:pPr>
-          </a:p>
-        </c:txPr>
-        <c:crossAx val="-2129643912"/>
-        <c:crosses val="autoZero"/>
-        <c:crossBetween val="midCat"/>
-        <c:majorUnit val="10.0"/>
-      </c:valAx>
-      <c:valAx>
-        <c:axId val="-2129643912"/>
-        <c:scaling>
-          <c:orientation val="minMax"/>
-          <c:max val="35500.0"/>
-          <c:min val="31000.0"/>
-        </c:scaling>
-        <c:delete val="0"/>
-        <c:axPos val="l"/>
-        <c:majorGridlines>
-          <c:spPr>
-            <a:ln>
-              <a:solidFill>
-                <a:srgbClr val="E3E8EF"/>
-              </a:solidFill>
-            </a:ln>
-          </c:spPr>
-        </c:majorGridlines>
-        <c:title>
-          <c:tx>
-            <c:rich>
-              <a:bodyPr/>
-              <a:lstStyle/>
-              <a:p>
-                <a:r>
-                  <a:rPr sz="1200" b="0">
-                    <a:solidFill>
-                      <a:srgbClr val="5B6573"/>
-                    </a:solidFill>
-                    <a:latin typeface="Calibri"/>
-                  </a:rPr>
-                  <a:t>Revenue passengers (000s)</a:t>
-                </a:r>
-              </a:p>
-            </c:rich>
-          </c:tx>
-          <c:layout/>
-          <c:overlay val="0"/>
-        </c:title>
-        <c:numFmt formatCode="#,##0" sourceLinked="0"/>
-        <c:majorTickMark val="out"/>
-        <c:minorTickMark val="none"/>
-        <c:tickLblPos val="nextTo"/>
-        <c:spPr>
-          <a:ln>
-            <a:solidFill>
-              <a:srgbClr val="C9D1DC"/>
-            </a:solidFill>
-          </a:ln>
-        </c:spPr>
-        <c:txPr>
-          <a:bodyPr/>
-          <a:lstStyle/>
-          <a:p>
-            <a:pPr>
-              <a:defRPr sz="1200">
-                <a:solidFill>
-                  <a:srgbClr val="5B6573"/>
-                </a:solidFill>
-                <a:latin typeface="Calibri"/>
-              </a:defRPr>
-            </a:pPr>
-          </a:p>
-        </c:txPr>
-        <c:crossAx val="-2128940872"/>
-        <c:crosses val="autoZero"/>
-        <c:crossBetween val="midCat"/>
-        <c:majorUnit val="1000.0"/>
-      </c:valAx>
-    </c:plotArea>
-    <c:legend>
-      <c:legendPos val="b"/>
-      <c:legendEntry>
-        <c:idx val="7"/>
-        <c:delete val="1"/>
-      </c:legendEntry>
-      <c:legendEntry>
-        <c:idx val="1"/>
-        <c:delete val="1"/>
-      </c:legendEntry>
-      <c:layout/>
-      <c:overlay val="0"/>
-      <c:txPr>
-        <a:bodyPr/>
-        <a:lstStyle/>
-        <a:p>
-          <a:pPr>
-            <a:defRPr sz="1200">
-              <a:solidFill>
-                <a:srgbClr val="5B6573"/>
-              </a:solidFill>
-            </a:defRPr>
-          </a:pPr>
-        </a:p>
-      </c:txPr>
-    </c:legend>
-    <c:plotVisOnly val="1"/>
-    <c:dispBlanksAs val="gap"/>
-    <c:showDLblsOverMax val="0"/>
-  </c:chart>
-  <c:txPr>
-    <a:bodyPr/>
-    <a:lstStyle/>
-    <a:p>
-      <a:pPr>
-        <a:defRPr sz="1200">
-          <a:latin typeface="Calibri"/>
-        </a:defRPr>
-      </a:pPr>
-      <a:endParaRPr lang="en-US"/>
-    </a:p>
-  </c:txPr>
-  <c:externalData r:id="rId1">
-    <c:autoUpdate val="0"/>
-  </c:externalData>
-</c:chartSpace>
-</file>
-
-<file path=ppt/charts/chart2.xml><?xml version="1.0" encoding="utf-8"?>
-<c:chartSpace xmlns:c="http://schemas.openxmlformats.org/drawingml/2006/chart" xmlns:a="http://schemas.openxmlformats.org/drawingml/2006/main" xmlns:r="http://schemas.openxmlformats.org/officeDocument/2006/relationships">
   <c:date1904 val="0"/>
   <c:chart>
     <c:title>
@@ -1046,13 +122,13 @@
           <a:lstStyle/>
           <a:p>
             <a:r>
-              <a:rPr sz="1400" b="1">
+              <a:rPr sz="1600" b="1">
                 <a:solidFill>
                   <a:srgbClr val="15202B"/>
                 </a:solidFill>
                 <a:latin typeface="Calibri"/>
               </a:rPr>
-              <a:t>2023–2024, pre fee change</a:t>
+              <a:t>2022–2024  ·  before the fee change</a:t>
             </a:r>
           </a:p>
         </c:rich>
@@ -1074,7 +150,7 @@
               <c:strCache>
                 <c:ptCount val="1"/>
                 <c:pt idx="0">
-                  <c:v>Our method</c:v>
+                  <c:v>Ours</c:v>
                 </c:pt>
               </c:strCache>
             </c:strRef>
@@ -1108,13 +184,13 @@
                 <c:formatCode>General</c:formatCode>
                 <c:ptCount val="3"/>
                 <c:pt idx="0">
-                  <c:v>2.52</c:v>
+                  <c:v>4.8</c:v>
                 </c:pt>
                 <c:pt idx="1">
-                  <c:v>3.71</c:v>
+                  <c:v>4.3</c:v>
                 </c:pt>
                 <c:pt idx="2">
-                  <c:v>3.0</c:v>
+                  <c:v>5.7</c:v>
                 </c:pt>
               </c:numCache>
             </c:numRef>
@@ -1163,13 +239,13 @@
                 <c:formatCode>General</c:formatCode>
                 <c:ptCount val="3"/>
                 <c:pt idx="0">
-                  <c:v>4.65</c:v>
+                  <c:v>10.3</c:v>
                 </c:pt>
                 <c:pt idx="1">
-                  <c:v>3.39</c:v>
+                  <c:v>5.4</c:v>
                 </c:pt>
                 <c:pt idx="2">
-                  <c:v>4.75</c:v>
+                  <c:v>10.9</c:v>
                 </c:pt>
               </c:numCache>
             </c:numRef>
@@ -1182,7 +258,7 @@
             <a:lstStyle/>
             <a:p>
               <a:pPr>
-                <a:defRPr sz="1200">
+                <a:defRPr sz="1400" b="1">
                   <a:solidFill>
                     <a:srgbClr val="1B1F24"/>
                   </a:solidFill>
@@ -1226,7 +302,7 @@
           <a:lstStyle/>
           <a:p>
             <a:pPr>
-              <a:defRPr sz="1200">
+              <a:defRPr sz="1500">
                 <a:solidFill>
                   <a:srgbClr val="5B6573"/>
                 </a:solidFill>
@@ -1245,7 +321,7 @@
       <c:valAx>
         <c:axId val="-2113994440"/>
         <c:scaling>
-          <c:max val="6.0"/>
+          <c:max val="12.0"/>
           <c:min val="0.0"/>
         </c:scaling>
         <c:delete val="0"/>
@@ -1273,7 +349,7 @@
           <a:lstStyle/>
           <a:p>
             <a:pPr>
-              <a:defRPr sz="1200">
+              <a:defRPr sz="1400">
                 <a:solidFill>
                   <a:srgbClr val="5B6573"/>
                 </a:solidFill>
@@ -1284,7 +360,7 @@
         </c:txPr>
         <c:crossAx val="-2068027336"/>
         <c:crosses val="autoZero"/>
-        <c:majorUnit val="2.0"/>
+        <c:majorUnit val="4.0"/>
       </c:valAx>
     </c:plotArea>
     <c:legend>
@@ -1295,7 +371,7 @@
         <a:lstStyle/>
         <a:p>
           <a:pPr>
-            <a:defRPr sz="1200">
+            <a:defRPr sz="1400">
               <a:solidFill>
                 <a:srgbClr val="5B6573"/>
               </a:solidFill>
@@ -1311,7 +387,7 @@
     <a:lstStyle/>
     <a:p>
       <a:pPr>
-        <a:defRPr sz="1200">
+        <a:defRPr sz="1400">
           <a:latin typeface="Calibri"/>
         </a:defRPr>
       </a:pPr>
@@ -1324,7 +400,7 @@
 </c:chartSpace>
 </file>
 
-<file path=ppt/charts/chart3.xml><?xml version="1.0" encoding="utf-8"?>
+<file path=ppt/charts/chart2.xml><?xml version="1.0" encoding="utf-8"?>
 <c:chartSpace xmlns:c="http://schemas.openxmlformats.org/drawingml/2006/chart" xmlns:a="http://schemas.openxmlformats.org/drawingml/2006/main" xmlns:r="http://schemas.openxmlformats.org/officeDocument/2006/relationships">
   <c:date1904 val="0"/>
   <c:chart>
@@ -1335,13 +411,13 @@
           <a:lstStyle/>
           <a:p>
             <a:r>
-              <a:rPr sz="1400" b="1">
+              <a:rPr sz="1600" b="1">
                 <a:solidFill>
                   <a:srgbClr val="15202B"/>
                 </a:solidFill>
                 <a:latin typeface="Calibri"/>
               </a:rPr>
-              <a:t>2025–2026, fee + model change</a:t>
+              <a:t>2025–2026  ·  after the fee change</a:t>
             </a:r>
           </a:p>
         </c:rich>
@@ -1363,7 +439,7 @@
               <c:strCache>
                 <c:ptCount val="1"/>
                 <c:pt idx="0">
-                  <c:v>Our method</c:v>
+                  <c:v>Ours</c:v>
                 </c:pt>
               </c:strCache>
             </c:strRef>
@@ -1397,13 +473,13 @@
                 <c:formatCode>General</c:formatCode>
                 <c:ptCount val="3"/>
                 <c:pt idx="0">
-                  <c:v>1.5</c:v>
+                  <c:v>1.1</c:v>
                 </c:pt>
                 <c:pt idx="1">
-                  <c:v>4.42</c:v>
+                  <c:v>4.4</c:v>
                 </c:pt>
                 <c:pt idx="2">
-                  <c:v>3.51</c:v>
+                  <c:v>3.5</c:v>
                 </c:pt>
               </c:numCache>
             </c:numRef>
@@ -1452,13 +528,13 @@
                 <c:formatCode>General</c:formatCode>
                 <c:ptCount val="3"/>
                 <c:pt idx="0">
-                  <c:v>2.64</c:v>
+                  <c:v>2.6</c:v>
                 </c:pt>
                 <c:pt idx="1">
-                  <c:v>4.95</c:v>
+                  <c:v>5.0</c:v>
                 </c:pt>
                 <c:pt idx="2">
-                  <c:v>3.85</c:v>
+                  <c:v>3.9</c:v>
                 </c:pt>
               </c:numCache>
             </c:numRef>
@@ -1471,7 +547,7 @@
             <a:lstStyle/>
             <a:p>
               <a:pPr>
-                <a:defRPr sz="1200">
+                <a:defRPr sz="1400" b="1">
                   <a:solidFill>
                     <a:srgbClr val="1B1F24"/>
                   </a:solidFill>
@@ -1515,7 +591,7 @@
           <a:lstStyle/>
           <a:p>
             <a:pPr>
-              <a:defRPr sz="1200">
+              <a:defRPr sz="1500">
                 <a:solidFill>
                   <a:srgbClr val="5B6573"/>
                 </a:solidFill>
@@ -1534,7 +610,7 @@
       <c:valAx>
         <c:axId val="-2113994440"/>
         <c:scaling>
-          <c:max val="6.0"/>
+          <c:max val="12.0"/>
           <c:min val="0.0"/>
         </c:scaling>
         <c:delete val="0"/>
@@ -1562,7 +638,7 @@
           <a:lstStyle/>
           <a:p>
             <a:pPr>
-              <a:defRPr sz="1200">
+              <a:defRPr sz="1400">
                 <a:solidFill>
                   <a:srgbClr val="5B6573"/>
                 </a:solidFill>
@@ -1573,7 +649,7 @@
         </c:txPr>
         <c:crossAx val="-2068027336"/>
         <c:crosses val="autoZero"/>
-        <c:majorUnit val="2.0"/>
+        <c:majorUnit val="4.0"/>
       </c:valAx>
     </c:plotArea>
     <c:legend>
@@ -1584,7 +660,7 @@
         <a:lstStyle/>
         <a:p>
           <a:pPr>
-            <a:defRPr sz="1200">
+            <a:defRPr sz="1400">
               <a:solidFill>
                 <a:srgbClr val="5B6573"/>
               </a:solidFill>
@@ -1600,7 +676,7 @@
     <a:lstStyle/>
     <a:p>
       <a:pPr>
-        <a:defRPr sz="1200">
+        <a:defRPr sz="1400">
           <a:latin typeface="Calibri"/>
         </a:defRPr>
       </a:pPr>
@@ -2008,7 +1084,7 @@
           <a:lstStyle/>
           <a:p>
             <a:r>
-              <a:t>Headline: Southwest carries about 5% fewer revenue passengers than a year ago but charges about 25% more per passenger, so passenger revenue lands inside the band management's guidance implies. The passenger count comes from TSA checkpoint throughput, Southwest's share of it (T-100), and the trip-factor bridge; the fare from three methods anchored on the BLS airfare index, seasonality and fuel. Intervals are Evaluation's harmonised 80% rule (post-COVID backtest error sd for both halves). The revenue interval uses a -0.4 error correlation because the fare is revenue divided by passengers. Kalshi's fare market agreed with our centre to within a dollar but was tighter than our band. [Placeholder: once Southwest reports, the actuals, errors and benchmark errors fill in here.]</a:t>
+              <a:t>Southwest reported 33,467k revenue passengers and a $231.69 average fare, so $7.75bn of passenger revenue. We forecast 32,912k, $229.34 and $7.55bn. All three actuals sit inside our 80% bands, and all three forecasts were low: passengers by 1.7%, fare by 1.0%, revenue by 2.7%. The bar is each 80% band, the diamond our forecast, the dot the actual. The bigger surprise: passenger revenue came in above the band implied by Southwest's own guidance. Our forecast sat inside that band; the company beat its own guide.</a:t>
             </a:r>
           </a:p>
         </p:txBody>
@@ -2078,7 +1154,7 @@
           <a:lstStyle/>
           <a:p>
             <a:r>
-              <a:t>Which reported count does a checkpoint count measure? Enplaned passengers, not revenue passengers: a connecting trip is scanned once but boards twice, and the target counts it once. In Q2 2026 enplanements rose 0.3% while revenue passengers fell 3.3%. Cleaning: the TSA file is structurally clean (no missing, duplicate or non-positive days), so nothing was imputed. The two funding-lapse windows are flagged and tested: once the downward trend in YoY growth is controlled, neither shows a throughput drop, and the -6.7% the packet cites for Mar-May is +0.3% in this file. We went with the data and kept the flag. Neither window touches Q3 2026 or its Q3 2025 base.</a:t>
+              <a:t>Which reported count does a checkpoint count measure? Enplaned passengers, not revenue passengers. A connecting trip is one paying trip but two boardings. In Q2 2026 boardings rose while paying trips fell, because assigned seating and the fare bundles pushed travellers onto connections. The ratio between the two, the trip factor, is the bridge from alternative data to the target, and no free source observes it: we extrapolate it from Southwest's own releases. Cleaning: the TSA file is structurally clean, with no missing, duplicate or non-positive days, so we imputed nothing. We flagged both funding-lapse windows. Once the downward trend in growth is controlled, neither shows a throughput drop, so we repaired nothing; neither touches Q3. Q2's fare carries a $285M one-off, which we added back before projecting. T-100 is published about three months late, so only July is a filing. We also used the BLS airfare CPI (October 2025 blank, interpolated) and EIA jet fuel (holiday blanks dropped). Google Trends was not used, because it is rescaled on every pull and has no stable history to backtest.</a:t>
             </a:r>
           </a:p>
         </p:txBody>
@@ -2148,7 +1224,7 @@
           <a:lstStyle/>
           <a:p>
             <a:r>
-              <a:t>Guidance pins passenger revenue to a narrow band, the teal curves. Any point between them satisfies guidance: flat passengers at about $215-220, or 5% fewer passengers at about $225-231. Those are different businesses, a volume story and a yield story, and the band cannot tell them apart. Our split says yield. The naive baselines miss the band on both sides: B1 on the packet's basis carries the $285M one-off into the fare and lands below; B1 rebuilt ex-breakage carries Q2's growth forward and lands above. Splitting also says which half to blame if the print misses the band.</a:t>
+              <a:t>Two halves, each from its own public signal, then multiplied. Passengers: national TSA throughput, times Southwest's share of it from T-100, divided by the trip factor; blended 65/35 with a capacity identity built on guided seat miles. Fare: a blend of three methods, an industry anchor on the BLS airfare CPI, a seasonal step and fuel pass-through, all within 1.6% of each other. Baselines from the packet: B0 is last year, B1 is last year scaled by Q2's growth. Against the print, B1 beat us on passengers, 0.1% low against our 1.7% low. We beat both on fare, though only narrowly once B1 is rebuilt without the one-off (1.3% low). Kalshi's fare market, a benchmark only, finished at 0.9% low, a touch closer than us.</a:t>
             </a:r>
           </a:p>
         </p:txBody>
@@ -2218,7 +1294,7 @@
           <a:lstStyle/>
           <a:p>
             <a:r>
-              <a:t>Evaluation re-implemented both roles' methods from their write-ups, reproduced their backtests exactly, and ran the packet's full 2022-2026 window. The TSA chain beats the naive baseline in every period and in 16 of 18 quarters, and in the current regime the edge is about as close to significance as six quarters allow. The fare does not reliably beat B1: in 2023-24 B1 wins outright. So the revenue figure the client cares about has no demonstrated edge over 'last year times last quarter's growth'. Interval check: Traffic's delivered band covered only 50% of post-COVID quarters and Price's 93%, so the form uses one harmonised rule for both.</a:t>
+              <a:t>Evaluation re-implemented both methods from the roles' write-ups and replayed them quarter by quarter from 2022, re-estimating every parameter from what was public at the time. The packet asks for 2022-2024 and the 2025-2026 fee change separately; those are the two panels. Passengers beat B1 in both eras and in 14/18 quarters. Fare beats B1 on average in both eras, but by about a point, and the Diebold-Mariano test cannot tell it apart from naive (p = 0.44); 2022's COVID base flatters every method, and in 2023-24 alone B1 wins on fare. So the revenue figure, the client's number, has no demonstrated edge (p = 0.53). Q3 2026 fits that pattern on fare, but on passengers the naive forecast won this time, as it did in Q2: see the next slide.</a:t>
             </a:r>
           </a:p>
         </p:txBody>
@@ -2288,7 +1364,7 @@
           <a:lstStyle/>
           <a:p>
             <a:r>
-              <a:t>Before the print we registered four risks, in order of how much each could move the answer. The scorecard shows how the forecast did; the ledger shows what each risk turned into; the passenger miss splits exactly, in logs, into the boardings nowcast (TSA and T-100, the alternative data) and the trip factor (the accounting bridge, which no public source observes). That split is the test of our debate position: if the bridge failed and the boardings held, the Flag case is confirmed. The PoV card shows each downgrade trigger's status for the Q4 decision exercise. [Placeholder: every amber bracket fills in once Integration/actuals.json carries the Q3 release figures; the 'why' sentence comes from Presentation/deck_inputs.json.]</a:t>
+              <a:t>Our passenger forecast was 1.7% low. The identity revenue passengers = boardings ÷ trip factor splits that miss exactly. The boardings half, built from TSA and T-100, was 0.5% low: we forecast 43,108k boardings and Southwest reported 43,310k. The trip factor, which no public source observes, was 1.2% low: we extrapolated 1.3098 from the two post-change quarters and it came in at 1.2941, slightly below Q2's. The alternative data held; the accounting bridge on top of it missed, which is the risk our Flag position names. The trip factor was 1.2% off forecast, inside our 1.5-point downgrade trigger. On fare, we were 1.0% low: Southwest beat its own unit revenue guide, so the band we used as a sense check was itself too low. And the naive B1 beat our passenger number this quarter, as it did in Q2 (0.6% high against our 0.9% low). That fires our two-quarters-running downgrade trigger. For the Q4 decision: keep selling the boardings nowcast, but downgrade the revenue-passenger number to boardings-only until the trip factor is re-estimated on the new quarters.</a:t>
             </a:r>
           </a:p>
         </p:txBody>
@@ -5314,7 +4390,7 @@
         </p:nvSpPr>
         <p:spPr>
           <a:xfrm>
-            <a:off x="548640" y="384048"/>
+            <a:off x="548640" y="685800"/>
             <a:ext cx="11094415" cy="731520"/>
           </a:xfrm>
         </p:spPr>
@@ -5330,21 +4406,21 @@
                 </a:solidFill>
                 <a:latin typeface="Cambria"/>
               </a:rPr>
-              <a:t>Fewer passengers, a much higher fare</a:t>
-            </a:r>
-          </a:p>
-        </p:txBody>
-      </p:sp>
-      <p:sp>
-        <p:nvSpPr>
-          <p:cNvPr id="3" name="Subtitle"/>
+              <a:t>Inside every 80% band, a little low</a:t>
+            </a:r>
+          </a:p>
+        </p:txBody>
+      </p:sp>
+      <p:sp>
+        <p:nvSpPr>
+          <p:cNvPr id="3" name="Kicker"/>
           <p:cNvSpPr txBox="1"/>
           <p:nvPr/>
         </p:nvSpPr>
         <p:spPr>
           <a:xfrm>
-            <a:off x="548640" y="1143000"/>
-            <a:ext cx="11094415" cy="365760"/>
+            <a:off x="548640" y="411480"/>
+            <a:ext cx="11094415" cy="274320"/>
           </a:xfrm>
           <a:prstGeom prst="rect">
             <a:avLst/>
@@ -5363,53 +4439,113 @@
               </a:spcAft>
             </a:pPr>
             <a:r>
-              <a:rPr sz="1400" b="0" i="0">
-                <a:solidFill>
-                  <a:srgbClr val="AEB8C6"/>
+              <a:rPr sz="1300" b="1" i="0">
+                <a:solidFill>
+                  <a:srgbClr val="E9A13B"/>
                 </a:solidFill>
                 <a:latin typeface="Calibri"/>
               </a:rPr>
-              <a:t>Southwest Airlines (LUV), Q3 2026  ·  </a:t>
-            </a:r>
-            <a:r>
-              <a:rPr sz="1400" b="0" i="1">
-                <a:solidFill>
-                  <a:srgbClr val="E9A13B"/>
+              <a:t>1  ·  FORECAST VS ACTUAL</a:t>
+            </a:r>
+          </a:p>
+        </p:txBody>
+      </p:sp>
+      <p:sp>
+        <p:nvSpPr>
+          <p:cNvPr id="4" name="Subtitle"/>
+          <p:cNvSpPr txBox="1"/>
+          <p:nvPr/>
+        </p:nvSpPr>
+        <p:spPr>
+          <a:xfrm>
+            <a:off x="548640" y="1463040"/>
+            <a:ext cx="11094415" cy="365760"/>
+          </a:xfrm>
+          <a:prstGeom prst="rect">
+            <a:avLst/>
+          </a:prstGeom>
+          <a:noFill/>
+        </p:spPr>
+        <p:txBody>
+          <a:bodyPr wrap="square" lIns="0" rIns="0" tIns="0" bIns="0" anchor="t">
+            <a:spAutoFit/>
+          </a:bodyPr>
+          <a:lstStyle/>
+          <a:p>
+            <a:pPr algn="l">
+              <a:spcAft>
+                <a:spcPts val="0"/>
+              </a:spcAft>
+            </a:pPr>
+            <a:r>
+              <a:rPr sz="1500" b="0" i="0">
+                <a:solidFill>
+                  <a:srgbClr val="AEB8C6"/>
                 </a:solidFill>
                 <a:latin typeface="Calibri"/>
               </a:rPr>
-              <a:t>[team name]</a:t>
-            </a:r>
-            <a:r>
-              <a:rPr sz="1400" b="0" i="0">
-                <a:solidFill>
-                  <a:srgbClr val="AEB8C6"/>
+              <a:t>Southwest Airlines (LUV), Q3 2026  ·  forecast locked Oct 20, scored against the Oct 21 release</a:t>
+            </a:r>
+          </a:p>
+        </p:txBody>
+      </p:sp>
+      <p:sp>
+        <p:nvSpPr>
+          <p:cNvPr id="5" name="TextBox 4"/>
+          <p:cNvSpPr txBox="1"/>
+          <p:nvPr/>
+        </p:nvSpPr>
+        <p:spPr>
+          <a:xfrm>
+            <a:off x="548640" y="2560320"/>
+            <a:ext cx="2560320" cy="365760"/>
+          </a:xfrm>
+          <a:prstGeom prst="rect">
+            <a:avLst/>
+          </a:prstGeom>
+          <a:noFill/>
+        </p:spPr>
+        <p:txBody>
+          <a:bodyPr wrap="square" lIns="0" rIns="0" tIns="0" bIns="0" anchor="ctr">
+            <a:spAutoFit/>
+          </a:bodyPr>
+          <a:lstStyle/>
+          <a:p>
+            <a:pPr algn="l">
+              <a:spcAft>
+                <a:spcPts val="0"/>
+              </a:spcAft>
+            </a:pPr>
+            <a:r>
+              <a:rPr sz="2000" b="1" i="0">
+                <a:solidFill>
+                  <a:srgbClr val="FFFFFF"/>
                 </a:solidFill>
                 <a:latin typeface="Calibri"/>
               </a:rPr>
-              <a:t>  ·  forecast committed Oct 20 2026  ·  free public data only</a:t>
-            </a:r>
-          </a:p>
-        </p:txBody>
-      </p:sp>
-      <p:sp>
-        <p:nvSpPr>
-          <p:cNvPr id="4" name="Card Revenue Passengers"/>
+              <a:t>Revenue passengers</a:t>
+            </a:r>
+          </a:p>
+        </p:txBody>
+      </p:sp>
+      <p:sp>
+        <p:nvSpPr>
+          <p:cNvPr id="6" name="80% band Revenue passengers"/>
           <p:cNvSpPr/>
           <p:nvPr/>
         </p:nvSpPr>
         <p:spPr>
           <a:xfrm>
-            <a:off x="548640" y="1783080"/>
-            <a:ext cx="3515258" cy="3246120"/>
+            <a:off x="3246120" y="2587752"/>
+            <a:ext cx="5577840" cy="310896"/>
           </a:xfrm>
           <a:prstGeom prst="roundRect">
             <a:avLst>
-              <a:gd name="adj" fmla="val 6000"/>
+              <a:gd name="adj" fmla="val 12000"/>
             </a:avLst>
           </a:prstGeom>
           <a:solidFill>
-            <a:srgbClr val="22324A"/>
+            <a:srgbClr val="3A4B63"/>
           </a:solidFill>
           <a:ln>
             <a:noFill/>
@@ -5440,14 +4576,14 @@
       </p:sp>
       <p:sp>
         <p:nvSpPr>
-          <p:cNvPr id="5" name="TextBox 4"/>
+          <p:cNvPr id="7" name="TextBox 6"/>
           <p:cNvSpPr txBox="1"/>
           <p:nvPr/>
         </p:nvSpPr>
         <p:spPr>
           <a:xfrm>
-            <a:off x="822959" y="2057400"/>
-            <a:ext cx="2966618" cy="274320"/>
+            <a:off x="3246120" y="2971800"/>
+            <a:ext cx="1371600" cy="274320"/>
           </a:xfrm>
           <a:prstGeom prst="rect">
             <a:avLst/>
@@ -5466,27 +4602,27 @@
               </a:spcAft>
             </a:pPr>
             <a:r>
-              <a:rPr sz="1200" b="1" i="0">
+              <a:rPr sz="1200" b="0" i="0">
                 <a:solidFill>
                   <a:srgbClr val="AEB8C6"/>
                 </a:solidFill>
                 <a:latin typeface="Calibri"/>
               </a:rPr>
-              <a:t>REVENUE PASSENGERS</a:t>
-            </a:r>
-          </a:p>
-        </p:txBody>
-      </p:sp>
-      <p:sp>
-        <p:nvSpPr>
-          <p:cNvPr id="6" name="TextBox 5"/>
+              <a:t>31,912k</a:t>
+            </a:r>
+          </a:p>
+        </p:txBody>
+      </p:sp>
+      <p:sp>
+        <p:nvSpPr>
+          <p:cNvPr id="8" name="TextBox 7"/>
           <p:cNvSpPr txBox="1"/>
           <p:nvPr/>
         </p:nvSpPr>
         <p:spPr>
           <a:xfrm>
-            <a:off x="822959" y="2377440"/>
-            <a:ext cx="2966618" cy="777240"/>
+            <a:off x="7452359" y="2971800"/>
+            <a:ext cx="1371600" cy="274320"/>
           </a:xfrm>
           <a:prstGeom prst="rect">
             <a:avLst/>
@@ -5499,123 +4635,42 @@
           </a:bodyPr>
           <a:lstStyle/>
           <a:p>
-            <a:pPr algn="l">
+            <a:pPr algn="r">
               <a:spcAft>
                 <a:spcPts val="0"/>
               </a:spcAft>
             </a:pPr>
             <a:r>
-              <a:rPr sz="4400" b="1" i="0">
-                <a:solidFill>
-                  <a:srgbClr val="E9A13B"/>
-                </a:solidFill>
-                <a:latin typeface="Cambria"/>
+              <a:rPr sz="1200" b="0" i="0">
+                <a:solidFill>
+                  <a:srgbClr val="AEB8C6"/>
+                </a:solidFill>
+                <a:latin typeface="Calibri"/>
               </a:rPr>
-              <a:t>32,912k</a:t>
-            </a:r>
-          </a:p>
-        </p:txBody>
-      </p:sp>
-      <p:sp>
-        <p:nvSpPr>
-          <p:cNvPr id="7" name="TextBox 6"/>
-          <p:cNvSpPr txBox="1"/>
+              <a:t>33,912k</a:t>
+            </a:r>
+          </a:p>
+        </p:txBody>
+      </p:sp>
+      <p:sp>
+        <p:nvSpPr>
+          <p:cNvPr id="9" name="Forecast Revenue passengers"/>
+          <p:cNvSpPr/>
           <p:nvPr/>
         </p:nvSpPr>
         <p:spPr>
           <a:xfrm>
-            <a:off x="822959" y="3200400"/>
-            <a:ext cx="2966618" cy="320040"/>
-          </a:xfrm>
-          <a:prstGeom prst="rect">
+            <a:off x="5879591" y="2587752"/>
+            <a:ext cx="310896" cy="310896"/>
+          </a:xfrm>
+          <a:prstGeom prst="diamond">
             <a:avLst/>
           </a:prstGeom>
-          <a:noFill/>
-        </p:spPr>
-        <p:txBody>
-          <a:bodyPr wrap="square" lIns="0" rIns="0" tIns="0" bIns="0" anchor="t">
-            <a:spAutoFit/>
-          </a:bodyPr>
-          <a:lstStyle/>
-          <a:p>
-            <a:pPr algn="l">
-              <a:spcAft>
-                <a:spcPts val="0"/>
-              </a:spcAft>
-            </a:pPr>
-            <a:r>
-              <a:rPr sz="1600" b="1" i="0">
-                <a:solidFill>
-                  <a:srgbClr val="FFFFFF"/>
-                </a:solidFill>
-                <a:latin typeface="Calibri"/>
-              </a:rPr>
-              <a:t>80%  31,912 – 33,912k</a:t>
-            </a:r>
-          </a:p>
-        </p:txBody>
-      </p:sp>
-      <p:sp>
-        <p:nvSpPr>
-          <p:cNvPr id="8" name="TextBox 7"/>
-          <p:cNvSpPr txBox="1"/>
-          <p:nvPr/>
-        </p:nvSpPr>
-        <p:spPr>
-          <a:xfrm>
-            <a:off x="822959" y="3566160"/>
-            <a:ext cx="2966618" cy="548640"/>
-          </a:xfrm>
-          <a:prstGeom prst="rect">
-            <a:avLst/>
-          </a:prstGeom>
-          <a:noFill/>
-        </p:spPr>
-        <p:txBody>
-          <a:bodyPr wrap="square" lIns="0" rIns="0" tIns="0" bIns="0" anchor="t">
-            <a:spAutoFit/>
-          </a:bodyPr>
-          <a:lstStyle/>
-          <a:p>
-            <a:pPr algn="l">
-              <a:spcAft>
-                <a:spcPts val="0"/>
-              </a:spcAft>
-            </a:pPr>
-            <a:r>
-              <a:rPr sz="1400" b="0" i="0">
-                <a:solidFill>
-                  <a:srgbClr val="AEB8C6"/>
-                </a:solidFill>
-                <a:latin typeface="Calibri"/>
-              </a:rPr>
-              <a:t>−4.8% YoY  ·  TSA + T-100 chain</a:t>
-            </a:r>
-          </a:p>
-        </p:txBody>
-      </p:sp>
-      <p:sp>
-        <p:nvSpPr>
-          <p:cNvPr id="9" name="Placeholder: actuals"/>
-          <p:cNvSpPr/>
-          <p:nvPr/>
-        </p:nvSpPr>
-        <p:spPr>
-          <a:xfrm>
-            <a:off x="685800" y="4114800"/>
-            <a:ext cx="3240938" cy="777240"/>
-          </a:xfrm>
-          <a:prstGeom prst="roundRect">
-            <a:avLst>
-              <a:gd name="adj" fmla="val 12000"/>
-            </a:avLst>
-          </a:prstGeom>
-          <a:noFill/>
-          <a:ln w="15875">
-            <a:solidFill>
-              <a:srgbClr val="E9A13B"/>
-            </a:solidFill>
-            <a:prstDash val="dash"/>
+          <a:solidFill>
+            <a:srgbClr val="E9A13B"/>
+          </a:solidFill>
+          <a:ln>
+            <a:noFill/>
           </a:ln>
           <a:effectLst/>
         </p:spPr>
@@ -5649,8 +4704,8 @@
         </p:nvSpPr>
         <p:spPr>
           <a:xfrm>
-            <a:off x="822959" y="4251960"/>
-            <a:ext cx="2966618" cy="594360"/>
+            <a:off x="5120639" y="2971800"/>
+            <a:ext cx="1828800" cy="274320"/>
           </a:xfrm>
           <a:prstGeom prst="rect">
             <a:avLst/>
@@ -5663,96 +4718,44 @@
           </a:bodyPr>
           <a:lstStyle/>
           <a:p>
-            <a:pPr algn="l">
+            <a:pPr algn="ctr">
               <a:spcAft>
-                <a:spcPts val="200"/>
+                <a:spcPts val="0"/>
               </a:spcAft>
             </a:pPr>
             <a:r>
               <a:rPr sz="1400" b="1" i="0">
                 <a:solidFill>
-                  <a:srgbClr val="AEB8C6"/>
+                  <a:srgbClr val="E9A13B"/>
                 </a:solidFill>
                 <a:latin typeface="Calibri"/>
               </a:rPr>
-              <a:t>Actual  </a:t>
-            </a:r>
-            <a:r>
-              <a:rPr sz="1400" b="0" i="1">
-                <a:solidFill>
-                  <a:srgbClr val="E9A13B"/>
-                </a:solidFill>
-                <a:latin typeface="Calibri"/>
-              </a:rPr>
-              <a:t>[from the Q3 release]</a:t>
-            </a:r>
-          </a:p>
-          <a:p>
-            <a:pPr algn="l">
-              <a:spcAft>
-                <a:spcPts val="200"/>
-              </a:spcAft>
-            </a:pPr>
-            <a:r>
-              <a:rPr sz="1400" b="0" i="0">
-                <a:solidFill>
-                  <a:srgbClr val="AEB8C6"/>
-                </a:solidFill>
-                <a:latin typeface="Calibri"/>
-              </a:rPr>
-              <a:t>error </a:t>
-            </a:r>
-            <a:r>
-              <a:rPr sz="1400" b="0" i="1">
-                <a:solidFill>
-                  <a:srgbClr val="E9A13B"/>
-                </a:solidFill>
-                <a:latin typeface="Calibri"/>
-              </a:rPr>
-              <a:t>[—]</a:t>
-            </a:r>
-            <a:r>
-              <a:rPr sz="1400" b="0" i="0">
-                <a:solidFill>
-                  <a:srgbClr val="AEB8C6"/>
-                </a:solidFill>
-                <a:latin typeface="Calibri"/>
-              </a:rPr>
-              <a:t>  ·  in 80%? </a:t>
-            </a:r>
-            <a:r>
-              <a:rPr sz="1400" b="0" i="1">
-                <a:solidFill>
-                  <a:srgbClr val="E9A13B"/>
-                </a:solidFill>
-                <a:latin typeface="Calibri"/>
-              </a:rPr>
-              <a:t>[—]</a:t>
-            </a:r>
-          </a:p>
-        </p:txBody>
-      </p:sp>
-      <p:sp>
-        <p:nvSpPr>
-          <p:cNvPr id="11" name="Card Average Fare"/>
+              <a:t>Forecast 32,912k</a:t>
+            </a:r>
+          </a:p>
+        </p:txBody>
+      </p:sp>
+      <p:sp>
+        <p:nvSpPr>
+          <p:cNvPr id="11" name="Actual Revenue passengers"/>
           <p:cNvSpPr/>
           <p:nvPr/>
         </p:nvSpPr>
         <p:spPr>
           <a:xfrm>
-            <a:off x="4338218" y="1783080"/>
-            <a:ext cx="3515258" cy="3246120"/>
-          </a:xfrm>
-          <a:prstGeom prst="roundRect">
-            <a:avLst>
-              <a:gd name="adj" fmla="val 6000"/>
-            </a:avLst>
+            <a:off x="7454168" y="2615184"/>
+            <a:ext cx="256032" cy="256032"/>
+          </a:xfrm>
+          <a:prstGeom prst="ellipse">
+            <a:avLst/>
           </a:prstGeom>
           <a:solidFill>
-            <a:srgbClr val="22324A"/>
+            <a:srgbClr val="FFFFFF"/>
           </a:solidFill>
-          <a:ln>
-            <a:noFill/>
+          <a:ln w="19050">
+            <a:solidFill>
+              <a:srgbClr val="15202B"/>
+            </a:solidFill>
           </a:ln>
           <a:effectLst/>
         </p:spPr>
@@ -5786,8 +4789,47 @@
         </p:nvSpPr>
         <p:spPr>
           <a:xfrm>
-            <a:off x="4612538" y="2057400"/>
-            <a:ext cx="2966618" cy="274320"/>
+            <a:off x="6667784" y="2240280"/>
+            <a:ext cx="1828800" cy="274320"/>
+          </a:xfrm>
+          <a:prstGeom prst="rect">
+            <a:avLst/>
+          </a:prstGeom>
+          <a:noFill/>
+        </p:spPr>
+        <p:txBody>
+          <a:bodyPr wrap="square" lIns="0" rIns="0" tIns="0" bIns="0" anchor="t">
+            <a:spAutoFit/>
+          </a:bodyPr>
+          <a:lstStyle/>
+          <a:p>
+            <a:pPr algn="ctr">
+              <a:spcAft>
+                <a:spcPts val="0"/>
+              </a:spcAft>
+            </a:pPr>
+            <a:r>
+              <a:rPr sz="1400" b="1" i="0">
+                <a:solidFill>
+                  <a:srgbClr val="FFFFFF"/>
+                </a:solidFill>
+                <a:latin typeface="Calibri"/>
+              </a:rPr>
+              <a:t>Actual 33,467k</a:t>
+            </a:r>
+          </a:p>
+        </p:txBody>
+      </p:sp>
+      <p:sp>
+        <p:nvSpPr>
+          <p:cNvPr id="13" name="TextBox 12"/>
+          <p:cNvSpPr txBox="1"/>
+          <p:nvPr/>
+        </p:nvSpPr>
+        <p:spPr>
+          <a:xfrm>
+            <a:off x="9281159" y="2377440"/>
+            <a:ext cx="2361895" cy="731520"/>
           </a:xfrm>
           <a:prstGeom prst="rect">
             <a:avLst/>
@@ -5806,38 +4848,15 @@
               </a:spcAft>
             </a:pPr>
             <a:r>
-              <a:rPr sz="1200" b="1" i="0">
-                <a:solidFill>
-                  <a:srgbClr val="AEB8C6"/>
+              <a:rPr sz="2600" b="1" i="0">
+                <a:solidFill>
+                  <a:srgbClr val="FFFFFF"/>
                 </a:solidFill>
                 <a:latin typeface="Calibri"/>
               </a:rPr>
-              <a:t>AVERAGE FARE</a:t>
-            </a:r>
-          </a:p>
-        </p:txBody>
-      </p:sp>
-      <p:sp>
-        <p:nvSpPr>
-          <p:cNvPr id="13" name="TextBox 12"/>
-          <p:cNvSpPr txBox="1"/>
-          <p:nvPr/>
-        </p:nvSpPr>
-        <p:spPr>
-          <a:xfrm>
-            <a:off x="4612538" y="2377440"/>
-            <a:ext cx="2966618" cy="777240"/>
-          </a:xfrm>
-          <a:prstGeom prst="rect">
-            <a:avLst/>
-          </a:prstGeom>
-          <a:noFill/>
-        </p:spPr>
-        <p:txBody>
-          <a:bodyPr wrap="square" lIns="0" rIns="0" tIns="0" bIns="0" anchor="t">
-            <a:spAutoFit/>
-          </a:bodyPr>
-          <a:lstStyle/>
+              <a:t>1.7% low</a:t>
+            </a:r>
+          </a:p>
           <a:p>
             <a:pPr algn="l">
               <a:spcAft>
@@ -5845,13 +4864,13 @@
               </a:spcAft>
             </a:pPr>
             <a:r>
-              <a:rPr sz="4400" b="1" i="0">
-                <a:solidFill>
-                  <a:srgbClr val="E9A13B"/>
-                </a:solidFill>
-                <a:latin typeface="Cambria"/>
+              <a:rPr sz="1400" b="0" i="0">
+                <a:solidFill>
+                  <a:srgbClr val="2A9D8F"/>
+                </a:solidFill>
+                <a:latin typeface="Calibri"/>
               </a:rPr>
-              <a:t>$229.34</a:t>
+              <a:t>✓ inside 80% band</a:t>
             </a:r>
           </a:p>
         </p:txBody>
@@ -5864,8 +4883,8 @@
         </p:nvSpPr>
         <p:spPr>
           <a:xfrm>
-            <a:off x="4612538" y="3200400"/>
-            <a:ext cx="2966618" cy="320040"/>
+            <a:off x="548640" y="3749039"/>
+            <a:ext cx="2560320" cy="365760"/>
           </a:xfrm>
           <a:prstGeom prst="rect">
             <a:avLst/>
@@ -5873,7 +4892,7 @@
           <a:noFill/>
         </p:spPr>
         <p:txBody>
-          <a:bodyPr wrap="square" lIns="0" rIns="0" tIns="0" bIns="0" anchor="t">
+          <a:bodyPr wrap="square" lIns="0" rIns="0" tIns="0" bIns="0" anchor="ctr">
             <a:spAutoFit/>
           </a:bodyPr>
           <a:lstStyle/>
@@ -5884,78 +4903,38 @@
               </a:spcAft>
             </a:pPr>
             <a:r>
-              <a:rPr sz="1600" b="1" i="0">
+              <a:rPr sz="2000" b="1" i="0">
                 <a:solidFill>
                   <a:srgbClr val="FFFFFF"/>
                 </a:solidFill>
                 <a:latin typeface="Calibri"/>
               </a:rPr>
-              <a:t>80%  $215.87 – $242.81</a:t>
-            </a:r>
-          </a:p>
-        </p:txBody>
-      </p:sp>
-      <p:sp>
-        <p:nvSpPr>
-          <p:cNvPr id="15" name="TextBox 14"/>
-          <p:cNvSpPr txBox="1"/>
-          <p:nvPr/>
-        </p:nvSpPr>
-        <p:spPr>
-          <a:xfrm>
-            <a:off x="4612538" y="3566160"/>
-            <a:ext cx="2966618" cy="548640"/>
-          </a:xfrm>
-          <a:prstGeom prst="rect">
-            <a:avLst/>
-          </a:prstGeom>
-          <a:noFill/>
-        </p:spPr>
-        <p:txBody>
-          <a:bodyPr wrap="square" lIns="0" rIns="0" tIns="0" bIns="0" anchor="t">
-            <a:spAutoFit/>
-          </a:bodyPr>
-          <a:lstStyle/>
-          <a:p>
-            <a:pPr algn="l">
-              <a:spcAft>
-                <a:spcPts val="0"/>
-              </a:spcAft>
-            </a:pPr>
-            <a:r>
-              <a:rPr sz="1400" b="0" i="0">
-                <a:solidFill>
-                  <a:srgbClr val="AEB8C6"/>
-                </a:solidFill>
-                <a:latin typeface="Calibri"/>
-              </a:rPr>
-              <a:t>+25.6% YoY  ·  CPI, season, fuel blend</a:t>
-            </a:r>
-          </a:p>
-        </p:txBody>
-      </p:sp>
-      <p:sp>
-        <p:nvSpPr>
-          <p:cNvPr id="16" name="Placeholder: actuals"/>
+              <a:t>Average fare</a:t>
+            </a:r>
+          </a:p>
+        </p:txBody>
+      </p:sp>
+      <p:sp>
+        <p:nvSpPr>
+          <p:cNvPr id="15" name="80% band Average fare"/>
           <p:cNvSpPr/>
           <p:nvPr/>
         </p:nvSpPr>
         <p:spPr>
           <a:xfrm>
-            <a:off x="4475378" y="4114800"/>
-            <a:ext cx="3240938" cy="777240"/>
+            <a:off x="3246120" y="3776472"/>
+            <a:ext cx="5577840" cy="310896"/>
           </a:xfrm>
           <a:prstGeom prst="roundRect">
             <a:avLst>
               <a:gd name="adj" fmla="val 12000"/>
             </a:avLst>
           </a:prstGeom>
-          <a:noFill/>
-          <a:ln w="15875">
-            <a:solidFill>
-              <a:srgbClr val="E9A13B"/>
-            </a:solidFill>
-            <a:prstDash val="dash"/>
+          <a:solidFill>
+            <a:srgbClr val="3A4B63"/>
+          </a:solidFill>
+          <a:ln>
+            <a:noFill/>
           </a:ln>
           <a:effectLst/>
         </p:spPr>
@@ -5983,14 +4962,14 @@
       </p:sp>
       <p:sp>
         <p:nvSpPr>
-          <p:cNvPr id="17" name="TextBox 16"/>
+          <p:cNvPr id="16" name="TextBox 15"/>
           <p:cNvSpPr txBox="1"/>
           <p:nvPr/>
         </p:nvSpPr>
         <p:spPr>
           <a:xfrm>
-            <a:off x="4612538" y="4251960"/>
-            <a:ext cx="2966618" cy="594360"/>
+            <a:off x="3246120" y="4160520"/>
+            <a:ext cx="1371600" cy="274320"/>
           </a:xfrm>
           <a:prstGeom prst="rect">
             <a:avLst/>
@@ -6005,91 +4984,76 @@
           <a:p>
             <a:pPr algn="l">
               <a:spcAft>
-                <a:spcPts val="200"/>
+                <a:spcPts val="0"/>
               </a:spcAft>
             </a:pPr>
             <a:r>
-              <a:rPr sz="1400" b="1" i="0">
+              <a:rPr sz="1200" b="0" i="0">
                 <a:solidFill>
                   <a:srgbClr val="AEB8C6"/>
                 </a:solidFill>
                 <a:latin typeface="Calibri"/>
               </a:rPr>
-              <a:t>Actual  </a:t>
-            </a:r>
-            <a:r>
-              <a:rPr sz="1400" b="0" i="1">
-                <a:solidFill>
-                  <a:srgbClr val="E9A13B"/>
+              <a:t>$215.87</a:t>
+            </a:r>
+          </a:p>
+        </p:txBody>
+      </p:sp>
+      <p:sp>
+        <p:nvSpPr>
+          <p:cNvPr id="17" name="TextBox 16"/>
+          <p:cNvSpPr txBox="1"/>
+          <p:nvPr/>
+        </p:nvSpPr>
+        <p:spPr>
+          <a:xfrm>
+            <a:off x="7452359" y="4160520"/>
+            <a:ext cx="1371600" cy="274320"/>
+          </a:xfrm>
+          <a:prstGeom prst="rect">
+            <a:avLst/>
+          </a:prstGeom>
+          <a:noFill/>
+        </p:spPr>
+        <p:txBody>
+          <a:bodyPr wrap="square" lIns="0" rIns="0" tIns="0" bIns="0" anchor="t">
+            <a:spAutoFit/>
+          </a:bodyPr>
+          <a:lstStyle/>
+          <a:p>
+            <a:pPr algn="r">
+              <a:spcAft>
+                <a:spcPts val="0"/>
+              </a:spcAft>
+            </a:pPr>
+            <a:r>
+              <a:rPr sz="1200" b="0" i="0">
+                <a:solidFill>
+                  <a:srgbClr val="AEB8C6"/>
                 </a:solidFill>
                 <a:latin typeface="Calibri"/>
               </a:rPr>
-              <a:t>[from the Q3 release]</a:t>
-            </a:r>
-          </a:p>
-          <a:p>
-            <a:pPr algn="l">
-              <a:spcAft>
-                <a:spcPts val="200"/>
-              </a:spcAft>
-            </a:pPr>
-            <a:r>
-              <a:rPr sz="1400" b="0" i="0">
-                <a:solidFill>
-                  <a:srgbClr val="AEB8C6"/>
-                </a:solidFill>
-                <a:latin typeface="Calibri"/>
-              </a:rPr>
-              <a:t>error </a:t>
-            </a:r>
-            <a:r>
-              <a:rPr sz="1400" b="0" i="1">
-                <a:solidFill>
-                  <a:srgbClr val="E9A13B"/>
-                </a:solidFill>
-                <a:latin typeface="Calibri"/>
-              </a:rPr>
-              <a:t>[—]</a:t>
-            </a:r>
-            <a:r>
-              <a:rPr sz="1400" b="0" i="0">
-                <a:solidFill>
-                  <a:srgbClr val="AEB8C6"/>
-                </a:solidFill>
-                <a:latin typeface="Calibri"/>
-              </a:rPr>
-              <a:t>  ·  in 80%? </a:t>
-            </a:r>
-            <a:r>
-              <a:rPr sz="1400" b="0" i="1">
-                <a:solidFill>
-                  <a:srgbClr val="E9A13B"/>
-                </a:solidFill>
-                <a:latin typeface="Calibri"/>
-              </a:rPr>
-              <a:t>[—]</a:t>
-            </a:r>
-          </a:p>
-        </p:txBody>
-      </p:sp>
-      <p:sp>
-        <p:nvSpPr>
-          <p:cNvPr id="18" name="Card Passenger Revenue"/>
+              <a:t>$242.81</a:t>
+            </a:r>
+          </a:p>
+        </p:txBody>
+      </p:sp>
+      <p:sp>
+        <p:nvSpPr>
+          <p:cNvPr id="18" name="Forecast Average fare"/>
           <p:cNvSpPr/>
           <p:nvPr/>
         </p:nvSpPr>
         <p:spPr>
           <a:xfrm>
-            <a:off x="8127796" y="1783080"/>
-            <a:ext cx="3515258" cy="3246120"/>
-          </a:xfrm>
-          <a:prstGeom prst="roundRect">
-            <a:avLst>
-              <a:gd name="adj" fmla="val 6000"/>
-            </a:avLst>
+            <a:off x="5879592" y="3776472"/>
+            <a:ext cx="310896" cy="310896"/>
+          </a:xfrm>
+          <a:prstGeom prst="diamond">
+            <a:avLst/>
           </a:prstGeom>
           <a:solidFill>
-            <a:srgbClr val="22324A"/>
+            <a:srgbClr val="E9A13B"/>
           </a:solidFill>
           <a:ln>
             <a:noFill/>
@@ -6126,8 +5090,8 @@
         </p:nvSpPr>
         <p:spPr>
           <a:xfrm>
-            <a:off x="8402116" y="2057400"/>
-            <a:ext cx="2966618" cy="274320"/>
+            <a:off x="5120640" y="4160520"/>
+            <a:ext cx="1828800" cy="274320"/>
           </a:xfrm>
           <a:prstGeom prst="rect">
             <a:avLst/>
@@ -6140,162 +5104,44 @@
           </a:bodyPr>
           <a:lstStyle/>
           <a:p>
-            <a:pPr algn="l">
+            <a:pPr algn="ctr">
               <a:spcAft>
                 <a:spcPts val="0"/>
               </a:spcAft>
             </a:pPr>
             <a:r>
-              <a:rPr sz="1200" b="1" i="0">
-                <a:solidFill>
-                  <a:srgbClr val="AEB8C6"/>
+              <a:rPr sz="1400" b="1" i="0">
+                <a:solidFill>
+                  <a:srgbClr val="E9A13B"/>
                 </a:solidFill>
                 <a:latin typeface="Calibri"/>
               </a:rPr>
-              <a:t>PASSENGER REVENUE</a:t>
-            </a:r>
-          </a:p>
-        </p:txBody>
-      </p:sp>
-      <p:sp>
-        <p:nvSpPr>
-          <p:cNvPr id="20" name="TextBox 19"/>
-          <p:cNvSpPr txBox="1"/>
+              <a:t>Forecast $229.34</a:t>
+            </a:r>
+          </a:p>
+        </p:txBody>
+      </p:sp>
+      <p:sp>
+        <p:nvSpPr>
+          <p:cNvPr id="20" name="Actual Average fare"/>
+          <p:cNvSpPr/>
           <p:nvPr/>
         </p:nvSpPr>
         <p:spPr>
           <a:xfrm>
-            <a:off x="8402116" y="2377440"/>
-            <a:ext cx="2966618" cy="777240"/>
-          </a:xfrm>
-          <a:prstGeom prst="rect">
+            <a:off x="6393403" y="3803904"/>
+            <a:ext cx="256032" cy="256032"/>
+          </a:xfrm>
+          <a:prstGeom prst="ellipse">
             <a:avLst/>
           </a:prstGeom>
-          <a:noFill/>
-        </p:spPr>
-        <p:txBody>
-          <a:bodyPr wrap="square" lIns="0" rIns="0" tIns="0" bIns="0" anchor="t">
-            <a:spAutoFit/>
-          </a:bodyPr>
-          <a:lstStyle/>
-          <a:p>
-            <a:pPr algn="l">
-              <a:spcAft>
-                <a:spcPts val="0"/>
-              </a:spcAft>
-            </a:pPr>
-            <a:r>
-              <a:rPr sz="4400" b="1" i="0">
-                <a:solidFill>
-                  <a:srgbClr val="E9A13B"/>
-                </a:solidFill>
-                <a:latin typeface="Cambria"/>
-              </a:rPr>
-              <a:t>$7.55bn</a:t>
-            </a:r>
-          </a:p>
-        </p:txBody>
-      </p:sp>
-      <p:sp>
-        <p:nvSpPr>
-          <p:cNvPr id="21" name="TextBox 20"/>
-          <p:cNvSpPr txBox="1"/>
-          <p:nvPr/>
-        </p:nvSpPr>
-        <p:spPr>
-          <a:xfrm>
-            <a:off x="8402116" y="3200400"/>
-            <a:ext cx="2966618" cy="320040"/>
-          </a:xfrm>
-          <a:prstGeom prst="rect">
-            <a:avLst/>
-          </a:prstGeom>
-          <a:noFill/>
-        </p:spPr>
-        <p:txBody>
-          <a:bodyPr wrap="square" lIns="0" rIns="0" tIns="0" bIns="0" anchor="t">
-            <a:spAutoFit/>
-          </a:bodyPr>
-          <a:lstStyle/>
-          <a:p>
-            <a:pPr algn="l">
-              <a:spcAft>
-                <a:spcPts val="0"/>
-              </a:spcAft>
-            </a:pPr>
-            <a:r>
-              <a:rPr sz="1600" b="1" i="0">
-                <a:solidFill>
-                  <a:srgbClr val="FFFFFF"/>
-                </a:solidFill>
-                <a:latin typeface="Calibri"/>
-              </a:rPr>
-              <a:t>80%  $7.14bn – $7.95bn</a:t>
-            </a:r>
-          </a:p>
-        </p:txBody>
-      </p:sp>
-      <p:sp>
-        <p:nvSpPr>
-          <p:cNvPr id="22" name="TextBox 21"/>
-          <p:cNvSpPr txBox="1"/>
-          <p:nvPr/>
-        </p:nvSpPr>
-        <p:spPr>
-          <a:xfrm>
-            <a:off x="8402116" y="3566160"/>
-            <a:ext cx="2966618" cy="548640"/>
-          </a:xfrm>
-          <a:prstGeom prst="rect">
-            <a:avLst/>
-          </a:prstGeom>
-          <a:noFill/>
-        </p:spPr>
-        <p:txBody>
-          <a:bodyPr wrap="square" lIns="0" rIns="0" tIns="0" bIns="0" anchor="t">
-            <a:spAutoFit/>
-          </a:bodyPr>
-          <a:lstStyle/>
-          <a:p>
-            <a:pPr algn="l">
-              <a:spcAft>
-                <a:spcPts val="0"/>
-              </a:spcAft>
-            </a:pPr>
-            <a:r>
-              <a:rPr sz="1400" b="0" i="0">
-                <a:solidFill>
-                  <a:srgbClr val="AEB8C6"/>
-                </a:solidFill>
-                <a:latin typeface="Calibri"/>
-              </a:rPr>
-              <a:t>inside guided band $7.39bn – $7.60bn</a:t>
-            </a:r>
-          </a:p>
-        </p:txBody>
-      </p:sp>
-      <p:sp>
-        <p:nvSpPr>
-          <p:cNvPr id="23" name="Placeholder: actuals"/>
-          <p:cNvSpPr/>
-          <p:nvPr/>
-        </p:nvSpPr>
-        <p:spPr>
-          <a:xfrm>
-            <a:off x="8264956" y="4114800"/>
-            <a:ext cx="3240938" cy="777240"/>
-          </a:xfrm>
-          <a:prstGeom prst="roundRect">
-            <a:avLst>
-              <a:gd name="adj" fmla="val 12000"/>
-            </a:avLst>
-          </a:prstGeom>
-          <a:noFill/>
-          <a:ln w="15875">
+          <a:solidFill>
+            <a:srgbClr val="FFFFFF"/>
+          </a:solidFill>
+          <a:ln w="19050">
             <a:solidFill>
-              <a:srgbClr val="E9A13B"/>
+              <a:srgbClr val="15202B"/>
             </a:solidFill>
-            <a:prstDash val="dash"/>
           </a:ln>
           <a:effectLst/>
         </p:spPr>
@@ -6323,14 +5169,14 @@
       </p:sp>
       <p:sp>
         <p:nvSpPr>
-          <p:cNvPr id="24" name="TextBox 23"/>
+          <p:cNvPr id="21" name="TextBox 20"/>
           <p:cNvSpPr txBox="1"/>
           <p:nvPr/>
         </p:nvSpPr>
         <p:spPr>
           <a:xfrm>
-            <a:off x="8402116" y="4251960"/>
-            <a:ext cx="2966618" cy="594360"/>
+            <a:off x="5607019" y="3429000"/>
+            <a:ext cx="1828800" cy="274320"/>
           </a:xfrm>
           <a:prstGeom prst="rect">
             <a:avLst/>
@@ -6343,85 +5189,33 @@
           </a:bodyPr>
           <a:lstStyle/>
           <a:p>
-            <a:pPr algn="l">
+            <a:pPr algn="ctr">
               <a:spcAft>
-                <a:spcPts val="200"/>
+                <a:spcPts val="0"/>
               </a:spcAft>
             </a:pPr>
             <a:r>
               <a:rPr sz="1400" b="1" i="0">
                 <a:solidFill>
-                  <a:srgbClr val="AEB8C6"/>
+                  <a:srgbClr val="FFFFFF"/>
                 </a:solidFill>
                 <a:latin typeface="Calibri"/>
               </a:rPr>
-              <a:t>Actual  </a:t>
-            </a:r>
-            <a:r>
-              <a:rPr sz="1400" b="0" i="1">
-                <a:solidFill>
-                  <a:srgbClr val="E9A13B"/>
-                </a:solidFill>
-                <a:latin typeface="Calibri"/>
-              </a:rPr>
-              <a:t>[from the Q3 release]</a:t>
-            </a:r>
-          </a:p>
-          <a:p>
-            <a:pPr algn="l">
-              <a:spcAft>
-                <a:spcPts val="200"/>
-              </a:spcAft>
-            </a:pPr>
-            <a:r>
-              <a:rPr sz="1400" b="0" i="0">
-                <a:solidFill>
-                  <a:srgbClr val="AEB8C6"/>
-                </a:solidFill>
-                <a:latin typeface="Calibri"/>
-              </a:rPr>
-              <a:t>error </a:t>
-            </a:r>
-            <a:r>
-              <a:rPr sz="1400" b="0" i="1">
-                <a:solidFill>
-                  <a:srgbClr val="E9A13B"/>
-                </a:solidFill>
-                <a:latin typeface="Calibri"/>
-              </a:rPr>
-              <a:t>[—]</a:t>
-            </a:r>
-            <a:r>
-              <a:rPr sz="1400" b="0" i="0">
-                <a:solidFill>
-                  <a:srgbClr val="AEB8C6"/>
-                </a:solidFill>
-                <a:latin typeface="Calibri"/>
-              </a:rPr>
-              <a:t>  ·  in 80%? </a:t>
-            </a:r>
-            <a:r>
-              <a:rPr sz="1400" b="0" i="1">
-                <a:solidFill>
-                  <a:srgbClr val="E9A13B"/>
-                </a:solidFill>
-                <a:latin typeface="Calibri"/>
-              </a:rPr>
-              <a:t>[—]</a:t>
-            </a:r>
-          </a:p>
-        </p:txBody>
-      </p:sp>
-      <p:sp>
-        <p:nvSpPr>
-          <p:cNvPr id="25" name="TextBox 24"/>
+              <a:t>Actual $231.69</a:t>
+            </a:r>
+          </a:p>
+        </p:txBody>
+      </p:sp>
+      <p:sp>
+        <p:nvSpPr>
+          <p:cNvPr id="22" name="TextBox 21"/>
           <p:cNvSpPr txBox="1"/>
           <p:nvPr/>
         </p:nvSpPr>
         <p:spPr>
           <a:xfrm>
-            <a:off x="548640" y="5257800"/>
-            <a:ext cx="11094415" cy="274320"/>
+            <a:off x="9281159" y="3566160"/>
+            <a:ext cx="2361895" cy="731520"/>
           </a:xfrm>
           <a:prstGeom prst="rect">
             <a:avLst/>
@@ -6440,38 +5234,15 @@
               </a:spcAft>
             </a:pPr>
             <a:r>
-              <a:rPr sz="1200" b="1" i="0">
-                <a:solidFill>
-                  <a:srgbClr val="AEB8C6"/>
+              <a:rPr sz="2600" b="1" i="0">
+                <a:solidFill>
+                  <a:srgbClr val="FFFFFF"/>
                 </a:solidFill>
                 <a:latin typeface="Calibri"/>
               </a:rPr>
-              <a:t>BENCHMARKS  ·  error vs actual</a:t>
-            </a:r>
-          </a:p>
-        </p:txBody>
-      </p:sp>
-      <p:sp>
-        <p:nvSpPr>
-          <p:cNvPr id="26" name="TextBox 25"/>
-          <p:cNvSpPr txBox="1"/>
-          <p:nvPr/>
-        </p:nvSpPr>
-        <p:spPr>
-          <a:xfrm>
-            <a:off x="548640" y="5559552"/>
-            <a:ext cx="2567863" cy="274320"/>
-          </a:xfrm>
-          <a:prstGeom prst="rect">
-            <a:avLst/>
-          </a:prstGeom>
-          <a:noFill/>
-        </p:spPr>
-        <p:txBody>
-          <a:bodyPr wrap="square" lIns="0" rIns="0" tIns="0" bIns="0" anchor="t">
-            <a:spAutoFit/>
-          </a:bodyPr>
-          <a:lstStyle/>
+              <a:t>1.0% low</a:t>
+            </a:r>
+          </a:p>
           <a:p>
             <a:pPr algn="l">
               <a:spcAft>
@@ -6479,27 +5250,27 @@
               </a:spcAft>
             </a:pPr>
             <a:r>
-              <a:rPr sz="1200" b="0" i="0">
-                <a:solidFill>
-                  <a:srgbClr val="AEB8C6"/>
+              <a:rPr sz="1400" b="0" i="0">
+                <a:solidFill>
+                  <a:srgbClr val="2A9D8F"/>
                 </a:solidFill>
                 <a:latin typeface="Calibri"/>
               </a:rPr>
-              <a:t>B0  same quarter last year</a:t>
-            </a:r>
-          </a:p>
-        </p:txBody>
-      </p:sp>
-      <p:sp>
-        <p:nvSpPr>
-          <p:cNvPr id="27" name="TextBox 26"/>
+              <a:t>✓ inside 80% band</a:t>
+            </a:r>
+          </a:p>
+        </p:txBody>
+      </p:sp>
+      <p:sp>
+        <p:nvSpPr>
+          <p:cNvPr id="23" name="TextBox 22"/>
           <p:cNvSpPr txBox="1"/>
           <p:nvPr/>
         </p:nvSpPr>
         <p:spPr>
           <a:xfrm>
-            <a:off x="548640" y="5806440"/>
-            <a:ext cx="2567863" cy="320040"/>
+            <a:off x="548640" y="4937760"/>
+            <a:ext cx="2560320" cy="365760"/>
           </a:xfrm>
           <a:prstGeom prst="rect">
             <a:avLst/>
@@ -6507,7 +5278,7 @@
           <a:noFill/>
         </p:spPr>
         <p:txBody>
-          <a:bodyPr wrap="square" lIns="0" rIns="0" tIns="0" bIns="0" anchor="t">
+          <a:bodyPr wrap="square" lIns="0" rIns="0" tIns="0" bIns="0" anchor="ctr">
             <a:spAutoFit/>
           </a:bodyPr>
           <a:lstStyle/>
@@ -6518,27 +5289,73 @@
               </a:spcAft>
             </a:pPr>
             <a:r>
-              <a:rPr sz="1600" b="1" i="0">
+              <a:rPr sz="2000" b="1" i="0">
                 <a:solidFill>
                   <a:srgbClr val="FFFFFF"/>
                 </a:solidFill>
                 <a:latin typeface="Calibri"/>
               </a:rPr>
-              <a:t>34,581k  ·  $182.56</a:t>
-            </a:r>
-          </a:p>
-        </p:txBody>
-      </p:sp>
-      <p:sp>
-        <p:nvSpPr>
-          <p:cNvPr id="28" name="TextBox 27"/>
+              <a:t>Passenger revenue</a:t>
+            </a:r>
+          </a:p>
+        </p:txBody>
+      </p:sp>
+      <p:sp>
+        <p:nvSpPr>
+          <p:cNvPr id="24" name="80% band Passenger revenue"/>
+          <p:cNvSpPr/>
+          <p:nvPr/>
+        </p:nvSpPr>
+        <p:spPr>
+          <a:xfrm>
+            <a:off x="3246120" y="4965192"/>
+            <a:ext cx="5577840" cy="310896"/>
+          </a:xfrm>
+          <a:prstGeom prst="roundRect">
+            <a:avLst>
+              <a:gd name="adj" fmla="val 12000"/>
+            </a:avLst>
+          </a:prstGeom>
+          <a:solidFill>
+            <a:srgbClr val="3A4B63"/>
+          </a:solidFill>
+          <a:ln>
+            <a:noFill/>
+          </a:ln>
+          <a:effectLst/>
+        </p:spPr>
+        <p:style>
+          <a:lnRef idx="1">
+            <a:schemeClr val="accent1"/>
+          </a:lnRef>
+          <a:fillRef idx="3">
+            <a:schemeClr val="accent1"/>
+          </a:fillRef>
+          <a:effectRef idx="2">
+            <a:schemeClr val="accent1"/>
+          </a:effectRef>
+          <a:fontRef idx="minor">
+            <a:schemeClr val="lt1"/>
+          </a:fontRef>
+        </p:style>
+        <p:txBody>
+          <a:bodyPr rtlCol="0" anchor="ctr"/>
+          <a:lstStyle/>
+          <a:p>
+            <a:pPr algn="ctr"/>
+          </a:p>
+        </p:txBody>
+      </p:sp>
+      <p:sp>
+        <p:nvSpPr>
+          <p:cNvPr id="25" name="TextBox 24"/>
           <p:cNvSpPr txBox="1"/>
           <p:nvPr/>
         </p:nvSpPr>
         <p:spPr>
           <a:xfrm>
-            <a:off x="548640" y="6153912"/>
-            <a:ext cx="2567863" cy="274320"/>
+            <a:off x="3246120" y="5349240"/>
+            <a:ext cx="1371600" cy="274320"/>
           </a:xfrm>
           <a:prstGeom prst="rect">
             <a:avLst/>
@@ -6557,27 +5374,234 @@
               </a:spcAft>
             </a:pPr>
             <a:r>
-              <a:rPr sz="1200" b="0" i="1">
-                <a:solidFill>
-                  <a:srgbClr val="E9A13B"/>
+              <a:rPr sz="1200" b="0" i="0">
+                <a:solidFill>
+                  <a:srgbClr val="AEB8C6"/>
                 </a:solidFill>
                 <a:latin typeface="Calibri"/>
               </a:rPr>
-              <a:t>[error vs actual]</a:t>
-            </a:r>
-          </a:p>
-        </p:txBody>
-      </p:sp>
-      <p:sp>
-        <p:nvSpPr>
-          <p:cNvPr id="29" name="TextBox 28"/>
+              <a:t>$7.14bn</a:t>
+            </a:r>
+          </a:p>
+        </p:txBody>
+      </p:sp>
+      <p:sp>
+        <p:nvSpPr>
+          <p:cNvPr id="26" name="TextBox 25"/>
           <p:cNvSpPr txBox="1"/>
           <p:nvPr/>
         </p:nvSpPr>
         <p:spPr>
           <a:xfrm>
-            <a:off x="3390823" y="5559552"/>
-            <a:ext cx="2567863" cy="274320"/>
+            <a:off x="7452359" y="5349240"/>
+            <a:ext cx="1371600" cy="274320"/>
+          </a:xfrm>
+          <a:prstGeom prst="rect">
+            <a:avLst/>
+          </a:prstGeom>
+          <a:noFill/>
+        </p:spPr>
+        <p:txBody>
+          <a:bodyPr wrap="square" lIns="0" rIns="0" tIns="0" bIns="0" anchor="t">
+            <a:spAutoFit/>
+          </a:bodyPr>
+          <a:lstStyle/>
+          <a:p>
+            <a:pPr algn="r">
+              <a:spcAft>
+                <a:spcPts val="0"/>
+              </a:spcAft>
+            </a:pPr>
+            <a:r>
+              <a:rPr sz="1200" b="0" i="0">
+                <a:solidFill>
+                  <a:srgbClr val="AEB8C6"/>
+                </a:solidFill>
+                <a:latin typeface="Calibri"/>
+              </a:rPr>
+              <a:t>$7.95bn</a:t>
+            </a:r>
+          </a:p>
+        </p:txBody>
+      </p:sp>
+      <p:sp>
+        <p:nvSpPr>
+          <p:cNvPr id="27" name="Forecast Passenger revenue"/>
+          <p:cNvSpPr/>
+          <p:nvPr/>
+        </p:nvSpPr>
+        <p:spPr>
+          <a:xfrm>
+            <a:off x="5898179" y="4965192"/>
+            <a:ext cx="310896" cy="310896"/>
+          </a:xfrm>
+          <a:prstGeom prst="diamond">
+            <a:avLst/>
+          </a:prstGeom>
+          <a:solidFill>
+            <a:srgbClr val="E9A13B"/>
+          </a:solidFill>
+          <a:ln>
+            <a:noFill/>
+          </a:ln>
+          <a:effectLst/>
+        </p:spPr>
+        <p:style>
+          <a:lnRef idx="1">
+            <a:schemeClr val="accent1"/>
+          </a:lnRef>
+          <a:fillRef idx="3">
+            <a:schemeClr val="accent1"/>
+          </a:fillRef>
+          <a:effectRef idx="2">
+            <a:schemeClr val="accent1"/>
+          </a:effectRef>
+          <a:fontRef idx="minor">
+            <a:schemeClr val="lt1"/>
+          </a:fontRef>
+        </p:style>
+        <p:txBody>
+          <a:bodyPr rtlCol="0" anchor="ctr"/>
+          <a:lstStyle/>
+          <a:p>
+            <a:pPr algn="ctr"/>
+          </a:p>
+        </p:txBody>
+      </p:sp>
+      <p:sp>
+        <p:nvSpPr>
+          <p:cNvPr id="28" name="TextBox 27"/>
+          <p:cNvSpPr txBox="1"/>
+          <p:nvPr/>
+        </p:nvSpPr>
+        <p:spPr>
+          <a:xfrm>
+            <a:off x="5139227" y="5349240"/>
+            <a:ext cx="1828800" cy="274320"/>
+          </a:xfrm>
+          <a:prstGeom prst="rect">
+            <a:avLst/>
+          </a:prstGeom>
+          <a:noFill/>
+        </p:spPr>
+        <p:txBody>
+          <a:bodyPr wrap="square" lIns="0" rIns="0" tIns="0" bIns="0" anchor="t">
+            <a:spAutoFit/>
+          </a:bodyPr>
+          <a:lstStyle/>
+          <a:p>
+            <a:pPr algn="ctr">
+              <a:spcAft>
+                <a:spcPts val="0"/>
+              </a:spcAft>
+            </a:pPr>
+            <a:r>
+              <a:rPr sz="1400" b="1" i="0">
+                <a:solidFill>
+                  <a:srgbClr val="E9A13B"/>
+                </a:solidFill>
+                <a:latin typeface="Calibri"/>
+              </a:rPr>
+              <a:t>Forecast $7.55bn</a:t>
+            </a:r>
+          </a:p>
+        </p:txBody>
+      </p:sp>
+      <p:sp>
+        <p:nvSpPr>
+          <p:cNvPr id="29" name="Actual Passenger revenue"/>
+          <p:cNvSpPr/>
+          <p:nvPr/>
+        </p:nvSpPr>
+        <p:spPr>
+          <a:xfrm>
+            <a:off x="7328476" y="4992624"/>
+            <a:ext cx="256032" cy="256032"/>
+          </a:xfrm>
+          <a:prstGeom prst="ellipse">
+            <a:avLst/>
+          </a:prstGeom>
+          <a:solidFill>
+            <a:srgbClr val="FFFFFF"/>
+          </a:solidFill>
+          <a:ln w="19050">
+            <a:solidFill>
+              <a:srgbClr val="15202B"/>
+            </a:solidFill>
+          </a:ln>
+          <a:effectLst/>
+        </p:spPr>
+        <p:style>
+          <a:lnRef idx="1">
+            <a:schemeClr val="accent1"/>
+          </a:lnRef>
+          <a:fillRef idx="3">
+            <a:schemeClr val="accent1"/>
+          </a:fillRef>
+          <a:effectRef idx="2">
+            <a:schemeClr val="accent1"/>
+          </a:effectRef>
+          <a:fontRef idx="minor">
+            <a:schemeClr val="lt1"/>
+          </a:fontRef>
+        </p:style>
+        <p:txBody>
+          <a:bodyPr rtlCol="0" anchor="ctr"/>
+          <a:lstStyle/>
+          <a:p>
+            <a:pPr algn="ctr"/>
+          </a:p>
+        </p:txBody>
+      </p:sp>
+      <p:sp>
+        <p:nvSpPr>
+          <p:cNvPr id="30" name="TextBox 29"/>
+          <p:cNvSpPr txBox="1"/>
+          <p:nvPr/>
+        </p:nvSpPr>
+        <p:spPr>
+          <a:xfrm>
+            <a:off x="6542092" y="4617720"/>
+            <a:ext cx="1828800" cy="274320"/>
+          </a:xfrm>
+          <a:prstGeom prst="rect">
+            <a:avLst/>
+          </a:prstGeom>
+          <a:noFill/>
+        </p:spPr>
+        <p:txBody>
+          <a:bodyPr wrap="square" lIns="0" rIns="0" tIns="0" bIns="0" anchor="t">
+            <a:spAutoFit/>
+          </a:bodyPr>
+          <a:lstStyle/>
+          <a:p>
+            <a:pPr algn="ctr">
+              <a:spcAft>
+                <a:spcPts val="0"/>
+              </a:spcAft>
+            </a:pPr>
+            <a:r>
+              <a:rPr sz="1400" b="1" i="0">
+                <a:solidFill>
+                  <a:srgbClr val="FFFFFF"/>
+                </a:solidFill>
+                <a:latin typeface="Calibri"/>
+              </a:rPr>
+              <a:t>Actual $7.75bn</a:t>
+            </a:r>
+          </a:p>
+        </p:txBody>
+      </p:sp>
+      <p:sp>
+        <p:nvSpPr>
+          <p:cNvPr id="31" name="TextBox 30"/>
+          <p:cNvSpPr txBox="1"/>
+          <p:nvPr/>
+        </p:nvSpPr>
+        <p:spPr>
+          <a:xfrm>
+            <a:off x="9281159" y="4754880"/>
+            <a:ext cx="2361895" cy="731520"/>
           </a:xfrm>
           <a:prstGeom prst="rect">
             <a:avLst/>
@@ -6596,38 +5620,15 @@
               </a:spcAft>
             </a:pPr>
             <a:r>
-              <a:rPr sz="1200" b="0" i="0">
-                <a:solidFill>
-                  <a:srgbClr val="AEB8C6"/>
+              <a:rPr sz="2600" b="1" i="0">
+                <a:solidFill>
+                  <a:srgbClr val="FFFFFF"/>
                 </a:solidFill>
                 <a:latin typeface="Calibri"/>
               </a:rPr>
-              <a:t>B1  packet (reported Q2)</a:t>
-            </a:r>
-          </a:p>
-        </p:txBody>
-      </p:sp>
-      <p:sp>
-        <p:nvSpPr>
-          <p:cNvPr id="30" name="TextBox 29"/>
-          <p:cNvSpPr txBox="1"/>
-          <p:nvPr/>
-        </p:nvSpPr>
-        <p:spPr>
-          <a:xfrm>
-            <a:off x="3390823" y="5806440"/>
-            <a:ext cx="2567863" cy="320040"/>
-          </a:xfrm>
-          <a:prstGeom prst="rect">
-            <a:avLst/>
-          </a:prstGeom>
-          <a:noFill/>
-        </p:spPr>
-        <p:txBody>
-          <a:bodyPr wrap="square" lIns="0" rIns="0" tIns="0" bIns="0" anchor="t">
-            <a:spAutoFit/>
-          </a:bodyPr>
-          <a:lstStyle/>
+              <a:t>2.7% low</a:t>
+            </a:r>
+          </a:p>
           <a:p>
             <a:pPr algn="l">
               <a:spcAft>
@@ -6635,27 +5636,27 @@
               </a:spcAft>
             </a:pPr>
             <a:r>
-              <a:rPr sz="1600" b="1" i="0">
-                <a:solidFill>
-                  <a:srgbClr val="FFFFFF"/>
+              <a:rPr sz="1400" b="0" i="0">
+                <a:solidFill>
+                  <a:srgbClr val="2A9D8F"/>
                 </a:solidFill>
                 <a:latin typeface="Calibri"/>
               </a:rPr>
-              <a:t>33,436k  ·  $220.67</a:t>
-            </a:r>
-          </a:p>
-        </p:txBody>
-      </p:sp>
-      <p:sp>
-        <p:nvSpPr>
-          <p:cNvPr id="31" name="TextBox 30"/>
+              <a:t>✓ inside 80% band</a:t>
+            </a:r>
+          </a:p>
+        </p:txBody>
+      </p:sp>
+      <p:sp>
+        <p:nvSpPr>
+          <p:cNvPr id="32" name="TextBox 31"/>
           <p:cNvSpPr txBox="1"/>
           <p:nvPr/>
         </p:nvSpPr>
         <p:spPr>
           <a:xfrm>
-            <a:off x="3390823" y="6153912"/>
-            <a:ext cx="2567863" cy="274320"/>
+            <a:off x="548640" y="5989320"/>
+            <a:ext cx="11094415" cy="365760"/>
           </a:xfrm>
           <a:prstGeom prst="rect">
             <a:avLst/>
@@ -6674,247 +5675,31 @@
               </a:spcAft>
             </a:pPr>
             <a:r>
-              <a:rPr sz="1200" b="0" i="1">
-                <a:solidFill>
-                  <a:srgbClr val="E9A13B"/>
+              <a:rPr sz="1600" b="0" i="0">
+                <a:solidFill>
+                  <a:srgbClr val="AEB8C6"/>
                 </a:solidFill>
                 <a:latin typeface="Calibri"/>
               </a:rPr>
-              <a:t>[error vs actual]</a:t>
-            </a:r>
-          </a:p>
-        </p:txBody>
-      </p:sp>
-      <p:sp>
-        <p:nvSpPr>
-          <p:cNvPr id="32" name="TextBox 31"/>
-          <p:cNvSpPr txBox="1"/>
-          <p:nvPr/>
-        </p:nvSpPr>
-        <p:spPr>
-          <a:xfrm>
-            <a:off x="6233007" y="5559552"/>
-            <a:ext cx="2567863" cy="274320"/>
-          </a:xfrm>
-          <a:prstGeom prst="rect">
-            <a:avLst/>
-          </a:prstGeom>
-          <a:noFill/>
-        </p:spPr>
-        <p:txBody>
-          <a:bodyPr wrap="square" lIns="0" rIns="0" tIns="0" bIns="0" anchor="t">
-            <a:spAutoFit/>
-          </a:bodyPr>
-          <a:lstStyle/>
-          <a:p>
-            <a:pPr algn="l">
-              <a:spcAft>
-                <a:spcPts val="0"/>
-              </a:spcAft>
-            </a:pPr>
-            <a:r>
-              <a:rPr sz="1200" b="0" i="0">
-                <a:solidFill>
-                  <a:srgbClr val="AEB8C6"/>
+              <a:t>Passenger revenue landed </a:t>
+            </a:r>
+            <a:r>
+              <a:rPr sz="1600" b="1" i="0">
+                <a:solidFill>
+                  <a:srgbClr val="FFFFFF"/>
                 </a:solidFill>
                 <a:latin typeface="Calibri"/>
               </a:rPr>
-              <a:t>B1  rebuilt ex-breakage</a:t>
-            </a:r>
-          </a:p>
-        </p:txBody>
-      </p:sp>
-      <p:sp>
-        <p:nvSpPr>
-          <p:cNvPr id="33" name="TextBox 32"/>
-          <p:cNvSpPr txBox="1"/>
-          <p:nvPr/>
-        </p:nvSpPr>
-        <p:spPr>
-          <a:xfrm>
-            <a:off x="6233007" y="5806440"/>
-            <a:ext cx="2567863" cy="320040"/>
-          </a:xfrm>
-          <a:prstGeom prst="rect">
-            <a:avLst/>
-          </a:prstGeom>
-          <a:noFill/>
-        </p:spPr>
-        <p:txBody>
-          <a:bodyPr wrap="square" lIns="0" rIns="0" tIns="0" bIns="0" anchor="t">
-            <a:spAutoFit/>
-          </a:bodyPr>
-          <a:lstStyle/>
-          <a:p>
-            <a:pPr algn="l">
-              <a:spcAft>
-                <a:spcPts val="0"/>
-              </a:spcAft>
-            </a:pPr>
-            <a:r>
-              <a:rPr sz="1600" b="1" i="0">
-                <a:solidFill>
-                  <a:srgbClr val="FFFFFF"/>
+              <a:t>above the $7.39bn–$7.60bn band</a:t>
+            </a:r>
+            <a:r>
+              <a:rPr sz="1600" b="0" i="0">
+                <a:solidFill>
+                  <a:srgbClr val="AEB8C6"/>
                 </a:solidFill>
                 <a:latin typeface="Calibri"/>
               </a:rPr>
-              <a:t>33,436k  ·  $228.78</a:t>
-            </a:r>
-          </a:p>
-        </p:txBody>
-      </p:sp>
-      <p:sp>
-        <p:nvSpPr>
-          <p:cNvPr id="34" name="TextBox 33"/>
-          <p:cNvSpPr txBox="1"/>
-          <p:nvPr/>
-        </p:nvSpPr>
-        <p:spPr>
-          <a:xfrm>
-            <a:off x="6233007" y="6153912"/>
-            <a:ext cx="2567863" cy="274320"/>
-          </a:xfrm>
-          <a:prstGeom prst="rect">
-            <a:avLst/>
-          </a:prstGeom>
-          <a:noFill/>
-        </p:spPr>
-        <p:txBody>
-          <a:bodyPr wrap="square" lIns="0" rIns="0" tIns="0" bIns="0" anchor="t">
-            <a:spAutoFit/>
-          </a:bodyPr>
-          <a:lstStyle/>
-          <a:p>
-            <a:pPr algn="l">
-              <a:spcAft>
-                <a:spcPts val="0"/>
-              </a:spcAft>
-            </a:pPr>
-            <a:r>
-              <a:rPr sz="1200" b="0" i="1">
-                <a:solidFill>
-                  <a:srgbClr val="E9A13B"/>
-                </a:solidFill>
-                <a:latin typeface="Calibri"/>
-              </a:rPr>
-              <a:t>[error vs actual]</a:t>
-            </a:r>
-          </a:p>
-        </p:txBody>
-      </p:sp>
-      <p:sp>
-        <p:nvSpPr>
-          <p:cNvPr id="35" name="TextBox 34"/>
-          <p:cNvSpPr txBox="1"/>
-          <p:nvPr/>
-        </p:nvSpPr>
-        <p:spPr>
-          <a:xfrm>
-            <a:off x="9075191" y="5559552"/>
-            <a:ext cx="2567863" cy="274320"/>
-          </a:xfrm>
-          <a:prstGeom prst="rect">
-            <a:avLst/>
-          </a:prstGeom>
-          <a:noFill/>
-        </p:spPr>
-        <p:txBody>
-          <a:bodyPr wrap="square" lIns="0" rIns="0" tIns="0" bIns="0" anchor="t">
-            <a:spAutoFit/>
-          </a:bodyPr>
-          <a:lstStyle/>
-          <a:p>
-            <a:pPr algn="l">
-              <a:spcAft>
-                <a:spcPts val="0"/>
-              </a:spcAft>
-            </a:pPr>
-            <a:r>
-              <a:rPr sz="1200" b="0" i="0">
-                <a:solidFill>
-                  <a:srgbClr val="AEB8C6"/>
-                </a:solidFill>
-                <a:latin typeface="Calibri"/>
-              </a:rPr>
-              <a:t>Kalshi fare market, Oct 20</a:t>
-            </a:r>
-          </a:p>
-        </p:txBody>
-      </p:sp>
-      <p:sp>
-        <p:nvSpPr>
-          <p:cNvPr id="36" name="TextBox 35"/>
-          <p:cNvSpPr txBox="1"/>
-          <p:nvPr/>
-        </p:nvSpPr>
-        <p:spPr>
-          <a:xfrm>
-            <a:off x="9075191" y="5806440"/>
-            <a:ext cx="2567863" cy="320040"/>
-          </a:xfrm>
-          <a:prstGeom prst="rect">
-            <a:avLst/>
-          </a:prstGeom>
-          <a:noFill/>
-        </p:spPr>
-        <p:txBody>
-          <a:bodyPr wrap="square" lIns="0" rIns="0" tIns="0" bIns="0" anchor="t">
-            <a:spAutoFit/>
-          </a:bodyPr>
-          <a:lstStyle/>
-          <a:p>
-            <a:pPr algn="l">
-              <a:spcAft>
-                <a:spcPts val="0"/>
-              </a:spcAft>
-            </a:pPr>
-            <a:r>
-              <a:rPr sz="1600" b="1" i="0">
-                <a:solidFill>
-                  <a:srgbClr val="FFFFFF"/>
-                </a:solidFill>
-                <a:latin typeface="Calibri"/>
-              </a:rPr>
-              <a:t>median ≈ $229.71</a:t>
-            </a:r>
-          </a:p>
-        </p:txBody>
-      </p:sp>
-      <p:sp>
-        <p:nvSpPr>
-          <p:cNvPr id="37" name="TextBox 36"/>
-          <p:cNvSpPr txBox="1"/>
-          <p:nvPr/>
-        </p:nvSpPr>
-        <p:spPr>
-          <a:xfrm>
-            <a:off x="9075191" y="6153912"/>
-            <a:ext cx="2567863" cy="274320"/>
-          </a:xfrm>
-          <a:prstGeom prst="rect">
-            <a:avLst/>
-          </a:prstGeom>
-          <a:noFill/>
-        </p:spPr>
-        <p:txBody>
-          <a:bodyPr wrap="square" lIns="0" rIns="0" tIns="0" bIns="0" anchor="t">
-            <a:spAutoFit/>
-          </a:bodyPr>
-          <a:lstStyle/>
-          <a:p>
-            <a:pPr algn="l">
-              <a:spcAft>
-                <a:spcPts val="0"/>
-              </a:spcAft>
-            </a:pPr>
-            <a:r>
-              <a:rPr sz="1200" b="0" i="1">
-                <a:solidFill>
-                  <a:srgbClr val="E9A13B"/>
-                </a:solidFill>
-                <a:latin typeface="Calibri"/>
-              </a:rPr>
-              <a:t>[error vs actual]</a:t>
+              <a:t> that Southwest's own guidance implied.</a:t>
             </a:r>
           </a:p>
         </p:txBody>
@@ -6957,7 +5742,7 @@
         </p:nvSpPr>
         <p:spPr>
           <a:xfrm>
-            <a:off x="548640" y="384048"/>
+            <a:off x="548640" y="685800"/>
             <a:ext cx="11094415" cy="731520"/>
           </a:xfrm>
         </p:spPr>
@@ -6980,18 +5765,57 @@
       </p:sp>
       <p:sp>
         <p:nvSpPr>
-          <p:cNvPr id="3" name="Trip factor callout"/>
+          <p:cNvPr id="3" name="Kicker"/>
+          <p:cNvSpPr txBox="1"/>
+          <p:nvPr/>
+        </p:nvSpPr>
+        <p:spPr>
+          <a:xfrm>
+            <a:off x="548640" y="411480"/>
+            <a:ext cx="11094415" cy="274320"/>
+          </a:xfrm>
+          <a:prstGeom prst="rect">
+            <a:avLst/>
+          </a:prstGeom>
+          <a:noFill/>
+        </p:spPr>
+        <p:txBody>
+          <a:bodyPr wrap="square" lIns="0" rIns="0" tIns="0" bIns="0" anchor="t">
+            <a:spAutoFit/>
+          </a:bodyPr>
+          <a:lstStyle/>
+          <a:p>
+            <a:pPr algn="l">
+              <a:spcAft>
+                <a:spcPts val="0"/>
+              </a:spcAft>
+            </a:pPr>
+            <a:r>
+              <a:rPr sz="1300" b="1" i="0">
+                <a:solidFill>
+                  <a:srgbClr val="1F3B73"/>
+                </a:solidFill>
+                <a:latin typeface="Calibri"/>
+              </a:rPr>
+              <a:t>2  ·  DATA AND CLEANING DECISIONS</a:t>
+            </a:r>
+          </a:p>
+        </p:txBody>
+      </p:sp>
+      <p:sp>
+        <p:nvSpPr>
+          <p:cNvPr id="4" name="Boardings vs passengers"/>
           <p:cNvSpPr/>
           <p:nvPr/>
         </p:nvSpPr>
         <p:spPr>
           <a:xfrm>
-            <a:off x="548640" y="1371600"/>
-            <a:ext cx="3749039" cy="4892040"/>
+            <a:off x="548640" y="1737360"/>
+            <a:ext cx="4297680" cy="4343400"/>
           </a:xfrm>
           <a:prstGeom prst="roundRect">
             <a:avLst>
-              <a:gd name="adj" fmla="val 6000"/>
+              <a:gd name="adj" fmla="val 12000"/>
             </a:avLst>
           </a:prstGeom>
           <a:solidFill>
@@ -7026,14 +5850,14 @@
       </p:sp>
       <p:sp>
         <p:nvSpPr>
-          <p:cNvPr id="4" name="TextBox 3"/>
+          <p:cNvPr id="5" name="TextBox 4"/>
           <p:cNvSpPr txBox="1"/>
           <p:nvPr/>
         </p:nvSpPr>
         <p:spPr>
           <a:xfrm>
-            <a:off x="868680" y="1645920"/>
-            <a:ext cx="3108959" cy="320040"/>
+            <a:off x="914400" y="2011680"/>
+            <a:ext cx="3566160" cy="274320"/>
           </a:xfrm>
           <a:prstGeom prst="rect">
             <a:avLst/>
@@ -7052,7 +5876,7 @@
               </a:spcAft>
             </a:pPr>
             <a:r>
-              <a:rPr sz="1200" b="1" i="0">
+              <a:rPr sz="1300" b="1" i="0">
                 <a:solidFill>
                   <a:srgbClr val="5B6573"/>
                 </a:solidFill>
@@ -7065,14 +5889,14 @@
       </p:sp>
       <p:sp>
         <p:nvSpPr>
-          <p:cNvPr id="5" name="TextBox 4"/>
+          <p:cNvPr id="6" name="TextBox 5"/>
           <p:cNvSpPr txBox="1"/>
           <p:nvPr/>
         </p:nvSpPr>
         <p:spPr>
           <a:xfrm>
-            <a:off x="868680" y="2011680"/>
-            <a:ext cx="3108959" cy="731520"/>
+            <a:off x="914400" y="2423160"/>
+            <a:ext cx="3566160" cy="822960"/>
           </a:xfrm>
           <a:prstGeom prst="rect">
             <a:avLst/>
@@ -7091,7 +5915,7 @@
               </a:spcAft>
             </a:pPr>
             <a:r>
-              <a:rPr sz="4000" b="1" i="0">
+              <a:rPr sz="5400" b="1" i="0">
                 <a:solidFill>
                   <a:srgbClr val="1F3B73"/>
                 </a:solidFill>
@@ -7100,27 +5924,27 @@
               <a:t>+0.3%</a:t>
             </a:r>
             <a:r>
-              <a:rPr sz="1800" b="0" i="0">
+              <a:rPr sz="2000" b="0" i="0">
                 <a:solidFill>
                   <a:srgbClr val="1B1F24"/>
                 </a:solidFill>
                 <a:latin typeface="Calibri"/>
               </a:rPr>
-              <a:t>  enplaned</a:t>
-            </a:r>
-          </a:p>
-        </p:txBody>
-      </p:sp>
-      <p:sp>
-        <p:nvSpPr>
-          <p:cNvPr id="6" name="TextBox 5"/>
+              <a:t>  boardings</a:t>
+            </a:r>
+          </a:p>
+        </p:txBody>
+      </p:sp>
+      <p:sp>
+        <p:nvSpPr>
+          <p:cNvPr id="7" name="TextBox 6"/>
           <p:cNvSpPr txBox="1"/>
           <p:nvPr/>
         </p:nvSpPr>
         <p:spPr>
           <a:xfrm>
-            <a:off x="868680" y="2743200"/>
-            <a:ext cx="3108959" cy="731520"/>
+            <a:off x="914400" y="3337560"/>
+            <a:ext cx="3566160" cy="822960"/>
           </a:xfrm>
           <a:prstGeom prst="rect">
             <a:avLst/>
@@ -7139,7 +5963,7 @@
               </a:spcAft>
             </a:pPr>
             <a:r>
-              <a:rPr sz="4000" b="1" i="0">
+              <a:rPr sz="5400" b="1" i="0">
                 <a:solidFill>
                   <a:srgbClr val="D1495B"/>
                 </a:solidFill>
@@ -7148,27 +5972,27 @@
               <a:t>−3.3%</a:t>
             </a:r>
             <a:r>
-              <a:rPr sz="1800" b="0" i="0">
+              <a:rPr sz="2000" b="0" i="0">
                 <a:solidFill>
                   <a:srgbClr val="1B1F24"/>
                 </a:solidFill>
                 <a:latin typeface="Calibri"/>
               </a:rPr>
-              <a:t>  revenue pax</a:t>
-            </a:r>
-          </a:p>
-        </p:txBody>
-      </p:sp>
-      <p:sp>
-        <p:nvSpPr>
-          <p:cNvPr id="7" name="TextBox 6"/>
+              <a:t>  paying trips</a:t>
+            </a:r>
+          </a:p>
+        </p:txBody>
+      </p:sp>
+      <p:sp>
+        <p:nvSpPr>
+          <p:cNvPr id="8" name="TextBox 7"/>
           <p:cNvSpPr txBox="1"/>
           <p:nvPr/>
         </p:nvSpPr>
         <p:spPr>
           <a:xfrm>
-            <a:off x="868680" y="3703320"/>
-            <a:ext cx="3108959" cy="2377440"/>
+            <a:off x="914400" y="4572000"/>
+            <a:ext cx="3566160" cy="1280160"/>
           </a:xfrm>
           <a:prstGeom prst="rect">
             <a:avLst/>
@@ -7183,570 +6007,426 @@
           <a:p>
             <a:pPr algn="l">
               <a:spcAft>
-                <a:spcPts val="800"/>
+                <a:spcPts val="0"/>
               </a:spcAft>
             </a:pPr>
             <a:r>
-              <a:rPr sz="1400" b="0" i="0">
+              <a:rPr sz="1700" b="0" i="0">
                 <a:solidFill>
                   <a:srgbClr val="1B1F24"/>
                 </a:solidFill>
                 <a:latin typeface="Calibri"/>
               </a:rPr>
-              <a:t>A checkpoint scan is a boarding. The target counts one-way paying trips. The bridge is the trip factor (enplaned ÷ revenue passengers), up 3.7% in a year as assigned seating pushed travellers onto connections.</a:t>
-            </a:r>
-          </a:p>
+              <a:t>The gap is the trip factor: boardings per paying trip. No public source reports it.</a:t>
+            </a:r>
+          </a:p>
+        </p:txBody>
+      </p:sp>
+      <p:sp>
+        <p:nvSpPr>
+          <p:cNvPr id="9" name="TextBox 8"/>
+          <p:cNvSpPr txBox="1"/>
+          <p:nvPr/>
+        </p:nvSpPr>
+        <p:spPr>
+          <a:xfrm>
+            <a:off x="5394959" y="1783080"/>
+            <a:ext cx="6248095" cy="274320"/>
+          </a:xfrm>
+          <a:prstGeom prst="rect">
+            <a:avLst/>
+          </a:prstGeom>
+          <a:noFill/>
+        </p:spPr>
+        <p:txBody>
+          <a:bodyPr wrap="square" lIns="0" rIns="0" tIns="0" bIns="0" anchor="t">
+            <a:spAutoFit/>
+          </a:bodyPr>
+          <a:lstStyle/>
           <a:p>
             <a:pPr algn="l">
               <a:spcAft>
-                <a:spcPts val="800"/>
+                <a:spcPts val="0"/>
               </a:spcAft>
             </a:pPr>
             <a:r>
-              <a:rPr sz="1400" b="1" i="0">
-                <a:solidFill>
-                  <a:srgbClr val="1B1F24"/>
+              <a:rPr sz="1300" b="1" i="0">
+                <a:solidFill>
+                  <a:srgbClr val="5B6573"/>
                 </a:solidFill>
                 <a:latin typeface="Calibri"/>
               </a:rPr>
-              <a:t>No free source observes it. </a:t>
-            </a:r>
-            <a:r>
-              <a:rPr sz="1400" b="0" i="0">
-                <a:solidFill>
-                  <a:srgbClr val="1B1F24"/>
+              <a:t>CLEANING DECISIONS</a:t>
+            </a:r>
+          </a:p>
+        </p:txBody>
+      </p:sp>
+      <p:sp>
+        <p:nvSpPr>
+          <p:cNvPr id="10" name="Rectangle 9"/>
+          <p:cNvSpPr/>
+          <p:nvPr/>
+        </p:nvSpPr>
+        <p:spPr>
+          <a:xfrm>
+            <a:off x="5394959" y="2286000"/>
+            <a:ext cx="73152" cy="914400"/>
+          </a:xfrm>
+          <a:prstGeom prst="rect">
+            <a:avLst/>
+          </a:prstGeom>
+          <a:solidFill>
+            <a:srgbClr val="1F3B73"/>
+          </a:solidFill>
+          <a:ln>
+            <a:noFill/>
+          </a:ln>
+          <a:effectLst/>
+        </p:spPr>
+        <p:style>
+          <a:lnRef idx="1">
+            <a:schemeClr val="accent1"/>
+          </a:lnRef>
+          <a:fillRef idx="3">
+            <a:schemeClr val="accent1"/>
+          </a:fillRef>
+          <a:effectRef idx="2">
+            <a:schemeClr val="accent1"/>
+          </a:effectRef>
+          <a:fontRef idx="minor">
+            <a:schemeClr val="lt1"/>
+          </a:fontRef>
+        </p:style>
+        <p:txBody>
+          <a:bodyPr rtlCol="0" anchor="ctr"/>
+          <a:lstStyle/>
+          <a:p>
+            <a:pPr algn="ctr"/>
+          </a:p>
+        </p:txBody>
+      </p:sp>
+      <p:sp>
+        <p:nvSpPr>
+          <p:cNvPr id="11" name="TextBox 10"/>
+          <p:cNvSpPr txBox="1"/>
+          <p:nvPr/>
+        </p:nvSpPr>
+        <p:spPr>
+          <a:xfrm>
+            <a:off x="5714999" y="2240280"/>
+            <a:ext cx="5928055" cy="365760"/>
+          </a:xfrm>
+          <a:prstGeom prst="rect">
+            <a:avLst/>
+          </a:prstGeom>
+          <a:noFill/>
+        </p:spPr>
+        <p:txBody>
+          <a:bodyPr wrap="square" lIns="0" rIns="0" tIns="0" bIns="0" anchor="t">
+            <a:spAutoFit/>
+          </a:bodyPr>
+          <a:lstStyle/>
+          <a:p>
+            <a:pPr algn="l">
+              <a:spcAft>
+                <a:spcPts val="0"/>
+              </a:spcAft>
+            </a:pPr>
+            <a:r>
+              <a:rPr sz="2000" b="1" i="0">
+                <a:solidFill>
+                  <a:srgbClr val="15202B"/>
                 </a:solidFill>
                 <a:latin typeface="Calibri"/>
               </a:rPr>
-              <a:t>We extrapolate it from four post-break quarters, and it swings our answer by ~1,000k.</a:t>
-            </a:r>
-          </a:p>
-        </p:txBody>
-      </p:sp>
-      <p:graphicFrame>
-        <p:nvGraphicFramePr>
-          <p:cNvPr id="8" name="Cleaning decisions"/>
-          <p:cNvGraphicFramePr>
-            <a:graphicFrameLocks noGrp="1"/>
-          </p:cNvGraphicFramePr>
+              <a:t>TSA checkpoint, daily</a:t>
+            </a:r>
+          </a:p>
+        </p:txBody>
+      </p:sp>
+      <p:sp>
+        <p:nvSpPr>
+          <p:cNvPr id="12" name="TextBox 11"/>
+          <p:cNvSpPr txBox="1"/>
           <p:nvPr/>
-        </p:nvGraphicFramePr>
-        <p:xfrm>
-          <a:off x="4663440" y="1371600"/>
-          <a:ext cx="6979615" cy="4892040"/>
-        </p:xfrm>
-        <a:graphic>
-          <a:graphicData uri="http://schemas.openxmlformats.org/drawingml/2006/table">
-            <a:tbl>
-              <a:tblPr firstRow="1" bandRow="1">
-                <a:tableStyleId>{5C22544A-7EE6-4342-B048-85BDC9FD1C3A}</a:tableStyleId>
-              </a:tblPr>
-              <a:tblGrid>
-                <a:gridCol w="1783080"/>
-                <a:gridCol w="2788920"/>
-                <a:gridCol w="2407615"/>
-              </a:tblGrid>
-              <a:tr h="698862">
-                <a:tc>
-                  <a:txBody>
-                    <a:bodyPr wrap="square"/>
-                    <a:lstStyle/>
-                    <a:p>
-                      <a:pPr algn="l"/>
-                      <a:r>
-                        <a:rPr sz="1300" b="1" i="0">
-                          <a:solidFill>
-                            <a:srgbClr val="FFFFFF"/>
-                          </a:solidFill>
-                          <a:latin typeface="Calibri"/>
-                        </a:rPr>
-                        <a:t>Source</a:t>
-                      </a:r>
-                    </a:p>
-                  </a:txBody>
-                  <a:tcPr marL="91440" marR="91440" marT="45720" marB="45720" anchor="ctr">
-                    <a:solidFill>
-                      <a:srgbClr val="1F3B73"/>
-                    </a:solidFill>
-                  </a:tcPr>
-                </a:tc>
-                <a:tc>
-                  <a:txBody>
-                    <a:bodyPr wrap="square"/>
-                    <a:lstStyle/>
-                    <a:p>
-                      <a:pPr algn="l"/>
-                      <a:r>
-                        <a:rPr sz="1300" b="1" i="0">
-                          <a:solidFill>
-                            <a:srgbClr val="FFFFFF"/>
-                          </a:solidFill>
-                          <a:latin typeface="Calibri"/>
-                        </a:rPr>
-                        <a:t>Cleaning decision</a:t>
-                      </a:r>
-                    </a:p>
-                  </a:txBody>
-                  <a:tcPr marL="91440" marR="91440" marT="45720" marB="45720" anchor="ctr">
-                    <a:solidFill>
-                      <a:srgbClr val="1F3B73"/>
-                    </a:solidFill>
-                  </a:tcPr>
-                </a:tc>
-                <a:tc>
-                  <a:txBody>
-                    <a:bodyPr wrap="square"/>
-                    <a:lstStyle/>
-                    <a:p>
-                      <a:pPr algn="l"/>
-                      <a:r>
-                        <a:rPr sz="1300" b="1" i="0">
-                          <a:solidFill>
-                            <a:srgbClr val="FFFFFF"/>
-                          </a:solidFill>
-                          <a:latin typeface="Calibri"/>
-                        </a:rPr>
-                        <a:t>Why</a:t>
-                      </a:r>
-                    </a:p>
-                  </a:txBody>
-                  <a:tcPr marL="91440" marR="91440" marT="45720" marB="45720" anchor="ctr">
-                    <a:solidFill>
-                      <a:srgbClr val="1F3B73"/>
-                    </a:solidFill>
-                  </a:tcPr>
-                </a:tc>
-              </a:tr>
-              <a:tr h="698862">
-                <a:tc>
-                  <a:txBody>
-                    <a:bodyPr wrap="square"/>
-                    <a:lstStyle/>
-                    <a:p>
-                      <a:pPr algn="l"/>
-                      <a:r>
-                        <a:rPr sz="1300" b="1" i="0">
-                          <a:solidFill>
-                            <a:srgbClr val="1B1F24"/>
-                          </a:solidFill>
-                          <a:latin typeface="Calibri"/>
-                        </a:rPr>
-                        <a:t>TSA daily, 2,830 days</a:t>
-                      </a:r>
-                    </a:p>
-                  </a:txBody>
-                  <a:tcPr marL="91440" marR="91440" marT="45720" marB="45720" anchor="ctr">
-                    <a:solidFill>
-                      <a:srgbClr val="FFFFFF"/>
-                    </a:solidFill>
-                  </a:tcPr>
-                </a:tc>
-                <a:tc>
-                  <a:txBody>
-                    <a:bodyPr wrap="square"/>
-                    <a:lstStyle/>
-                    <a:p>
-                      <a:pPr algn="l"/>
-                      <a:r>
-                        <a:rPr sz="1300" b="0" i="0">
-                          <a:solidFill>
-                            <a:srgbClr val="1B1F24"/>
-                          </a:solidFill>
-                          <a:latin typeface="Calibri"/>
-                        </a:rPr>
-                        <a:t>No day imputed. Both funding lapses flagged, neither repaired</a:t>
-                      </a:r>
-                    </a:p>
-                  </a:txBody>
-                  <a:tcPr marL="91440" marR="91440" marT="45720" marB="45720" anchor="ctr">
-                    <a:solidFill>
-                      <a:srgbClr val="FFFFFF"/>
-                    </a:solidFill>
-                  </a:tcPr>
-                </a:tc>
-                <a:tc>
-                  <a:txBody>
-                    <a:bodyPr wrap="square"/>
-                    <a:lstStyle/>
-                    <a:p>
-                      <a:pPr algn="l"/>
-                      <a:r>
-                        <a:rPr sz="1300" b="0" i="0">
-                          <a:solidFill>
-                            <a:srgbClr val="1B1F24"/>
-                          </a:solidFill>
-                          <a:latin typeface="Calibri"/>
-                        </a:rPr>
-                        <a:t>No dip once trend is controlled; the packet's −6.7% is not in this file</a:t>
-                      </a:r>
-                    </a:p>
-                  </a:txBody>
-                  <a:tcPr marL="91440" marR="91440" marT="45720" marB="45720" anchor="ctr">
-                    <a:solidFill>
-                      <a:srgbClr val="FFFFFF"/>
-                    </a:solidFill>
-                  </a:tcPr>
-                </a:tc>
-              </a:tr>
-              <a:tr h="698862">
-                <a:tc>
-                  <a:txBody>
-                    <a:bodyPr wrap="square"/>
-                    <a:lstStyle/>
-                    <a:p>
-                      <a:pPr algn="l"/>
-                      <a:r>
-                        <a:rPr sz="1300" b="1" i="0">
-                          <a:solidFill>
-                            <a:srgbClr val="1B1F24"/>
-                          </a:solidFill>
-                          <a:latin typeface="Calibri"/>
-                        </a:rPr>
-                        <a:t>BTS T-100, Southwest</a:t>
-                      </a:r>
-                    </a:p>
-                  </a:txBody>
-                  <a:tcPr marL="91440" marR="91440" marT="45720" marB="45720" anchor="ctr">
-                    <a:solidFill>
-                      <a:srgbClr val="EEF2F7"/>
-                    </a:solidFill>
-                  </a:tcPr>
-                </a:tc>
-                <a:tc>
-                  <a:txBody>
-                    <a:bodyPr wrap="square"/>
-                    <a:lstStyle/>
-                    <a:p>
-                      <a:pPr algn="l"/>
-                      <a:r>
-                        <a:rPr sz="1300" b="0" i="0">
-                          <a:solidFill>
-                            <a:srgbClr val="1B1F24"/>
-                          </a:solidFill>
-                          <a:latin typeface="Calibri"/>
-                        </a:rPr>
-                        <a:t>July is a filing; Aug–Sep nowcast from TSA × share</a:t>
-                      </a:r>
-                    </a:p>
-                  </a:txBody>
-                  <a:tcPr marL="91440" marR="91440" marT="45720" marB="45720" anchor="ctr">
-                    <a:solidFill>
-                      <a:srgbClr val="EEF2F7"/>
-                    </a:solidFill>
-                  </a:tcPr>
-                </a:tc>
-                <a:tc>
-                  <a:txBody>
-                    <a:bodyPr wrap="square"/>
-                    <a:lstStyle/>
-                    <a:p>
-                      <a:pPr algn="l"/>
-                      <a:r>
-                        <a:rPr sz="1300" b="0" i="0">
-                          <a:solidFill>
-                            <a:srgbClr val="1B1F24"/>
-                          </a:solidFill>
-                          <a:latin typeface="Calibri"/>
-                        </a:rPr>
-                        <a:t>BTS publishes ~3 months late</a:t>
-                      </a:r>
-                    </a:p>
-                  </a:txBody>
-                  <a:tcPr marL="91440" marR="91440" marT="45720" marB="45720" anchor="ctr">
-                    <a:solidFill>
-                      <a:srgbClr val="EEF2F7"/>
-                    </a:solidFill>
-                  </a:tcPr>
-                </a:tc>
-              </a:tr>
-              <a:tr h="698862">
-                <a:tc>
-                  <a:txBody>
-                    <a:bodyPr wrap="square"/>
-                    <a:lstStyle/>
-                    <a:p>
-                      <a:pPr algn="l"/>
-                      <a:r>
-                        <a:rPr sz="1300" b="1" i="0">
-                          <a:solidFill>
-                            <a:srgbClr val="1B1F24"/>
-                          </a:solidFill>
-                          <a:latin typeface="Calibri"/>
-                        </a:rPr>
-                        <a:t>Southwest quarterly</a:t>
-                      </a:r>
-                    </a:p>
-                  </a:txBody>
-                  <a:tcPr marL="91440" marR="91440" marT="45720" marB="45720" anchor="ctr">
-                    <a:solidFill>
-                      <a:srgbClr val="FFFFFF"/>
-                    </a:solidFill>
-                  </a:tcPr>
-                </a:tc>
-                <a:tc>
-                  <a:txBody>
-                    <a:bodyPr wrap="square"/>
-                    <a:lstStyle/>
-                    <a:p>
-                      <a:pPr algn="l"/>
-                      <a:r>
-                        <a:rPr sz="1300" b="0" i="0">
-                          <a:solidFill>
-                            <a:srgbClr val="1B1F24"/>
-                          </a:solidFill>
-                          <a:latin typeface="Calibri"/>
-                        </a:rPr>
-                        <a:t>Q2 2026 +$285M breakage added back</a:t>
-                      </a:r>
-                    </a:p>
-                  </a:txBody>
-                  <a:tcPr marL="91440" marR="91440" marT="45720" marB="45720" anchor="ctr">
-                    <a:solidFill>
-                      <a:srgbClr val="FFFFFF"/>
-                    </a:solidFill>
-                  </a:tcPr>
-                </a:tc>
-                <a:tc>
-                  <a:txBody>
-                    <a:bodyPr wrap="square"/>
-                    <a:lstStyle/>
-                    <a:p>
-                      <a:pPr algn="l"/>
-                      <a:r>
-                        <a:rPr sz="1300" b="0" i="0">
-                          <a:solidFill>
-                            <a:srgbClr val="1B1F24"/>
-                          </a:solidFill>
-                          <a:latin typeface="Calibri"/>
-                        </a:rPr>
-                        <a:t>One-off: fare $225.61 → $233.90 underlying</a:t>
-                      </a:r>
-                    </a:p>
-                  </a:txBody>
-                  <a:tcPr marL="91440" marR="91440" marT="45720" marB="45720" anchor="ctr">
-                    <a:solidFill>
-                      <a:srgbClr val="FFFFFF"/>
-                    </a:solidFill>
-                  </a:tcPr>
-                </a:tc>
-              </a:tr>
-              <a:tr h="698862">
-                <a:tc>
-                  <a:txBody>
-                    <a:bodyPr wrap="square"/>
-                    <a:lstStyle/>
-                    <a:p>
-                      <a:pPr algn="l"/>
-                      <a:r>
-                        <a:rPr sz="1300" b="1" i="0">
-                          <a:solidFill>
-                            <a:srgbClr val="1B1F24"/>
-                          </a:solidFill>
-                          <a:latin typeface="Calibri"/>
-                        </a:rPr>
-                        <a:t>BLS airfare CPI</a:t>
-                      </a:r>
-                    </a:p>
-                  </a:txBody>
-                  <a:tcPr marL="91440" marR="91440" marT="45720" marB="45720" anchor="ctr">
-                    <a:solidFill>
-                      <a:srgbClr val="EEF2F7"/>
-                    </a:solidFill>
-                  </a:tcPr>
-                </a:tc>
-                <a:tc>
-                  <a:txBody>
-                    <a:bodyPr wrap="square"/>
-                    <a:lstStyle/>
-                    <a:p>
-                      <a:pPr algn="l"/>
-                      <a:r>
-                        <a:rPr sz="1300" b="0" i="0">
-                          <a:solidFill>
-                            <a:srgbClr val="1B1F24"/>
-                          </a:solidFill>
-                          <a:latin typeface="Calibri"/>
-                        </a:rPr>
-                        <a:t>Oct 2025 blank → interpolated</a:t>
-                      </a:r>
-                    </a:p>
-                  </a:txBody>
-                  <a:tcPr marL="91440" marR="91440" marT="45720" marB="45720" anchor="ctr">
-                    <a:solidFill>
-                      <a:srgbClr val="EEF2F7"/>
-                    </a:solidFill>
-                  </a:tcPr>
-                </a:tc>
-                <a:tc>
-                  <a:txBody>
-                    <a:bodyPr wrap="square"/>
-                    <a:lstStyle/>
-                    <a:p>
-                      <a:pPr algn="l"/>
-                      <a:r>
-                        <a:rPr sz="1300" b="0" i="0">
-                          <a:solidFill>
-                            <a:srgbClr val="1B1F24"/>
-                          </a:solidFill>
-                          <a:latin typeface="Calibri"/>
-                        </a:rPr>
-                        <a:t>Shutdown gap; touches Q4 2025 only</a:t>
-                      </a:r>
-                    </a:p>
-                  </a:txBody>
-                  <a:tcPr marL="91440" marR="91440" marT="45720" marB="45720" anchor="ctr">
-                    <a:solidFill>
-                      <a:srgbClr val="EEF2F7"/>
-                    </a:solidFill>
-                  </a:tcPr>
-                </a:tc>
-              </a:tr>
-              <a:tr h="698862">
-                <a:tc>
-                  <a:txBody>
-                    <a:bodyPr wrap="square"/>
-                    <a:lstStyle/>
-                    <a:p>
-                      <a:pPr algn="l"/>
-                      <a:r>
-                        <a:rPr sz="1300" b="1" i="0">
-                          <a:solidFill>
-                            <a:srgbClr val="1B1F24"/>
-                          </a:solidFill>
-                          <a:latin typeface="Calibri"/>
-                        </a:rPr>
-                        <a:t>EIA jet fuel spot</a:t>
-                      </a:r>
-                    </a:p>
-                  </a:txBody>
-                  <a:tcPr marL="91440" marR="91440" marT="45720" marB="45720" anchor="ctr">
-                    <a:solidFill>
-                      <a:srgbClr val="FFFFFF"/>
-                    </a:solidFill>
-                  </a:tcPr>
-                </a:tc>
-                <a:tc>
-                  <a:txBody>
-                    <a:bodyPr wrap="square"/>
-                    <a:lstStyle/>
-                    <a:p>
-                      <a:pPr algn="l"/>
-                      <a:r>
-                        <a:rPr sz="1300" b="0" i="0">
-                          <a:solidFill>
-                            <a:srgbClr val="1B1F24"/>
-                          </a:solidFill>
-                          <a:latin typeface="Calibri"/>
-                        </a:rPr>
-                        <a:t>87 holiday blanks dropped; add Southwest's premium over spot</a:t>
-                      </a:r>
-                    </a:p>
-                  </a:txBody>
-                  <a:tcPr marL="91440" marR="91440" marT="45720" marB="45720" anchor="ctr">
-                    <a:solidFill>
-                      <a:srgbClr val="FFFFFF"/>
-                    </a:solidFill>
-                  </a:tcPr>
-                </a:tc>
-                <a:tc>
-                  <a:txBody>
-                    <a:bodyPr wrap="square"/>
-                    <a:lstStyle/>
-                    <a:p>
-                      <a:pPr algn="l"/>
-                      <a:r>
-                        <a:rPr sz="1300" b="0" i="0">
-                          <a:solidFill>
-                            <a:srgbClr val="1B1F24"/>
-                          </a:solidFill>
-                          <a:latin typeface="Calibri"/>
-                        </a:rPr>
-                        <a:t>Wholesale is ~30¢ below what Southwest pays</a:t>
-                      </a:r>
-                    </a:p>
-                  </a:txBody>
-                  <a:tcPr marL="91440" marR="91440" marT="45720" marB="45720" anchor="ctr">
-                    <a:solidFill>
-                      <a:srgbClr val="FFFFFF"/>
-                    </a:solidFill>
-                  </a:tcPr>
-                </a:tc>
-              </a:tr>
-              <a:tr h="698868">
-                <a:tc>
-                  <a:txBody>
-                    <a:bodyPr wrap="square"/>
-                    <a:lstStyle/>
-                    <a:p>
-                      <a:pPr algn="l"/>
-                      <a:r>
-                        <a:rPr sz="1300" b="1" i="0">
-                          <a:solidFill>
-                            <a:srgbClr val="1B1F24"/>
-                          </a:solidFill>
-                          <a:latin typeface="Calibri"/>
-                        </a:rPr>
-                        <a:t>Google Trends</a:t>
-                      </a:r>
-                    </a:p>
-                  </a:txBody>
-                  <a:tcPr marL="91440" marR="91440" marT="45720" marB="45720" anchor="ctr">
-                    <a:solidFill>
-                      <a:srgbClr val="EEF2F7"/>
-                    </a:solidFill>
-                  </a:tcPr>
-                </a:tc>
-                <a:tc>
-                  <a:txBody>
-                    <a:bodyPr wrap="square"/>
-                    <a:lstStyle/>
-                    <a:p>
-                      <a:pPr algn="l"/>
-                      <a:r>
-                        <a:rPr sz="1300" b="0" i="0">
-                          <a:solidFill>
-                            <a:srgbClr val="1B1F24"/>
-                          </a:solidFill>
-                          <a:latin typeface="Calibri"/>
-                        </a:rPr>
-                        <a:t>Not used</a:t>
-                      </a:r>
-                    </a:p>
-                  </a:txBody>
-                  <a:tcPr marL="91440" marR="91440" marT="45720" marB="45720" anchor="ctr">
-                    <a:solidFill>
-                      <a:srgbClr val="EEF2F7"/>
-                    </a:solidFill>
-                  </a:tcPr>
-                </a:tc>
-                <a:tc>
-                  <a:txBody>
-                    <a:bodyPr wrap="square"/>
-                    <a:lstStyle/>
-                    <a:p>
-                      <a:pPr algn="l"/>
-                      <a:r>
-                        <a:rPr sz="1300" b="0" i="0">
-                          <a:solidFill>
-                            <a:srgbClr val="1B1F24"/>
-                          </a:solidFill>
-                          <a:latin typeface="Calibri"/>
-                        </a:rPr>
-                        <a:t>Rescaled on every pull: no stable history to backtest</a:t>
-                      </a:r>
-                    </a:p>
-                  </a:txBody>
-                  <a:tcPr marL="91440" marR="91440" marT="45720" marB="45720" anchor="ctr">
-                    <a:solidFill>
-                      <a:srgbClr val="EEF2F7"/>
-                    </a:solidFill>
-                  </a:tcPr>
-                </a:tc>
-              </a:tr>
-            </a:tbl>
-          </a:graphicData>
-        </a:graphic>
-      </p:graphicFrame>
+        </p:nvSpPr>
+        <p:spPr>
+          <a:xfrm>
+            <a:off x="5714999" y="2651760"/>
+            <a:ext cx="5928055" cy="548640"/>
+          </a:xfrm>
+          <a:prstGeom prst="rect">
+            <a:avLst/>
+          </a:prstGeom>
+          <a:noFill/>
+        </p:spPr>
+        <p:txBody>
+          <a:bodyPr wrap="square" lIns="0" rIns="0" tIns="0" bIns="0" anchor="t">
+            <a:spAutoFit/>
+          </a:bodyPr>
+          <a:lstStyle/>
+          <a:p>
+            <a:pPr algn="l">
+              <a:spcAft>
+                <a:spcPts val="0"/>
+              </a:spcAft>
+            </a:pPr>
+            <a:r>
+              <a:rPr sz="1700" b="0" i="0">
+                <a:solidFill>
+                  <a:srgbClr val="1B1F24"/>
+                </a:solidFill>
+                <a:latin typeface="Calibri"/>
+              </a:rPr>
+              <a:t>Nothing imputed. Both funding lapses flagged, not repaired.</a:t>
+            </a:r>
+          </a:p>
+        </p:txBody>
+      </p:sp>
+      <p:sp>
+        <p:nvSpPr>
+          <p:cNvPr id="13" name="Rectangle 12"/>
+          <p:cNvSpPr/>
+          <p:nvPr/>
+        </p:nvSpPr>
+        <p:spPr>
+          <a:xfrm>
+            <a:off x="5394959" y="3566160"/>
+            <a:ext cx="73152" cy="914400"/>
+          </a:xfrm>
+          <a:prstGeom prst="rect">
+            <a:avLst/>
+          </a:prstGeom>
+          <a:solidFill>
+            <a:srgbClr val="1F3B73"/>
+          </a:solidFill>
+          <a:ln>
+            <a:noFill/>
+          </a:ln>
+          <a:effectLst/>
+        </p:spPr>
+        <p:style>
+          <a:lnRef idx="1">
+            <a:schemeClr val="accent1"/>
+          </a:lnRef>
+          <a:fillRef idx="3">
+            <a:schemeClr val="accent1"/>
+          </a:fillRef>
+          <a:effectRef idx="2">
+            <a:schemeClr val="accent1"/>
+          </a:effectRef>
+          <a:fontRef idx="minor">
+            <a:schemeClr val="lt1"/>
+          </a:fontRef>
+        </p:style>
+        <p:txBody>
+          <a:bodyPr rtlCol="0" anchor="ctr"/>
+          <a:lstStyle/>
+          <a:p>
+            <a:pPr algn="ctr"/>
+          </a:p>
+        </p:txBody>
+      </p:sp>
+      <p:sp>
+        <p:nvSpPr>
+          <p:cNvPr id="14" name="TextBox 13"/>
+          <p:cNvSpPr txBox="1"/>
+          <p:nvPr/>
+        </p:nvSpPr>
+        <p:spPr>
+          <a:xfrm>
+            <a:off x="5714999" y="3520440"/>
+            <a:ext cx="5928055" cy="365760"/>
+          </a:xfrm>
+          <a:prstGeom prst="rect">
+            <a:avLst/>
+          </a:prstGeom>
+          <a:noFill/>
+        </p:spPr>
+        <p:txBody>
+          <a:bodyPr wrap="square" lIns="0" rIns="0" tIns="0" bIns="0" anchor="t">
+            <a:spAutoFit/>
+          </a:bodyPr>
+          <a:lstStyle/>
+          <a:p>
+            <a:pPr algn="l">
+              <a:spcAft>
+                <a:spcPts val="0"/>
+              </a:spcAft>
+            </a:pPr>
+            <a:r>
+              <a:rPr sz="2000" b="1" i="0">
+                <a:solidFill>
+                  <a:srgbClr val="15202B"/>
+                </a:solidFill>
+                <a:latin typeface="Calibri"/>
+              </a:rPr>
+              <a:t>Southwest Q2 release</a:t>
+            </a:r>
+          </a:p>
+        </p:txBody>
+      </p:sp>
+      <p:sp>
+        <p:nvSpPr>
+          <p:cNvPr id="15" name="TextBox 14"/>
+          <p:cNvSpPr txBox="1"/>
+          <p:nvPr/>
+        </p:nvSpPr>
+        <p:spPr>
+          <a:xfrm>
+            <a:off x="5714999" y="3931920"/>
+            <a:ext cx="5928055" cy="548640"/>
+          </a:xfrm>
+          <a:prstGeom prst="rect">
+            <a:avLst/>
+          </a:prstGeom>
+          <a:noFill/>
+        </p:spPr>
+        <p:txBody>
+          <a:bodyPr wrap="square" lIns="0" rIns="0" tIns="0" bIns="0" anchor="t">
+            <a:spAutoFit/>
+          </a:bodyPr>
+          <a:lstStyle/>
+          <a:p>
+            <a:pPr algn="l">
+              <a:spcAft>
+                <a:spcPts val="0"/>
+              </a:spcAft>
+            </a:pPr>
+            <a:r>
+              <a:rPr sz="1700" b="0" i="0">
+                <a:solidFill>
+                  <a:srgbClr val="1B1F24"/>
+                </a:solidFill>
+                <a:latin typeface="Calibri"/>
+              </a:rPr>
+              <a:t>$285M one-off added back: fare $225.61 → $233.90.</a:t>
+            </a:r>
+          </a:p>
+        </p:txBody>
+      </p:sp>
+      <p:sp>
+        <p:nvSpPr>
+          <p:cNvPr id="16" name="Rectangle 15"/>
+          <p:cNvSpPr/>
+          <p:nvPr/>
+        </p:nvSpPr>
+        <p:spPr>
+          <a:xfrm>
+            <a:off x="5394959" y="4846320"/>
+            <a:ext cx="73152" cy="914400"/>
+          </a:xfrm>
+          <a:prstGeom prst="rect">
+            <a:avLst/>
+          </a:prstGeom>
+          <a:solidFill>
+            <a:srgbClr val="1F3B73"/>
+          </a:solidFill>
+          <a:ln>
+            <a:noFill/>
+          </a:ln>
+          <a:effectLst/>
+        </p:spPr>
+        <p:style>
+          <a:lnRef idx="1">
+            <a:schemeClr val="accent1"/>
+          </a:lnRef>
+          <a:fillRef idx="3">
+            <a:schemeClr val="accent1"/>
+          </a:fillRef>
+          <a:effectRef idx="2">
+            <a:schemeClr val="accent1"/>
+          </a:effectRef>
+          <a:fontRef idx="minor">
+            <a:schemeClr val="lt1"/>
+          </a:fontRef>
+        </p:style>
+        <p:txBody>
+          <a:bodyPr rtlCol="0" anchor="ctr"/>
+          <a:lstStyle/>
+          <a:p>
+            <a:pPr algn="ctr"/>
+          </a:p>
+        </p:txBody>
+      </p:sp>
+      <p:sp>
+        <p:nvSpPr>
+          <p:cNvPr id="17" name="TextBox 16"/>
+          <p:cNvSpPr txBox="1"/>
+          <p:nvPr/>
+        </p:nvSpPr>
+        <p:spPr>
+          <a:xfrm>
+            <a:off x="5714999" y="4800600"/>
+            <a:ext cx="5928055" cy="365760"/>
+          </a:xfrm>
+          <a:prstGeom prst="rect">
+            <a:avLst/>
+          </a:prstGeom>
+          <a:noFill/>
+        </p:spPr>
+        <p:txBody>
+          <a:bodyPr wrap="square" lIns="0" rIns="0" tIns="0" bIns="0" anchor="t">
+            <a:spAutoFit/>
+          </a:bodyPr>
+          <a:lstStyle/>
+          <a:p>
+            <a:pPr algn="l">
+              <a:spcAft>
+                <a:spcPts val="0"/>
+              </a:spcAft>
+            </a:pPr>
+            <a:r>
+              <a:rPr sz="2000" b="1" i="0">
+                <a:solidFill>
+                  <a:srgbClr val="15202B"/>
+                </a:solidFill>
+                <a:latin typeface="Calibri"/>
+              </a:rPr>
+              <a:t>BTS T-100</a:t>
+            </a:r>
+          </a:p>
+        </p:txBody>
+      </p:sp>
+      <p:sp>
+        <p:nvSpPr>
+          <p:cNvPr id="18" name="TextBox 17"/>
+          <p:cNvSpPr txBox="1"/>
+          <p:nvPr/>
+        </p:nvSpPr>
+        <p:spPr>
+          <a:xfrm>
+            <a:off x="5714999" y="5212080"/>
+            <a:ext cx="5928055" cy="548640"/>
+          </a:xfrm>
+          <a:prstGeom prst="rect">
+            <a:avLst/>
+          </a:prstGeom>
+          <a:noFill/>
+        </p:spPr>
+        <p:txBody>
+          <a:bodyPr wrap="square" lIns="0" rIns="0" tIns="0" bIns="0" anchor="t">
+            <a:spAutoFit/>
+          </a:bodyPr>
+          <a:lstStyle/>
+          <a:p>
+            <a:pPr algn="l">
+              <a:spcAft>
+                <a:spcPts val="0"/>
+              </a:spcAft>
+            </a:pPr>
+            <a:r>
+              <a:rPr sz="1700" b="0" i="0">
+                <a:solidFill>
+                  <a:srgbClr val="1B1F24"/>
+                </a:solidFill>
+                <a:latin typeface="Calibri"/>
+              </a:rPr>
+              <a:t>July is filed; August and September nowcast from TSA.</a:t>
+            </a:r>
+          </a:p>
+        </p:txBody>
+      </p:sp>
     </p:spTree>
   </p:cSld>
   <p:clrMapOvr>
@@ -7785,7 +6465,7 @@
         </p:nvSpPr>
         <p:spPr>
           <a:xfrm>
-            <a:off x="548640" y="384048"/>
+            <a:off x="548640" y="685800"/>
             <a:ext cx="11094415" cy="731520"/>
           </a:xfrm>
         </p:spPr>
@@ -7801,27 +6481,68 @@
                 </a:solidFill>
                 <a:latin typeface="Cambria"/>
               </a:rPr>
-              <a:t>The split says yield, not volume</a:t>
-            </a:r>
-          </a:p>
-        </p:txBody>
-      </p:sp>
-      <p:sp>
-        <p:nvSpPr>
-          <p:cNvPr id="3" name="Oval 2"/>
+              <a:t>Naive won on passengers; we won on fare</a:t>
+            </a:r>
+          </a:p>
+        </p:txBody>
+      </p:sp>
+      <p:sp>
+        <p:nvSpPr>
+          <p:cNvPr id="3" name="Kicker"/>
+          <p:cNvSpPr txBox="1"/>
+          <p:nvPr/>
+        </p:nvSpPr>
+        <p:spPr>
+          <a:xfrm>
+            <a:off x="548640" y="411480"/>
+            <a:ext cx="11094415" cy="274320"/>
+          </a:xfrm>
+          <a:prstGeom prst="rect">
+            <a:avLst/>
+          </a:prstGeom>
+          <a:noFill/>
+        </p:spPr>
+        <p:txBody>
+          <a:bodyPr wrap="square" lIns="0" rIns="0" tIns="0" bIns="0" anchor="t">
+            <a:spAutoFit/>
+          </a:bodyPr>
+          <a:lstStyle/>
+          <a:p>
+            <a:pPr algn="l">
+              <a:spcAft>
+                <a:spcPts val="0"/>
+              </a:spcAft>
+            </a:pPr>
+            <a:r>
+              <a:rPr sz="1300" b="1" i="0">
+                <a:solidFill>
+                  <a:srgbClr val="1F3B73"/>
+                </a:solidFill>
+                <a:latin typeface="Calibri"/>
+              </a:rPr>
+              <a:t>3  ·  MODEL AND BASELINES</a:t>
+            </a:r>
+          </a:p>
+        </p:txBody>
+      </p:sp>
+      <p:sp>
+        <p:nvSpPr>
+          <p:cNvPr id="4" name="Rounded Rectangle 3"/>
           <p:cNvSpPr/>
           <p:nvPr/>
         </p:nvSpPr>
         <p:spPr>
           <a:xfrm>
-            <a:off x="548640" y="1417320"/>
-            <a:ext cx="502920" cy="502920"/>
-          </a:xfrm>
-          <a:prstGeom prst="ellipse">
-            <a:avLst/>
+            <a:off x="548640" y="1828800"/>
+            <a:ext cx="3383280" cy="960120"/>
+          </a:xfrm>
+          <a:prstGeom prst="roundRect">
+            <a:avLst>
+              <a:gd name="adj" fmla="val 12000"/>
+            </a:avLst>
           </a:prstGeom>
           <a:solidFill>
-            <a:srgbClr val="1F3B73"/>
+            <a:srgbClr val="EEF2F7"/>
           </a:solidFill>
           <a:ln>
             <a:noFill/>
@@ -7843,125 +6564,39 @@
           </a:fontRef>
         </p:style>
         <p:txBody>
-          <a:bodyPr rtlCol="0" anchor="ctr" lIns="0" rIns="0" tIns="0" bIns="0"/>
+          <a:bodyPr rtlCol="0" anchor="ctr" wrap="square" lIns="137160" rIns="137160" tIns="0" bIns="0"/>
           <a:lstStyle/>
           <a:p>
             <a:pPr algn="ctr"/>
             <a:r>
-              <a:rPr sz="1600" b="1">
-                <a:solidFill>
-                  <a:srgbClr val="FFFFFF"/>
+              <a:rPr sz="1600" b="0">
+                <a:solidFill>
+                  <a:srgbClr val="1B1F24"/>
                 </a:solidFill>
                 <a:latin typeface="Calibri"/>
               </a:rPr>
-              <a:t>1</a:t>
-            </a:r>
-          </a:p>
-        </p:txBody>
-      </p:sp>
-      <p:sp>
-        <p:nvSpPr>
-          <p:cNvPr id="4" name="TextBox 3"/>
-          <p:cNvSpPr txBox="1"/>
-          <p:nvPr/>
-        </p:nvSpPr>
-        <p:spPr>
-          <a:xfrm>
-            <a:off x="1280160" y="1399032"/>
-            <a:ext cx="3200400" cy="365760"/>
-          </a:xfrm>
-          <a:prstGeom prst="rect">
-            <a:avLst/>
-          </a:prstGeom>
-          <a:noFill/>
-        </p:spPr>
-        <p:txBody>
-          <a:bodyPr wrap="square" lIns="0" rIns="0" tIns="0" bIns="0" anchor="t">
-            <a:spAutoFit/>
-          </a:bodyPr>
-          <a:lstStyle/>
-          <a:p>
-            <a:pPr algn="l">
-              <a:spcAft>
-                <a:spcPts val="0"/>
-              </a:spcAft>
-            </a:pPr>
-            <a:r>
-              <a:rPr sz="2000" b="1" i="0">
-                <a:solidFill>
-                  <a:srgbClr val="15202B"/>
-                </a:solidFill>
-                <a:latin typeface="Cambria"/>
-              </a:rPr>
-              <a:t>Passengers</a:t>
-            </a:r>
-            <a:r>
-              <a:rPr sz="1800" b="1" i="0">
-                <a:solidFill>
-                  <a:srgbClr val="E9A13B"/>
-                </a:solidFill>
-                <a:latin typeface="Calibri"/>
-              </a:rPr>
-              <a:t>   32,912k</a:t>
-            </a:r>
-          </a:p>
-        </p:txBody>
-      </p:sp>
-      <p:sp>
-        <p:nvSpPr>
-          <p:cNvPr id="5" name="TextBox 4"/>
-          <p:cNvSpPr txBox="1"/>
-          <p:nvPr/>
-        </p:nvSpPr>
-        <p:spPr>
-          <a:xfrm>
-            <a:off x="1280160" y="1828800"/>
-            <a:ext cx="3200400" cy="914400"/>
-          </a:xfrm>
-          <a:prstGeom prst="rect">
-            <a:avLst/>
-          </a:prstGeom>
-          <a:noFill/>
-        </p:spPr>
-        <p:txBody>
-          <a:bodyPr wrap="square" lIns="0" rIns="0" tIns="0" bIns="0" anchor="t">
-            <a:spAutoFit/>
-          </a:bodyPr>
-          <a:lstStyle/>
-          <a:p>
-            <a:pPr algn="l">
-              <a:spcAft>
-                <a:spcPts val="0"/>
-              </a:spcAft>
-            </a:pPr>
-            <a:r>
-              <a:rPr sz="1400" b="0" i="0">
-                <a:solidFill>
-                  <a:srgbClr val="1B1F24"/>
-                </a:solidFill>
-                <a:latin typeface="Calibri"/>
-              </a:rPr>
-              <a:t>TSA × Southwest share × uplift ÷ trip factor, blended 65/35 with ASM × load factor ÷ haul</a:t>
-            </a:r>
-          </a:p>
-        </p:txBody>
-      </p:sp>
-      <p:sp>
-        <p:nvSpPr>
-          <p:cNvPr id="6" name="Oval 5"/>
+              <a:t>TSA throughput × Southwest share
+÷ trip factor</a:t>
+            </a:r>
+          </a:p>
+        </p:txBody>
+      </p:sp>
+      <p:sp>
+        <p:nvSpPr>
+          <p:cNvPr id="5" name="Right Arrow 4"/>
           <p:cNvSpPr/>
           <p:nvPr/>
         </p:nvSpPr>
         <p:spPr>
           <a:xfrm>
-            <a:off x="548640" y="2926080"/>
-            <a:ext cx="502920" cy="502920"/>
-          </a:xfrm>
-          <a:prstGeom prst="ellipse">
+            <a:off x="4069080" y="2130552"/>
+            <a:ext cx="365760" cy="365760"/>
+          </a:xfrm>
+          <a:prstGeom prst="rightArrow">
             <a:avLst/>
           </a:prstGeom>
           <a:solidFill>
-            <a:srgbClr val="1F3B73"/>
+            <a:srgbClr val="8A94A3"/>
           </a:solidFill>
           <a:ln>
             <a:noFill/>
@@ -7983,122 +6618,28 @@
           </a:fontRef>
         </p:style>
         <p:txBody>
-          <a:bodyPr rtlCol="0" anchor="ctr" lIns="0" rIns="0" tIns="0" bIns="0"/>
+          <a:bodyPr rtlCol="0" anchor="ctr"/>
           <a:lstStyle/>
           <a:p>
             <a:pPr algn="ctr"/>
-            <a:r>
-              <a:rPr sz="1600" b="1">
-                <a:solidFill>
-                  <a:srgbClr val="FFFFFF"/>
-                </a:solidFill>
-                <a:latin typeface="Calibri"/>
-              </a:rPr>
-              <a:t>2</a:t>
-            </a:r>
-          </a:p>
-        </p:txBody>
-      </p:sp>
-      <p:sp>
-        <p:nvSpPr>
-          <p:cNvPr id="7" name="TextBox 6"/>
-          <p:cNvSpPr txBox="1"/>
-          <p:nvPr/>
-        </p:nvSpPr>
-        <p:spPr>
-          <a:xfrm>
-            <a:off x="1280160" y="2907792"/>
-            <a:ext cx="3200400" cy="365760"/>
-          </a:xfrm>
-          <a:prstGeom prst="rect">
-            <a:avLst/>
-          </a:prstGeom>
-          <a:noFill/>
-        </p:spPr>
-        <p:txBody>
-          <a:bodyPr wrap="square" lIns="0" rIns="0" tIns="0" bIns="0" anchor="t">
-            <a:spAutoFit/>
-          </a:bodyPr>
-          <a:lstStyle/>
-          <a:p>
-            <a:pPr algn="l">
-              <a:spcAft>
-                <a:spcPts val="0"/>
-              </a:spcAft>
-            </a:pPr>
-            <a:r>
-              <a:rPr sz="2000" b="1" i="0">
-                <a:solidFill>
-                  <a:srgbClr val="15202B"/>
-                </a:solidFill>
-                <a:latin typeface="Cambria"/>
-              </a:rPr>
-              <a:t>Fare</a:t>
-            </a:r>
-            <a:r>
-              <a:rPr sz="1800" b="1" i="0">
-                <a:solidFill>
-                  <a:srgbClr val="E9A13B"/>
-                </a:solidFill>
-                <a:latin typeface="Calibri"/>
-              </a:rPr>
-              <a:t>   $229.34</a:t>
-            </a:r>
-          </a:p>
-        </p:txBody>
-      </p:sp>
-      <p:sp>
-        <p:nvSpPr>
-          <p:cNvPr id="8" name="TextBox 7"/>
-          <p:cNvSpPr txBox="1"/>
-          <p:nvPr/>
-        </p:nvSpPr>
-        <p:spPr>
-          <a:xfrm>
-            <a:off x="1280160" y="3337560"/>
-            <a:ext cx="3200400" cy="914400"/>
-          </a:xfrm>
-          <a:prstGeom prst="rect">
-            <a:avLst/>
-          </a:prstGeom>
-          <a:noFill/>
-        </p:spPr>
-        <p:txBody>
-          <a:bodyPr wrap="square" lIns="0" rIns="0" tIns="0" bIns="0" anchor="t">
-            <a:spAutoFit/>
-          </a:bodyPr>
-          <a:lstStyle/>
-          <a:p>
-            <a:pPr algn="l">
-              <a:spcAft>
-                <a:spcPts val="0"/>
-              </a:spcAft>
-            </a:pPr>
-            <a:r>
-              <a:rPr sz="1400" b="0" i="0">
-                <a:solidFill>
-                  <a:srgbClr val="1B1F24"/>
-                </a:solidFill>
-                <a:latin typeface="Calibri"/>
-              </a:rPr>
-              <a:t>Blend of an industry anchor (BLS CPI), a seasonal step and fuel pass-through</a:t>
-            </a:r>
-          </a:p>
-        </p:txBody>
-      </p:sp>
-      <p:sp>
-        <p:nvSpPr>
-          <p:cNvPr id="9" name="Oval 8"/>
+          </a:p>
+        </p:txBody>
+      </p:sp>
+      <p:sp>
+        <p:nvSpPr>
+          <p:cNvPr id="6" name="Rounded Rectangle 5"/>
           <p:cNvSpPr/>
           <p:nvPr/>
         </p:nvSpPr>
         <p:spPr>
           <a:xfrm>
-            <a:off x="548640" y="4434840"/>
-            <a:ext cx="502920" cy="502920"/>
-          </a:xfrm>
-          <a:prstGeom prst="ellipse">
-            <a:avLst/>
+            <a:off x="4572000" y="1828800"/>
+            <a:ext cx="2286000" cy="960120"/>
+          </a:xfrm>
+          <a:prstGeom prst="roundRect">
+            <a:avLst>
+              <a:gd name="adj" fmla="val 12000"/>
+            </a:avLst>
           </a:prstGeom>
           <a:solidFill>
             <a:srgbClr val="1F3B73"/>
@@ -8123,32 +6664,311 @@
           </a:fontRef>
         </p:style>
         <p:txBody>
-          <a:bodyPr rtlCol="0" anchor="ctr" lIns="0" rIns="0" tIns="0" bIns="0"/>
+          <a:bodyPr rtlCol="0" anchor="ctr" wrap="square" lIns="137160" rIns="137160" tIns="0" bIns="0"/>
           <a:lstStyle/>
           <a:p>
             <a:pPr algn="ctr"/>
             <a:r>
-              <a:rPr sz="1600" b="1">
-                <a:solidFill>
-                  <a:srgbClr val="FFFFFF"/>
+              <a:rPr sz="1400" b="0">
+                <a:solidFill>
+                  <a:srgbClr val="AEB8C6"/>
                 </a:solidFill>
                 <a:latin typeface="Calibri"/>
               </a:rPr>
-              <a:t>3</a:t>
-            </a:r>
-          </a:p>
-        </p:txBody>
-      </p:sp>
-      <p:sp>
-        <p:nvSpPr>
-          <p:cNvPr id="10" name="TextBox 9"/>
+              <a:t>Passengers
+</a:t>
+            </a:r>
+            <a:r>
+              <a:rPr sz="2400" b="1">
+                <a:solidFill>
+                  <a:srgbClr val="FFFFFF"/>
+                </a:solidFill>
+                <a:latin typeface="Calibri"/>
+              </a:rPr>
+              <a:t>32,912k</a:t>
+            </a:r>
+          </a:p>
+        </p:txBody>
+      </p:sp>
+      <p:sp>
+        <p:nvSpPr>
+          <p:cNvPr id="7" name="Rounded Rectangle 6"/>
+          <p:cNvSpPr/>
+          <p:nvPr/>
+        </p:nvSpPr>
+        <p:spPr>
+          <a:xfrm>
+            <a:off x="548640" y="3154680"/>
+            <a:ext cx="3383280" cy="960120"/>
+          </a:xfrm>
+          <a:prstGeom prst="roundRect">
+            <a:avLst>
+              <a:gd name="adj" fmla="val 12000"/>
+            </a:avLst>
+          </a:prstGeom>
+          <a:solidFill>
+            <a:srgbClr val="EEF2F7"/>
+          </a:solidFill>
+          <a:ln>
+            <a:noFill/>
+          </a:ln>
+          <a:effectLst/>
+        </p:spPr>
+        <p:style>
+          <a:lnRef idx="1">
+            <a:schemeClr val="accent1"/>
+          </a:lnRef>
+          <a:fillRef idx="3">
+            <a:schemeClr val="accent1"/>
+          </a:fillRef>
+          <a:effectRef idx="2">
+            <a:schemeClr val="accent1"/>
+          </a:effectRef>
+          <a:fontRef idx="minor">
+            <a:schemeClr val="lt1"/>
+          </a:fontRef>
+        </p:style>
+        <p:txBody>
+          <a:bodyPr rtlCol="0" anchor="ctr" wrap="square" lIns="137160" rIns="137160" tIns="0" bIns="0"/>
+          <a:lstStyle/>
+          <a:p>
+            <a:pPr algn="ctr"/>
+            <a:r>
+              <a:rPr sz="1600" b="0">
+                <a:solidFill>
+                  <a:srgbClr val="1B1F24"/>
+                </a:solidFill>
+                <a:latin typeface="Calibri"/>
+              </a:rPr>
+              <a:t>Airfare CPI, seasonality
+and fuel pass-through</a:t>
+            </a:r>
+          </a:p>
+        </p:txBody>
+      </p:sp>
+      <p:sp>
+        <p:nvSpPr>
+          <p:cNvPr id="8" name="Right Arrow 7"/>
+          <p:cNvSpPr/>
+          <p:nvPr/>
+        </p:nvSpPr>
+        <p:spPr>
+          <a:xfrm>
+            <a:off x="4069080" y="3456432"/>
+            <a:ext cx="365760" cy="365760"/>
+          </a:xfrm>
+          <a:prstGeom prst="rightArrow">
+            <a:avLst/>
+          </a:prstGeom>
+          <a:solidFill>
+            <a:srgbClr val="8A94A3"/>
+          </a:solidFill>
+          <a:ln>
+            <a:noFill/>
+          </a:ln>
+          <a:effectLst/>
+        </p:spPr>
+        <p:style>
+          <a:lnRef idx="1">
+            <a:schemeClr val="accent1"/>
+          </a:lnRef>
+          <a:fillRef idx="3">
+            <a:schemeClr val="accent1"/>
+          </a:fillRef>
+          <a:effectRef idx="2">
+            <a:schemeClr val="accent1"/>
+          </a:effectRef>
+          <a:fontRef idx="minor">
+            <a:schemeClr val="lt1"/>
+          </a:fontRef>
+        </p:style>
+        <p:txBody>
+          <a:bodyPr rtlCol="0" anchor="ctr"/>
+          <a:lstStyle/>
+          <a:p>
+            <a:pPr algn="ctr"/>
+          </a:p>
+        </p:txBody>
+      </p:sp>
+      <p:sp>
+        <p:nvSpPr>
+          <p:cNvPr id="9" name="Rounded Rectangle 8"/>
+          <p:cNvSpPr/>
+          <p:nvPr/>
+        </p:nvSpPr>
+        <p:spPr>
+          <a:xfrm>
+            <a:off x="4572000" y="3154680"/>
+            <a:ext cx="2286000" cy="960120"/>
+          </a:xfrm>
+          <a:prstGeom prst="roundRect">
+            <a:avLst>
+              <a:gd name="adj" fmla="val 12000"/>
+            </a:avLst>
+          </a:prstGeom>
+          <a:solidFill>
+            <a:srgbClr val="1F3B73"/>
+          </a:solidFill>
+          <a:ln>
+            <a:noFill/>
+          </a:ln>
+          <a:effectLst/>
+        </p:spPr>
+        <p:style>
+          <a:lnRef idx="1">
+            <a:schemeClr val="accent1"/>
+          </a:lnRef>
+          <a:fillRef idx="3">
+            <a:schemeClr val="accent1"/>
+          </a:fillRef>
+          <a:effectRef idx="2">
+            <a:schemeClr val="accent1"/>
+          </a:effectRef>
+          <a:fontRef idx="minor">
+            <a:schemeClr val="lt1"/>
+          </a:fontRef>
+        </p:style>
+        <p:txBody>
+          <a:bodyPr rtlCol="0" anchor="ctr" wrap="square" lIns="137160" rIns="137160" tIns="0" bIns="0"/>
+          <a:lstStyle/>
+          <a:p>
+            <a:pPr algn="ctr"/>
+            <a:r>
+              <a:rPr sz="1400" b="0">
+                <a:solidFill>
+                  <a:srgbClr val="AEB8C6"/>
+                </a:solidFill>
+                <a:latin typeface="Calibri"/>
+              </a:rPr>
+              <a:t>Fare
+</a:t>
+            </a:r>
+            <a:r>
+              <a:rPr sz="2400" b="1">
+                <a:solidFill>
+                  <a:srgbClr val="FFFFFF"/>
+                </a:solidFill>
+                <a:latin typeface="Calibri"/>
+              </a:rPr>
+              <a:t>$229.34</a:t>
+            </a:r>
+          </a:p>
+        </p:txBody>
+      </p:sp>
+      <p:sp>
+        <p:nvSpPr>
+          <p:cNvPr id="10" name="Rounded Rectangle 9"/>
+          <p:cNvSpPr/>
+          <p:nvPr/>
+        </p:nvSpPr>
+        <p:spPr>
+          <a:xfrm>
+            <a:off x="4572000" y="4480560"/>
+            <a:ext cx="2286000" cy="960120"/>
+          </a:xfrm>
+          <a:prstGeom prst="roundRect">
+            <a:avLst>
+              <a:gd name="adj" fmla="val 12000"/>
+            </a:avLst>
+          </a:prstGeom>
+          <a:solidFill>
+            <a:srgbClr val="E9A13B"/>
+          </a:solidFill>
+          <a:ln>
+            <a:noFill/>
+          </a:ln>
+          <a:effectLst/>
+        </p:spPr>
+        <p:style>
+          <a:lnRef idx="1">
+            <a:schemeClr val="accent1"/>
+          </a:lnRef>
+          <a:fillRef idx="3">
+            <a:schemeClr val="accent1"/>
+          </a:fillRef>
+          <a:effectRef idx="2">
+            <a:schemeClr val="accent1"/>
+          </a:effectRef>
+          <a:fontRef idx="minor">
+            <a:schemeClr val="lt1"/>
+          </a:fontRef>
+        </p:style>
+        <p:txBody>
+          <a:bodyPr rtlCol="0" anchor="ctr" wrap="square" lIns="137160" rIns="137160" tIns="0" bIns="0"/>
+          <a:lstStyle/>
+          <a:p>
+            <a:pPr algn="ctr"/>
+            <a:r>
+              <a:rPr sz="1400" b="0">
+                <a:solidFill>
+                  <a:srgbClr val="15202B"/>
+                </a:solidFill>
+                <a:latin typeface="Calibri"/>
+              </a:rPr>
+              <a:t>Passenger revenue
+</a:t>
+            </a:r>
+            <a:r>
+              <a:rPr sz="2400" b="1">
+                <a:solidFill>
+                  <a:srgbClr val="15202B"/>
+                </a:solidFill>
+                <a:latin typeface="Calibri"/>
+              </a:rPr>
+              <a:t>$7.55bn</a:t>
+            </a:r>
+          </a:p>
+        </p:txBody>
+      </p:sp>
+      <p:sp>
+        <p:nvSpPr>
+          <p:cNvPr id="11" name="TextBox 10"/>
           <p:cNvSpPr txBox="1"/>
           <p:nvPr/>
         </p:nvSpPr>
         <p:spPr>
           <a:xfrm>
-            <a:off x="1280160" y="4416552"/>
-            <a:ext cx="3200400" cy="365760"/>
+            <a:off x="548640" y="4709160"/>
+            <a:ext cx="3840480" cy="548640"/>
+          </a:xfrm>
+          <a:prstGeom prst="rect">
+            <a:avLst/>
+          </a:prstGeom>
+          <a:noFill/>
+        </p:spPr>
+        <p:txBody>
+          <a:bodyPr wrap="square" lIns="0" rIns="0" tIns="0" bIns="0" anchor="ctr">
+            <a:spAutoFit/>
+          </a:bodyPr>
+          <a:lstStyle/>
+          <a:p>
+            <a:pPr algn="r">
+              <a:spcAft>
+                <a:spcPts val="0"/>
+              </a:spcAft>
+            </a:pPr>
+            <a:r>
+              <a:rPr sz="1800" b="1" i="0">
+                <a:solidFill>
+                  <a:srgbClr val="5B6573"/>
+                </a:solidFill>
+                <a:latin typeface="Calibri"/>
+              </a:rPr>
+              <a:t>Passengers × fare</a:t>
+            </a:r>
+          </a:p>
+        </p:txBody>
+      </p:sp>
+      <p:sp>
+        <p:nvSpPr>
+          <p:cNvPr id="12" name="TextBox 11"/>
+          <p:cNvSpPr txBox="1"/>
+          <p:nvPr/>
+        </p:nvSpPr>
+        <p:spPr>
+          <a:xfrm>
+            <a:off x="7299655" y="1783080"/>
+            <a:ext cx="4343400" cy="274320"/>
           </a:xfrm>
           <a:prstGeom prst="rect">
             <a:avLst/>
@@ -8167,93 +6987,338 @@
               </a:spcAft>
             </a:pPr>
             <a:r>
-              <a:rPr sz="2000" b="1" i="0">
-                <a:solidFill>
-                  <a:srgbClr val="15202B"/>
-                </a:solidFill>
-                <a:latin typeface="Cambria"/>
-              </a:rPr>
-              <a:t>Revenue</a:t>
-            </a:r>
-            <a:r>
-              <a:rPr sz="1800" b="1" i="0">
-                <a:solidFill>
-                  <a:srgbClr val="E9A13B"/>
+              <a:rPr sz="1300" b="1" i="0">
+                <a:solidFill>
+                  <a:srgbClr val="5B6573"/>
                 </a:solidFill>
                 <a:latin typeface="Calibri"/>
               </a:rPr>
-              <a:t>   $7.55bn</a:t>
-            </a:r>
-          </a:p>
-        </p:txBody>
-      </p:sp>
-      <p:sp>
-        <p:nvSpPr>
-          <p:cNvPr id="11" name="TextBox 10"/>
-          <p:cNvSpPr txBox="1"/>
-          <p:nvPr/>
-        </p:nvSpPr>
-        <p:spPr>
-          <a:xfrm>
-            <a:off x="1280160" y="4846320"/>
-            <a:ext cx="3200400" cy="914400"/>
-          </a:xfrm>
-          <a:prstGeom prst="rect">
-            <a:avLst/>
-          </a:prstGeom>
-          <a:noFill/>
-        </p:spPr>
-        <p:txBody>
-          <a:bodyPr wrap="square" lIns="0" rIns="0" tIns="0" bIns="0" anchor="t">
-            <a:spAutoFit/>
-          </a:bodyPr>
-          <a:lstStyle/>
-          <a:p>
-            <a:pPr algn="l">
-              <a:spcAft>
-                <a:spcPts val="0"/>
-              </a:spcAft>
-            </a:pPr>
-            <a:r>
-              <a:rPr sz="1400" b="0" i="0">
-                <a:solidFill>
-                  <a:srgbClr val="1B1F24"/>
-                </a:solidFill>
-                <a:latin typeface="Calibri"/>
-              </a:rPr>
-              <a:t>Passengers × fare, with a −0.4 error correlation, checked against guidance</a:t>
+              <a:t>ERROR VS ACTUAL</a:t>
             </a:r>
           </a:p>
         </p:txBody>
       </p:sp>
       <p:graphicFrame>
         <p:nvGraphicFramePr>
-          <p:cNvPr id="12" name="Iso-revenue chart"/>
+          <p:cNvPr id="13" name="Baselines vs actual"/>
           <p:cNvGraphicFramePr>
             <a:graphicFrameLocks noGrp="1"/>
           </p:cNvGraphicFramePr>
           <p:nvPr/>
         </p:nvGraphicFramePr>
         <p:xfrm>
-          <a:off x="4709159" y="1280160"/>
-          <a:ext cx="6933895" cy="4526280"/>
+          <a:off x="7299655" y="2148840"/>
+          <a:ext cx="4343400" cy="2194560"/>
         </p:xfrm>
         <a:graphic>
-          <a:graphicData uri="http://schemas.openxmlformats.org/drawingml/2006/chart">
-            <c:chart xmlns:c="http://schemas.openxmlformats.org/drawingml/2006/chart" r:id="rId2"/>
+          <a:graphicData uri="http://schemas.openxmlformats.org/drawingml/2006/table">
+            <a:tbl>
+              <a:tblPr firstRow="1" bandRow="1">
+                <a:tableStyleId>{5C22544A-7EE6-4342-B048-85BDC9FD1C3A}</a:tableStyleId>
+              </a:tblPr>
+              <a:tblGrid>
+                <a:gridCol w="1600200"/>
+                <a:gridCol w="1371600"/>
+                <a:gridCol w="1371600"/>
+              </a:tblGrid>
+              <a:tr h="548640">
+                <a:tc>
+                  <a:txBody>
+                    <a:bodyPr wrap="square"/>
+                    <a:lstStyle/>
+                    <a:p>
+                      <a:pPr algn="l"/>
+                      <a:r>
+                        <a:rPr sz="1500" b="1">
+                          <a:solidFill>
+                            <a:srgbClr val="FFFFFF"/>
+                          </a:solidFill>
+                          <a:latin typeface="Calibri"/>
+                        </a:rPr>
+                        <a:t/>
+                      </a:r>
+                    </a:p>
+                  </a:txBody>
+                  <a:tcPr marL="137160" marR="137160" marT="54864" marB="54864" anchor="ctr">
+                    <a:solidFill>
+                      <a:srgbClr val="1F3B73"/>
+                    </a:solidFill>
+                  </a:tcPr>
+                </a:tc>
+                <a:tc>
+                  <a:txBody>
+                    <a:bodyPr wrap="square"/>
+                    <a:lstStyle/>
+                    <a:p>
+                      <a:pPr algn="l"/>
+                      <a:r>
+                        <a:rPr sz="1500" b="1">
+                          <a:solidFill>
+                            <a:srgbClr val="FFFFFF"/>
+                          </a:solidFill>
+                          <a:latin typeface="Calibri"/>
+                        </a:rPr>
+                        <a:t>Passengers</a:t>
+                      </a:r>
+                    </a:p>
+                  </a:txBody>
+                  <a:tcPr marL="137160" marR="137160" marT="54864" marB="54864" anchor="ctr">
+                    <a:solidFill>
+                      <a:srgbClr val="1F3B73"/>
+                    </a:solidFill>
+                  </a:tcPr>
+                </a:tc>
+                <a:tc>
+                  <a:txBody>
+                    <a:bodyPr wrap="square"/>
+                    <a:lstStyle/>
+                    <a:p>
+                      <a:pPr algn="l"/>
+                      <a:r>
+                        <a:rPr sz="1500" b="1">
+                          <a:solidFill>
+                            <a:srgbClr val="FFFFFF"/>
+                          </a:solidFill>
+                          <a:latin typeface="Calibri"/>
+                        </a:rPr>
+                        <a:t>Fare</a:t>
+                      </a:r>
+                    </a:p>
+                  </a:txBody>
+                  <a:tcPr marL="137160" marR="137160" marT="54864" marB="54864" anchor="ctr">
+                    <a:solidFill>
+                      <a:srgbClr val="1F3B73"/>
+                    </a:solidFill>
+                  </a:tcPr>
+                </a:tc>
+              </a:tr>
+              <a:tr h="548640">
+                <a:tc>
+                  <a:txBody>
+                    <a:bodyPr wrap="square"/>
+                    <a:lstStyle/>
+                    <a:p>
+                      <a:pPr algn="l"/>
+                      <a:r>
+                        <a:rPr sz="1500" b="1">
+                          <a:solidFill>
+                            <a:srgbClr val="1B1F24"/>
+                          </a:solidFill>
+                          <a:latin typeface="Calibri"/>
+                        </a:rPr>
+                        <a:t>Ours</a:t>
+                      </a:r>
+                    </a:p>
+                  </a:txBody>
+                  <a:tcPr marL="137160" marR="137160" marT="54864" marB="54864" anchor="ctr">
+                    <a:solidFill>
+                      <a:srgbClr val="FFFFFF"/>
+                    </a:solidFill>
+                  </a:tcPr>
+                </a:tc>
+                <a:tc>
+                  <a:txBody>
+                    <a:bodyPr wrap="square"/>
+                    <a:lstStyle/>
+                    <a:p>
+                      <a:pPr algn="l"/>
+                      <a:r>
+                        <a:rPr sz="1600" b="0">
+                          <a:solidFill>
+                            <a:srgbClr val="1B1F24"/>
+                          </a:solidFill>
+                          <a:latin typeface="Calibri"/>
+                        </a:rPr>
+                        <a:t>1.7% low</a:t>
+                      </a:r>
+                    </a:p>
+                  </a:txBody>
+                  <a:tcPr marL="137160" marR="137160" marT="54864" marB="54864" anchor="ctr">
+                    <a:solidFill>
+                      <a:srgbClr val="FFFFFF"/>
+                    </a:solidFill>
+                  </a:tcPr>
+                </a:tc>
+                <a:tc>
+                  <a:txBody>
+                    <a:bodyPr wrap="square"/>
+                    <a:lstStyle/>
+                    <a:p>
+                      <a:pPr algn="l"/>
+                      <a:r>
+                        <a:rPr sz="1600" b="1">
+                          <a:solidFill>
+                            <a:srgbClr val="1E7268"/>
+                          </a:solidFill>
+                          <a:latin typeface="Calibri"/>
+                        </a:rPr>
+                        <a:t>1.0% low</a:t>
+                      </a:r>
+                    </a:p>
+                  </a:txBody>
+                  <a:tcPr marL="137160" marR="137160" marT="54864" marB="54864" anchor="ctr">
+                    <a:solidFill>
+                      <a:srgbClr val="FFFFFF"/>
+                    </a:solidFill>
+                  </a:tcPr>
+                </a:tc>
+              </a:tr>
+              <a:tr h="548640">
+                <a:tc>
+                  <a:txBody>
+                    <a:bodyPr wrap="square"/>
+                    <a:lstStyle/>
+                    <a:p>
+                      <a:pPr algn="l"/>
+                      <a:r>
+                        <a:rPr sz="1500" b="0">
+                          <a:solidFill>
+                            <a:srgbClr val="1B1F24"/>
+                          </a:solidFill>
+                          <a:latin typeface="Calibri"/>
+                        </a:rPr>
+                        <a:t>B1 naive</a:t>
+                      </a:r>
+                    </a:p>
+                  </a:txBody>
+                  <a:tcPr marL="137160" marR="137160" marT="54864" marB="54864" anchor="ctr">
+                    <a:solidFill>
+                      <a:srgbClr val="EEF2F7"/>
+                    </a:solidFill>
+                  </a:tcPr>
+                </a:tc>
+                <a:tc>
+                  <a:txBody>
+                    <a:bodyPr wrap="square"/>
+                    <a:lstStyle/>
+                    <a:p>
+                      <a:pPr algn="l"/>
+                      <a:r>
+                        <a:rPr sz="1600" b="1">
+                          <a:solidFill>
+                            <a:srgbClr val="1E7268"/>
+                          </a:solidFill>
+                          <a:latin typeface="Calibri"/>
+                        </a:rPr>
+                        <a:t>0.1% low</a:t>
+                      </a:r>
+                    </a:p>
+                  </a:txBody>
+                  <a:tcPr marL="137160" marR="137160" marT="54864" marB="54864" anchor="ctr">
+                    <a:solidFill>
+                      <a:srgbClr val="EEF2F7"/>
+                    </a:solidFill>
+                  </a:tcPr>
+                </a:tc>
+                <a:tc>
+                  <a:txBody>
+                    <a:bodyPr wrap="square"/>
+                    <a:lstStyle/>
+                    <a:p>
+                      <a:pPr algn="l"/>
+                      <a:r>
+                        <a:rPr sz="1600" b="0">
+                          <a:solidFill>
+                            <a:srgbClr val="1B1F24"/>
+                          </a:solidFill>
+                          <a:latin typeface="Calibri"/>
+                        </a:rPr>
+                        <a:t>4.8% low</a:t>
+                      </a:r>
+                    </a:p>
+                  </a:txBody>
+                  <a:tcPr marL="137160" marR="137160" marT="54864" marB="54864" anchor="ctr">
+                    <a:solidFill>
+                      <a:srgbClr val="EEF2F7"/>
+                    </a:solidFill>
+                  </a:tcPr>
+                </a:tc>
+              </a:tr>
+              <a:tr h="548640">
+                <a:tc>
+                  <a:txBody>
+                    <a:bodyPr wrap="square"/>
+                    <a:lstStyle/>
+                    <a:p>
+                      <a:pPr algn="l"/>
+                      <a:r>
+                        <a:rPr sz="1500" b="0">
+                          <a:solidFill>
+                            <a:srgbClr val="1B1F24"/>
+                          </a:solidFill>
+                          <a:latin typeface="Calibri"/>
+                        </a:rPr>
+                        <a:t>B0 last year</a:t>
+                      </a:r>
+                    </a:p>
+                  </a:txBody>
+                  <a:tcPr marL="137160" marR="137160" marT="54864" marB="54864" anchor="ctr">
+                    <a:solidFill>
+                      <a:srgbClr val="FFFFFF"/>
+                    </a:solidFill>
+                  </a:tcPr>
+                </a:tc>
+                <a:tc>
+                  <a:txBody>
+                    <a:bodyPr wrap="square"/>
+                    <a:lstStyle/>
+                    <a:p>
+                      <a:pPr algn="l"/>
+                      <a:r>
+                        <a:rPr sz="1600" b="0">
+                          <a:solidFill>
+                            <a:srgbClr val="1B1F24"/>
+                          </a:solidFill>
+                          <a:latin typeface="Calibri"/>
+                        </a:rPr>
+                        <a:t>3.3% high</a:t>
+                      </a:r>
+                    </a:p>
+                  </a:txBody>
+                  <a:tcPr marL="137160" marR="137160" marT="54864" marB="54864" anchor="ctr">
+                    <a:solidFill>
+                      <a:srgbClr val="FFFFFF"/>
+                    </a:solidFill>
+                  </a:tcPr>
+                </a:tc>
+                <a:tc>
+                  <a:txBody>
+                    <a:bodyPr wrap="square"/>
+                    <a:lstStyle/>
+                    <a:p>
+                      <a:pPr algn="l"/>
+                      <a:r>
+                        <a:rPr sz="1600" b="0">
+                          <a:solidFill>
+                            <a:srgbClr val="1B1F24"/>
+                          </a:solidFill>
+                          <a:latin typeface="Calibri"/>
+                        </a:rPr>
+                        <a:t>21.2% low</a:t>
+                      </a:r>
+                    </a:p>
+                  </a:txBody>
+                  <a:tcPr marL="137160" marR="137160" marT="54864" marB="54864" anchor="ctr">
+                    <a:solidFill>
+                      <a:srgbClr val="FFFFFF"/>
+                    </a:solidFill>
+                  </a:tcPr>
+                </a:tc>
+              </a:tr>
+            </a:tbl>
           </a:graphicData>
         </a:graphic>
       </p:graphicFrame>
       <p:sp>
         <p:nvSpPr>
-          <p:cNvPr id="13" name="TextBox 12"/>
+          <p:cNvPr id="14" name="TextBox 13"/>
           <p:cNvSpPr txBox="1"/>
           <p:nvPr/>
         </p:nvSpPr>
         <p:spPr>
           <a:xfrm>
-            <a:off x="4709159" y="5897880"/>
-            <a:ext cx="6933895" cy="548640"/>
+            <a:off x="7299655" y="4526280"/>
+            <a:ext cx="4343400" cy="548640"/>
           </a:xfrm>
           <a:prstGeom prst="rect">
             <a:avLst/>
@@ -8272,22 +7337,13 @@
               </a:spcAft>
             </a:pPr>
             <a:r>
-              <a:rPr sz="1200" b="0" i="0">
+              <a:rPr sz="1300" b="0" i="0">
                 <a:solidFill>
                   <a:srgbClr val="5B6573"/>
                 </a:solidFill>
                 <a:latin typeface="Calibri"/>
               </a:rPr>
-              <a:t>Teal lines: passenger revenue implied by guidance, $7.39bn–$7.60bn at a 91.5% passenger share. Both naive baselines miss it, on opposite sides. </a:t>
-            </a:r>
-            <a:r>
-              <a:rPr sz="1200" b="0" i="1">
-                <a:solidFill>
-                  <a:srgbClr val="A15C00"/>
-                </a:solidFill>
-                <a:latin typeface="Calibri"/>
-              </a:rPr>
-              <a:t>[the actual is plotted here after the print]</a:t>
+              <a:t>Green: closest. B1 = last year × Q2 growth; its fare without Q2's $285M one-off is 1.3% low.</a:t>
             </a:r>
           </a:p>
         </p:txBody>
@@ -8330,7 +7386,7 @@
         </p:nvSpPr>
         <p:spPr>
           <a:xfrm>
-            <a:off x="548640" y="384048"/>
+            <a:off x="548640" y="685800"/>
             <a:ext cx="11094415" cy="731520"/>
           </a:xfrm>
         </p:spPr>
@@ -8346,22 +7402,61 @@
                 </a:solidFill>
                 <a:latin typeface="Cambria"/>
               </a:rPr>
-              <a:t>Passengers beat naive; fares don't yet</a:t>
+              <a:t>Passengers beat naive; fare barely does</a:t>
+            </a:r>
+          </a:p>
+        </p:txBody>
+      </p:sp>
+      <p:sp>
+        <p:nvSpPr>
+          <p:cNvPr id="3" name="Kicker"/>
+          <p:cNvSpPr txBox="1"/>
+          <p:nvPr/>
+        </p:nvSpPr>
+        <p:spPr>
+          <a:xfrm>
+            <a:off x="548640" y="411480"/>
+            <a:ext cx="11094415" cy="274320"/>
+          </a:xfrm>
+          <a:prstGeom prst="rect">
+            <a:avLst/>
+          </a:prstGeom>
+          <a:noFill/>
+        </p:spPr>
+        <p:txBody>
+          <a:bodyPr wrap="square" lIns="0" rIns="0" tIns="0" bIns="0" anchor="t">
+            <a:spAutoFit/>
+          </a:bodyPr>
+          <a:lstStyle/>
+          <a:p>
+            <a:pPr algn="l">
+              <a:spcAft>
+                <a:spcPts val="0"/>
+              </a:spcAft>
+            </a:pPr>
+            <a:r>
+              <a:rPr sz="1300" b="1" i="0">
+                <a:solidFill>
+                  <a:srgbClr val="1F3B73"/>
+                </a:solidFill>
+                <a:latin typeface="Calibri"/>
+              </a:rPr>
+              <a:t>4  ·  BACKTEST BY PERIOD</a:t>
             </a:r>
           </a:p>
         </p:txBody>
       </p:sp>
       <p:graphicFrame>
         <p:nvGraphicFramePr>
-          <p:cNvPr id="3" name="Backtest MAPE 2023–2024, pre fee change"/>
+          <p:cNvPr id="4" name="Backtest MAPE 2022–2024  ·  before the fee change"/>
           <p:cNvGraphicFramePr>
             <a:graphicFrameLocks noGrp="1"/>
           </p:cNvGraphicFramePr>
           <p:nvPr/>
         </p:nvGraphicFramePr>
         <p:xfrm>
-          <a:off x="548640" y="1325880"/>
-          <a:ext cx="3657600" cy="4206240"/>
+          <a:off x="548640" y="1691640"/>
+          <a:ext cx="5394960" cy="4069080"/>
         </p:xfrm>
         <a:graphic>
           <a:graphicData uri="http://schemas.openxmlformats.org/drawingml/2006/chart">
@@ -8371,15 +7466,15 @@
       </p:graphicFrame>
       <p:graphicFrame>
         <p:nvGraphicFramePr>
-          <p:cNvPr id="4" name="Backtest MAPE 2025–2026, fee + model change"/>
+          <p:cNvPr id="5" name="Backtest MAPE 2025–2026  ·  after the fee change"/>
           <p:cNvGraphicFramePr>
             <a:graphicFrameLocks noGrp="1"/>
           </p:cNvGraphicFramePr>
           <p:nvPr/>
         </p:nvGraphicFramePr>
         <p:xfrm>
-          <a:off x="4480559" y="1325880"/>
-          <a:ext cx="3657600" cy="4206240"/>
+          <a:off x="6263640" y="1691640"/>
+          <a:ext cx="5394960" cy="4069080"/>
         </p:xfrm>
         <a:graphic>
           <a:graphicData uri="http://schemas.openxmlformats.org/drawingml/2006/chart">
@@ -8389,67 +7484,14 @@
       </p:graphicFrame>
       <p:sp>
         <p:nvSpPr>
-          <p:cNvPr id="5" name="Oval 4"/>
-          <p:cNvSpPr/>
-          <p:nvPr/>
-        </p:nvSpPr>
-        <p:spPr>
-          <a:xfrm>
-            <a:off x="8549640" y="1463040"/>
-            <a:ext cx="292608" cy="292608"/>
-          </a:xfrm>
-          <a:prstGeom prst="ellipse">
-            <a:avLst/>
-          </a:prstGeom>
-          <a:solidFill>
-            <a:srgbClr val="1F3B73"/>
-          </a:solidFill>
-          <a:ln>
-            <a:noFill/>
-          </a:ln>
-          <a:effectLst/>
-        </p:spPr>
-        <p:style>
-          <a:lnRef idx="1">
-            <a:schemeClr val="accent1"/>
-          </a:lnRef>
-          <a:fillRef idx="3">
-            <a:schemeClr val="accent1"/>
-          </a:fillRef>
-          <a:effectRef idx="2">
-            <a:schemeClr val="accent1"/>
-          </a:effectRef>
-          <a:fontRef idx="minor">
-            <a:schemeClr val="lt1"/>
-          </a:fontRef>
-        </p:style>
-        <p:txBody>
-          <a:bodyPr rtlCol="0" anchor="ctr" lIns="0" rIns="0" tIns="0" bIns="0"/>
-          <a:lstStyle/>
-          <a:p>
-            <a:pPr algn="ctr"/>
-            <a:r>
-              <a:rPr sz="1600" b="1">
-                <a:solidFill>
-                  <a:srgbClr val="FFFFFF"/>
-                </a:solidFill>
-                <a:latin typeface="Calibri"/>
-              </a:rPr>
-              <a:t/>
-            </a:r>
-          </a:p>
-        </p:txBody>
-      </p:sp>
-      <p:sp>
-        <p:nvSpPr>
           <p:cNvPr id="6" name="TextBox 5"/>
           <p:cNvSpPr txBox="1"/>
           <p:nvPr/>
         </p:nvSpPr>
         <p:spPr>
           <a:xfrm>
-            <a:off x="9006840" y="1417320"/>
-            <a:ext cx="2636215" cy="365760"/>
+            <a:off x="548640" y="5943600"/>
+            <a:ext cx="11094415" cy="457200"/>
           </a:xfrm>
           <a:prstGeom prst="rect">
             <a:avLst/>
@@ -8468,353 +7510,22 @@
               </a:spcAft>
             </a:pPr>
             <a:r>
-              <a:rPr sz="1600" b="1" i="0">
-                <a:solidFill>
-                  <a:srgbClr val="15202B"/>
+              <a:rPr sz="1500" b="0" i="0">
+                <a:solidFill>
+                  <a:srgbClr val="5B6573"/>
                 </a:solidFill>
                 <a:latin typeface="Calibri"/>
               </a:rPr>
-              <a:t>Passengers: an edge</a:t>
-            </a:r>
-          </a:p>
-        </p:txBody>
-      </p:sp>
-      <p:sp>
-        <p:nvSpPr>
-          <p:cNvPr id="7" name="TextBox 6"/>
-          <p:cNvSpPr txBox="1"/>
-          <p:nvPr/>
-        </p:nvSpPr>
-        <p:spPr>
-          <a:xfrm>
-            <a:off x="9006840" y="1783080"/>
-            <a:ext cx="2636215" cy="914400"/>
-          </a:xfrm>
-          <a:prstGeom prst="rect">
-            <a:avLst/>
-          </a:prstGeom>
-          <a:noFill/>
-        </p:spPr>
-        <p:txBody>
-          <a:bodyPr wrap="square" lIns="0" rIns="0" tIns="0" bIns="0" anchor="t">
-            <a:spAutoFit/>
-          </a:bodyPr>
-          <a:lstStyle/>
-          <a:p>
-            <a:pPr algn="l">
-              <a:spcAft>
-                <a:spcPts val="0"/>
-              </a:spcAft>
-            </a:pPr>
-            <a:r>
-              <a:rPr sz="1400" b="0" i="0">
-                <a:solidFill>
-                  <a:srgbClr val="1B1F24"/>
+              <a:t>Mean absolute % error, lower is better. </a:t>
+            </a:r>
+            <a:r>
+              <a:rPr sz="1500" b="1" i="0">
+                <a:solidFill>
+                  <a:srgbClr val="15202B"/>
                 </a:solidFill>
                 <a:latin typeface="Calibri"/>
               </a:rPr>
-              <a:t>Beats B1 in 16/18 quarters. Current-era p = 0.05 (blend).</a:t>
-            </a:r>
-          </a:p>
-        </p:txBody>
-      </p:sp>
-      <p:sp>
-        <p:nvSpPr>
-          <p:cNvPr id="8" name="Oval 7"/>
-          <p:cNvSpPr/>
-          <p:nvPr/>
-        </p:nvSpPr>
-        <p:spPr>
-          <a:xfrm>
-            <a:off x="8549640" y="2834639"/>
-            <a:ext cx="292608" cy="292608"/>
-          </a:xfrm>
-          <a:prstGeom prst="ellipse">
-            <a:avLst/>
-          </a:prstGeom>
-          <a:solidFill>
-            <a:srgbClr val="D1495B"/>
-          </a:solidFill>
-          <a:ln>
-            <a:noFill/>
-          </a:ln>
-          <a:effectLst/>
-        </p:spPr>
-        <p:style>
-          <a:lnRef idx="1">
-            <a:schemeClr val="accent1"/>
-          </a:lnRef>
-          <a:fillRef idx="3">
-            <a:schemeClr val="accent1"/>
-          </a:fillRef>
-          <a:effectRef idx="2">
-            <a:schemeClr val="accent1"/>
-          </a:effectRef>
-          <a:fontRef idx="minor">
-            <a:schemeClr val="lt1"/>
-          </a:fontRef>
-        </p:style>
-        <p:txBody>
-          <a:bodyPr rtlCol="0" anchor="ctr" lIns="0" rIns="0" tIns="0" bIns="0"/>
-          <a:lstStyle/>
-          <a:p>
-            <a:pPr algn="ctr"/>
-            <a:r>
-              <a:rPr sz="1600" b="1">
-                <a:solidFill>
-                  <a:srgbClr val="FFFFFF"/>
-                </a:solidFill>
-                <a:latin typeface="Calibri"/>
-              </a:rPr>
-              <a:t/>
-            </a:r>
-          </a:p>
-        </p:txBody>
-      </p:sp>
-      <p:sp>
-        <p:nvSpPr>
-          <p:cNvPr id="9" name="TextBox 8"/>
-          <p:cNvSpPr txBox="1"/>
-          <p:nvPr/>
-        </p:nvSpPr>
-        <p:spPr>
-          <a:xfrm>
-            <a:off x="9006840" y="2788920"/>
-            <a:ext cx="2636215" cy="365760"/>
-          </a:xfrm>
-          <a:prstGeom prst="rect">
-            <a:avLst/>
-          </a:prstGeom>
-          <a:noFill/>
-        </p:spPr>
-        <p:txBody>
-          <a:bodyPr wrap="square" lIns="0" rIns="0" tIns="0" bIns="0" anchor="t">
-            <a:spAutoFit/>
-          </a:bodyPr>
-          <a:lstStyle/>
-          <a:p>
-            <a:pPr algn="l">
-              <a:spcAft>
-                <a:spcPts val="0"/>
-              </a:spcAft>
-            </a:pPr>
-            <a:r>
-              <a:rPr sz="1600" b="1" i="0">
-                <a:solidFill>
-                  <a:srgbClr val="15202B"/>
-                </a:solidFill>
-                <a:latin typeface="Calibri"/>
-              </a:rPr>
-              <a:t>Fare: no edge yet</a:t>
-            </a:r>
-          </a:p>
-        </p:txBody>
-      </p:sp>
-      <p:sp>
-        <p:nvSpPr>
-          <p:cNvPr id="10" name="TextBox 9"/>
-          <p:cNvSpPr txBox="1"/>
-          <p:nvPr/>
-        </p:nvSpPr>
-        <p:spPr>
-          <a:xfrm>
-            <a:off x="9006840" y="3154679"/>
-            <a:ext cx="2636215" cy="914400"/>
-          </a:xfrm>
-          <a:prstGeom prst="rect">
-            <a:avLst/>
-          </a:prstGeom>
-          <a:noFill/>
-        </p:spPr>
-        <p:txBody>
-          <a:bodyPr wrap="square" lIns="0" rIns="0" tIns="0" bIns="0" anchor="t">
-            <a:spAutoFit/>
-          </a:bodyPr>
-          <a:lstStyle/>
-          <a:p>
-            <a:pPr algn="l">
-              <a:spcAft>
-                <a:spcPts val="0"/>
-              </a:spcAft>
-            </a:pPr>
-            <a:r>
-              <a:rPr sz="1400" b="0" i="0">
-                <a:solidFill>
-                  <a:srgbClr val="1B1F24"/>
-                </a:solidFill>
-                <a:latin typeface="Calibri"/>
-              </a:rPr>
-              <a:t>B1 wins 2023–24. Current-era gap 0.5 pt, p = 0.44.</a:t>
-            </a:r>
-          </a:p>
-        </p:txBody>
-      </p:sp>
-      <p:sp>
-        <p:nvSpPr>
-          <p:cNvPr id="11" name="Oval 10"/>
-          <p:cNvSpPr/>
-          <p:nvPr/>
-        </p:nvSpPr>
-        <p:spPr>
-          <a:xfrm>
-            <a:off x="8549640" y="4206240"/>
-            <a:ext cx="292608" cy="292608"/>
-          </a:xfrm>
-          <a:prstGeom prst="ellipse">
-            <a:avLst/>
-          </a:prstGeom>
-          <a:solidFill>
-            <a:srgbClr val="D1495B"/>
-          </a:solidFill>
-          <a:ln>
-            <a:noFill/>
-          </a:ln>
-          <a:effectLst/>
-        </p:spPr>
-        <p:style>
-          <a:lnRef idx="1">
-            <a:schemeClr val="accent1"/>
-          </a:lnRef>
-          <a:fillRef idx="3">
-            <a:schemeClr val="accent1"/>
-          </a:fillRef>
-          <a:effectRef idx="2">
-            <a:schemeClr val="accent1"/>
-          </a:effectRef>
-          <a:fontRef idx="minor">
-            <a:schemeClr val="lt1"/>
-          </a:fontRef>
-        </p:style>
-        <p:txBody>
-          <a:bodyPr rtlCol="0" anchor="ctr" lIns="0" rIns="0" tIns="0" bIns="0"/>
-          <a:lstStyle/>
-          <a:p>
-            <a:pPr algn="ctr"/>
-            <a:r>
-              <a:rPr sz="1600" b="1">
-                <a:solidFill>
-                  <a:srgbClr val="FFFFFF"/>
-                </a:solidFill>
-                <a:latin typeface="Calibri"/>
-              </a:rPr>
-              <a:t/>
-            </a:r>
-          </a:p>
-        </p:txBody>
-      </p:sp>
-      <p:sp>
-        <p:nvSpPr>
-          <p:cNvPr id="12" name="TextBox 11"/>
-          <p:cNvSpPr txBox="1"/>
-          <p:nvPr/>
-        </p:nvSpPr>
-        <p:spPr>
-          <a:xfrm>
-            <a:off x="9006840" y="4160520"/>
-            <a:ext cx="2636215" cy="365760"/>
-          </a:xfrm>
-          <a:prstGeom prst="rect">
-            <a:avLst/>
-          </a:prstGeom>
-          <a:noFill/>
-        </p:spPr>
-        <p:txBody>
-          <a:bodyPr wrap="square" lIns="0" rIns="0" tIns="0" bIns="0" anchor="t">
-            <a:spAutoFit/>
-          </a:bodyPr>
-          <a:lstStyle/>
-          <a:p>
-            <a:pPr algn="l">
-              <a:spcAft>
-                <a:spcPts val="0"/>
-              </a:spcAft>
-            </a:pPr>
-            <a:r>
-              <a:rPr sz="1600" b="1" i="0">
-                <a:solidFill>
-                  <a:srgbClr val="15202B"/>
-                </a:solidFill>
-                <a:latin typeface="Calibri"/>
-              </a:rPr>
-              <a:t>Revenue: not proven</a:t>
-            </a:r>
-          </a:p>
-        </p:txBody>
-      </p:sp>
-      <p:sp>
-        <p:nvSpPr>
-          <p:cNvPr id="13" name="TextBox 12"/>
-          <p:cNvSpPr txBox="1"/>
-          <p:nvPr/>
-        </p:nvSpPr>
-        <p:spPr>
-          <a:xfrm>
-            <a:off x="9006840" y="4526280"/>
-            <a:ext cx="2636215" cy="914400"/>
-          </a:xfrm>
-          <a:prstGeom prst="rect">
-            <a:avLst/>
-          </a:prstGeom>
-          <a:noFill/>
-        </p:spPr>
-        <p:txBody>
-          <a:bodyPr wrap="square" lIns="0" rIns="0" tIns="0" bIns="0" anchor="t">
-            <a:spAutoFit/>
-          </a:bodyPr>
-          <a:lstStyle/>
-          <a:p>
-            <a:pPr algn="l">
-              <a:spcAft>
-                <a:spcPts val="0"/>
-              </a:spcAft>
-            </a:pPr>
-            <a:r>
-              <a:rPr sz="1400" b="0" i="0">
-                <a:solidFill>
-                  <a:srgbClr val="1B1F24"/>
-                </a:solidFill>
-                <a:latin typeface="Calibri"/>
-              </a:rPr>
-              <a:t>The client's number: p = 0.53. Sell the split, not the point.</a:t>
-            </a:r>
-          </a:p>
-        </p:txBody>
-      </p:sp>
-      <p:sp>
-        <p:nvSpPr>
-          <p:cNvPr id="14" name="TextBox 13"/>
-          <p:cNvSpPr txBox="1"/>
-          <p:nvPr/>
-        </p:nvSpPr>
-        <p:spPr>
-          <a:xfrm>
-            <a:off x="548640" y="5760720"/>
-            <a:ext cx="11094415" cy="685800"/>
-          </a:xfrm>
-          <a:prstGeom prst="rect">
-            <a:avLst/>
-          </a:prstGeom>
-          <a:noFill/>
-        </p:spPr>
-        <p:txBody>
-          <a:bodyPr wrap="square" lIns="0" rIns="0" tIns="0" bIns="0" anchor="t">
-            <a:spAutoFit/>
-          </a:bodyPr>
-          <a:lstStyle/>
-          <a:p>
-            <a:pPr algn="l">
-              <a:spcAft>
-                <a:spcPts val="0"/>
-              </a:spcAft>
-            </a:pPr>
-            <a:r>
-              <a:rPr sz="1200" b="0" i="0">
-                <a:solidFill>
-                  <a:srgbClr val="5B6573"/>
-                </a:solidFill>
-                <a:latin typeface="Calibri"/>
-              </a:rPr>
-              <a:t>MAPE, vintage-correct backtest: every parameter re-estimated from what was public at the time. Our method = TSA chain (passengers), out-of-sample price blend (fare), their product (revenue). 2022 is reported separately in Evaluation/README because COVID bases flatter every method. p = Diebold-Mariano vs B1, HLN small-sample correction, n = 6.</a:t>
+              <a:t>Only the passenger edge is significant (p = 0.05, 2025–26).</a:t>
             </a:r>
           </a:p>
         </p:txBody>
@@ -8857,7 +7568,7 @@
         </p:nvSpPr>
         <p:spPr>
           <a:xfrm>
-            <a:off x="548640" y="384048"/>
+            <a:off x="548640" y="685800"/>
             <a:ext cx="11094415" cy="731520"/>
           </a:xfrm>
         </p:spPr>
@@ -8873,21 +7584,21 @@
                 </a:solidFill>
                 <a:latin typeface="Cambria"/>
               </a:rPr>
-              <a:t>What we got wrong, and why</a:t>
-            </a:r>
-          </a:p>
-        </p:txBody>
-      </p:sp>
-      <p:sp>
-        <p:nvSpPr>
-          <p:cNvPr id="3" name="TextBox 2"/>
+              <a:t>The TSA data held; the trip factor didn't</a:t>
+            </a:r>
+          </a:p>
+        </p:txBody>
+      </p:sp>
+      <p:sp>
+        <p:nvSpPr>
+          <p:cNvPr id="3" name="Kicker"/>
           <p:cNvSpPr txBox="1"/>
           <p:nvPr/>
         </p:nvSpPr>
         <p:spPr>
           <a:xfrm>
-            <a:off x="548640" y="1188720"/>
-            <a:ext cx="6720840" cy="274320"/>
+            <a:off x="548640" y="411480"/>
+            <a:ext cx="11094415" cy="274320"/>
           </a:xfrm>
           <a:prstGeom prst="rect">
             <a:avLst/>
@@ -8906,524 +7617,27 @@
               </a:spcAft>
             </a:pPr>
             <a:r>
-              <a:rPr sz="1200" b="1" i="0">
-                <a:solidFill>
-                  <a:srgbClr val="AEB8C6"/>
+              <a:rPr sz="1300" b="1" i="0">
+                <a:solidFill>
+                  <a:srgbClr val="E9A13B"/>
                 </a:solidFill>
                 <a:latin typeface="Calibri"/>
               </a:rPr>
-              <a:t>SCORECARD</a:t>
-            </a:r>
-          </a:p>
-        </p:txBody>
-      </p:sp>
-      <p:graphicFrame>
-        <p:nvGraphicFramePr>
-          <p:cNvPr id="4" name="Scorecard"/>
-          <p:cNvGraphicFramePr>
-            <a:graphicFrameLocks noGrp="1"/>
-          </p:cNvGraphicFramePr>
-          <p:nvPr/>
-        </p:nvGraphicFramePr>
-        <p:xfrm>
-          <a:off x="548640" y="1508760"/>
-          <a:ext cx="6720840" cy="1463040"/>
-        </p:xfrm>
-        <a:graphic>
-          <a:graphicData uri="http://schemas.openxmlformats.org/drawingml/2006/table">
-            <a:tbl>
-              <a:tblPr firstRow="1" bandRow="1">
-                <a:tableStyleId>{5C22544A-7EE6-4342-B048-85BDC9FD1C3A}</a:tableStyleId>
-              </a:tblPr>
-              <a:tblGrid>
-                <a:gridCol w="1965960"/>
-                <a:gridCol w="1188720"/>
-                <a:gridCol w="1188720"/>
-                <a:gridCol w="1188720"/>
-                <a:gridCol w="1188720"/>
-              </a:tblGrid>
-              <a:tr h="365760">
-                <a:tc>
-                  <a:txBody>
-                    <a:bodyPr wrap="square"/>
-                    <a:lstStyle/>
-                    <a:p>
-                      <a:pPr algn="l"/>
-                      <a:r>
-                        <a:rPr sz="1300" b="1" i="0">
-                          <a:solidFill>
-                            <a:srgbClr val="FFFFFF"/>
-                          </a:solidFill>
-                          <a:latin typeface="Calibri"/>
-                        </a:rPr>
-                        <a:t/>
-                      </a:r>
-                    </a:p>
-                  </a:txBody>
-                  <a:tcPr marL="91440" marR="91440" marT="45720" marB="45720" anchor="ctr">
-                    <a:solidFill>
-                      <a:srgbClr val="1F3B73"/>
-                    </a:solidFill>
-                  </a:tcPr>
-                </a:tc>
-                <a:tc>
-                  <a:txBody>
-                    <a:bodyPr wrap="square"/>
-                    <a:lstStyle/>
-                    <a:p>
-                      <a:pPr algn="l"/>
-                      <a:r>
-                        <a:rPr sz="1300" b="1" i="0">
-                          <a:solidFill>
-                            <a:srgbClr val="FFFFFF"/>
-                          </a:solidFill>
-                          <a:latin typeface="Calibri"/>
-                        </a:rPr>
-                        <a:t>Forecast</a:t>
-                      </a:r>
-                    </a:p>
-                  </a:txBody>
-                  <a:tcPr marL="91440" marR="91440" marT="45720" marB="45720" anchor="ctr">
-                    <a:solidFill>
-                      <a:srgbClr val="1F3B73"/>
-                    </a:solidFill>
-                  </a:tcPr>
-                </a:tc>
-                <a:tc>
-                  <a:txBody>
-                    <a:bodyPr wrap="square"/>
-                    <a:lstStyle/>
-                    <a:p>
-                      <a:pPr algn="l"/>
-                      <a:r>
-                        <a:rPr sz="1300" b="1" i="0">
-                          <a:solidFill>
-                            <a:srgbClr val="FFFFFF"/>
-                          </a:solidFill>
-                          <a:latin typeface="Calibri"/>
-                        </a:rPr>
-                        <a:t>Actual</a:t>
-                      </a:r>
-                    </a:p>
-                  </a:txBody>
-                  <a:tcPr marL="91440" marR="91440" marT="45720" marB="45720" anchor="ctr">
-                    <a:solidFill>
-                      <a:srgbClr val="1F3B73"/>
-                    </a:solidFill>
-                  </a:tcPr>
-                </a:tc>
-                <a:tc>
-                  <a:txBody>
-                    <a:bodyPr wrap="square"/>
-                    <a:lstStyle/>
-                    <a:p>
-                      <a:pPr algn="l"/>
-                      <a:r>
-                        <a:rPr sz="1300" b="1" i="0">
-                          <a:solidFill>
-                            <a:srgbClr val="FFFFFF"/>
-                          </a:solidFill>
-                          <a:latin typeface="Calibri"/>
-                        </a:rPr>
-                        <a:t>Error, in 80%?</a:t>
-                      </a:r>
-                    </a:p>
-                  </a:txBody>
-                  <a:tcPr marL="91440" marR="91440" marT="45720" marB="45720" anchor="ctr">
-                    <a:solidFill>
-                      <a:srgbClr val="1F3B73"/>
-                    </a:solidFill>
-                  </a:tcPr>
-                </a:tc>
-                <a:tc>
-                  <a:txBody>
-                    <a:bodyPr wrap="square"/>
-                    <a:lstStyle/>
-                    <a:p>
-                      <a:pPr algn="l"/>
-                      <a:r>
-                        <a:rPr sz="1300" b="1" i="0">
-                          <a:solidFill>
-                            <a:srgbClr val="FFFFFF"/>
-                          </a:solidFill>
-                          <a:latin typeface="Calibri"/>
-                        </a:rPr>
-                        <a:t>B1 error</a:t>
-                      </a:r>
-                    </a:p>
-                  </a:txBody>
-                  <a:tcPr marL="91440" marR="91440" marT="45720" marB="45720" anchor="ctr">
-                    <a:solidFill>
-                      <a:srgbClr val="1F3B73"/>
-                    </a:solidFill>
-                  </a:tcPr>
-                </a:tc>
-              </a:tr>
-              <a:tr h="365760">
-                <a:tc>
-                  <a:txBody>
-                    <a:bodyPr wrap="square"/>
-                    <a:lstStyle/>
-                    <a:p>
-                      <a:pPr algn="l"/>
-                      <a:r>
-                        <a:rPr sz="1400" b="1" i="0">
-                          <a:solidFill>
-                            <a:srgbClr val="FFFFFF"/>
-                          </a:solidFill>
-                          <a:latin typeface="Calibri"/>
-                        </a:rPr>
-                        <a:t>Revenue passengers</a:t>
-                      </a:r>
-                    </a:p>
-                  </a:txBody>
-                  <a:tcPr marL="91440" marR="91440" marT="45720" marB="45720" anchor="ctr">
-                    <a:solidFill>
-                      <a:srgbClr val="22324A"/>
-                    </a:solidFill>
-                  </a:tcPr>
-                </a:tc>
-                <a:tc>
-                  <a:txBody>
-                    <a:bodyPr wrap="square"/>
-                    <a:lstStyle/>
-                    <a:p>
-                      <a:pPr algn="l"/>
-                      <a:r>
-                        <a:rPr sz="1400" b="0" i="0">
-                          <a:solidFill>
-                            <a:srgbClr val="FFFFFF"/>
-                          </a:solidFill>
-                          <a:latin typeface="Calibri"/>
-                        </a:rPr>
-                        <a:t>32,912k</a:t>
-                      </a:r>
-                    </a:p>
-                  </a:txBody>
-                  <a:tcPr marL="91440" marR="91440" marT="45720" marB="45720" anchor="ctr">
-                    <a:solidFill>
-                      <a:srgbClr val="22324A"/>
-                    </a:solidFill>
-                  </a:tcPr>
-                </a:tc>
-                <a:tc>
-                  <a:txBody>
-                    <a:bodyPr wrap="square"/>
-                    <a:lstStyle/>
-                    <a:p>
-                      <a:pPr algn="l"/>
-                      <a:r>
-                        <a:rPr sz="1400" b="0" i="1">
-                          <a:solidFill>
-                            <a:srgbClr val="E9A13B"/>
-                          </a:solidFill>
-                          <a:latin typeface="Calibri"/>
-                        </a:rPr>
-                        <a:t>[—]</a:t>
-                      </a:r>
-                    </a:p>
-                  </a:txBody>
-                  <a:tcPr marL="91440" marR="91440" marT="45720" marB="45720" anchor="ctr">
-                    <a:solidFill>
-                      <a:srgbClr val="22324A"/>
-                    </a:solidFill>
-                  </a:tcPr>
-                </a:tc>
-                <a:tc>
-                  <a:txBody>
-                    <a:bodyPr wrap="square"/>
-                    <a:lstStyle/>
-                    <a:p>
-                      <a:pPr algn="l"/>
-                      <a:r>
-                        <a:rPr sz="1400" b="0" i="1">
-                          <a:solidFill>
-                            <a:srgbClr val="E9A13B"/>
-                          </a:solidFill>
-                          <a:latin typeface="Calibri"/>
-                        </a:rPr>
-                        <a:t>[—]</a:t>
-                      </a:r>
-                    </a:p>
-                  </a:txBody>
-                  <a:tcPr marL="91440" marR="91440" marT="45720" marB="45720" anchor="ctr">
-                    <a:solidFill>
-                      <a:srgbClr val="22324A"/>
-                    </a:solidFill>
-                  </a:tcPr>
-                </a:tc>
-                <a:tc>
-                  <a:txBody>
-                    <a:bodyPr wrap="square"/>
-                    <a:lstStyle/>
-                    <a:p>
-                      <a:pPr algn="l"/>
-                      <a:r>
-                        <a:rPr sz="1400" b="0" i="1">
-                          <a:solidFill>
-                            <a:srgbClr val="E9A13B"/>
-                          </a:solidFill>
-                          <a:latin typeface="Calibri"/>
-                        </a:rPr>
-                        <a:t>[—]</a:t>
-                      </a:r>
-                    </a:p>
-                  </a:txBody>
-                  <a:tcPr marL="91440" marR="91440" marT="45720" marB="45720" anchor="ctr">
-                    <a:solidFill>
-                      <a:srgbClr val="22324A"/>
-                    </a:solidFill>
-                  </a:tcPr>
-                </a:tc>
-              </a:tr>
-              <a:tr h="365760">
-                <a:tc>
-                  <a:txBody>
-                    <a:bodyPr wrap="square"/>
-                    <a:lstStyle/>
-                    <a:p>
-                      <a:pPr algn="l"/>
-                      <a:r>
-                        <a:rPr sz="1400" b="1" i="0">
-                          <a:solidFill>
-                            <a:srgbClr val="FFFFFF"/>
-                          </a:solidFill>
-                          <a:latin typeface="Calibri"/>
-                        </a:rPr>
-                        <a:t>Average fare</a:t>
-                      </a:r>
-                    </a:p>
-                  </a:txBody>
-                  <a:tcPr marL="91440" marR="91440" marT="45720" marB="45720" anchor="ctr">
-                    <a:solidFill>
-                      <a:srgbClr val="22324A"/>
-                    </a:solidFill>
-                  </a:tcPr>
-                </a:tc>
-                <a:tc>
-                  <a:txBody>
-                    <a:bodyPr wrap="square"/>
-                    <a:lstStyle/>
-                    <a:p>
-                      <a:pPr algn="l"/>
-                      <a:r>
-                        <a:rPr sz="1400" b="0" i="0">
-                          <a:solidFill>
-                            <a:srgbClr val="FFFFFF"/>
-                          </a:solidFill>
-                          <a:latin typeface="Calibri"/>
-                        </a:rPr>
-                        <a:t>$229.34</a:t>
-                      </a:r>
-                    </a:p>
-                  </a:txBody>
-                  <a:tcPr marL="91440" marR="91440" marT="45720" marB="45720" anchor="ctr">
-                    <a:solidFill>
-                      <a:srgbClr val="22324A"/>
-                    </a:solidFill>
-                  </a:tcPr>
-                </a:tc>
-                <a:tc>
-                  <a:txBody>
-                    <a:bodyPr wrap="square"/>
-                    <a:lstStyle/>
-                    <a:p>
-                      <a:pPr algn="l"/>
-                      <a:r>
-                        <a:rPr sz="1400" b="0" i="1">
-                          <a:solidFill>
-                            <a:srgbClr val="E9A13B"/>
-                          </a:solidFill>
-                          <a:latin typeface="Calibri"/>
-                        </a:rPr>
-                        <a:t>[—]</a:t>
-                      </a:r>
-                    </a:p>
-                  </a:txBody>
-                  <a:tcPr marL="91440" marR="91440" marT="45720" marB="45720" anchor="ctr">
-                    <a:solidFill>
-                      <a:srgbClr val="22324A"/>
-                    </a:solidFill>
-                  </a:tcPr>
-                </a:tc>
-                <a:tc>
-                  <a:txBody>
-                    <a:bodyPr wrap="square"/>
-                    <a:lstStyle/>
-                    <a:p>
-                      <a:pPr algn="l"/>
-                      <a:r>
-                        <a:rPr sz="1400" b="0" i="1">
-                          <a:solidFill>
-                            <a:srgbClr val="E9A13B"/>
-                          </a:solidFill>
-                          <a:latin typeface="Calibri"/>
-                        </a:rPr>
-                        <a:t>[—]</a:t>
-                      </a:r>
-                    </a:p>
-                  </a:txBody>
-                  <a:tcPr marL="91440" marR="91440" marT="45720" marB="45720" anchor="ctr">
-                    <a:solidFill>
-                      <a:srgbClr val="22324A"/>
-                    </a:solidFill>
-                  </a:tcPr>
-                </a:tc>
-                <a:tc>
-                  <a:txBody>
-                    <a:bodyPr wrap="square"/>
-                    <a:lstStyle/>
-                    <a:p>
-                      <a:pPr algn="l"/>
-                      <a:r>
-                        <a:rPr sz="1400" b="0" i="1">
-                          <a:solidFill>
-                            <a:srgbClr val="E9A13B"/>
-                          </a:solidFill>
-                          <a:latin typeface="Calibri"/>
-                        </a:rPr>
-                        <a:t>[—]</a:t>
-                      </a:r>
-                    </a:p>
-                  </a:txBody>
-                  <a:tcPr marL="91440" marR="91440" marT="45720" marB="45720" anchor="ctr">
-                    <a:solidFill>
-                      <a:srgbClr val="22324A"/>
-                    </a:solidFill>
-                  </a:tcPr>
-                </a:tc>
-              </a:tr>
-              <a:tr h="365760">
-                <a:tc>
-                  <a:txBody>
-                    <a:bodyPr wrap="square"/>
-                    <a:lstStyle/>
-                    <a:p>
-                      <a:pPr algn="l"/>
-                      <a:r>
-                        <a:rPr sz="1400" b="1" i="0">
-                          <a:solidFill>
-                            <a:srgbClr val="FFFFFF"/>
-                          </a:solidFill>
-                          <a:latin typeface="Calibri"/>
-                        </a:rPr>
-                        <a:t>Passenger revenue</a:t>
-                      </a:r>
-                    </a:p>
-                  </a:txBody>
-                  <a:tcPr marL="91440" marR="91440" marT="45720" marB="45720" anchor="ctr">
-                    <a:solidFill>
-                      <a:srgbClr val="22324A"/>
-                    </a:solidFill>
-                  </a:tcPr>
-                </a:tc>
-                <a:tc>
-                  <a:txBody>
-                    <a:bodyPr wrap="square"/>
-                    <a:lstStyle/>
-                    <a:p>
-                      <a:pPr algn="l"/>
-                      <a:r>
-                        <a:rPr sz="1400" b="0" i="0">
-                          <a:solidFill>
-                            <a:srgbClr val="FFFFFF"/>
-                          </a:solidFill>
-                          <a:latin typeface="Calibri"/>
-                        </a:rPr>
-                        <a:t>$7.55bn</a:t>
-                      </a:r>
-                    </a:p>
-                  </a:txBody>
-                  <a:tcPr marL="91440" marR="91440" marT="45720" marB="45720" anchor="ctr">
-                    <a:solidFill>
-                      <a:srgbClr val="22324A"/>
-                    </a:solidFill>
-                  </a:tcPr>
-                </a:tc>
-                <a:tc>
-                  <a:txBody>
-                    <a:bodyPr wrap="square"/>
-                    <a:lstStyle/>
-                    <a:p>
-                      <a:pPr algn="l"/>
-                      <a:r>
-                        <a:rPr sz="1400" b="0" i="1">
-                          <a:solidFill>
-                            <a:srgbClr val="E9A13B"/>
-                          </a:solidFill>
-                          <a:latin typeface="Calibri"/>
-                        </a:rPr>
-                        <a:t>[—]</a:t>
-                      </a:r>
-                    </a:p>
-                  </a:txBody>
-                  <a:tcPr marL="91440" marR="91440" marT="45720" marB="45720" anchor="ctr">
-                    <a:solidFill>
-                      <a:srgbClr val="22324A"/>
-                    </a:solidFill>
-                  </a:tcPr>
-                </a:tc>
-                <a:tc>
-                  <a:txBody>
-                    <a:bodyPr wrap="square"/>
-                    <a:lstStyle/>
-                    <a:p>
-                      <a:pPr algn="l"/>
-                      <a:r>
-                        <a:rPr sz="1400" b="0" i="1">
-                          <a:solidFill>
-                            <a:srgbClr val="E9A13B"/>
-                          </a:solidFill>
-                          <a:latin typeface="Calibri"/>
-                        </a:rPr>
-                        <a:t>[—]</a:t>
-                      </a:r>
-                    </a:p>
-                  </a:txBody>
-                  <a:tcPr marL="91440" marR="91440" marT="45720" marB="45720" anchor="ctr">
-                    <a:solidFill>
-                      <a:srgbClr val="22324A"/>
-                    </a:solidFill>
-                  </a:tcPr>
-                </a:tc>
-                <a:tc>
-                  <a:txBody>
-                    <a:bodyPr wrap="square"/>
-                    <a:lstStyle/>
-                    <a:p>
-                      <a:pPr algn="l"/>
-                      <a:r>
-                        <a:rPr sz="1400" b="0" i="1">
-                          <a:solidFill>
-                            <a:srgbClr val="E9A13B"/>
-                          </a:solidFill>
-                          <a:latin typeface="Calibri"/>
-                        </a:rPr>
-                        <a:t>[—]</a:t>
-                      </a:r>
-                    </a:p>
-                  </a:txBody>
-                  <a:tcPr marL="91440" marR="91440" marT="45720" marB="45720" anchor="ctr">
-                    <a:solidFill>
-                      <a:srgbClr val="22324A"/>
-                    </a:solidFill>
-                  </a:tcPr>
-                </a:tc>
-              </a:tr>
-            </a:tbl>
-          </a:graphicData>
-        </a:graphic>
-      </p:graphicFrame>
-      <p:sp>
-        <p:nvSpPr>
-          <p:cNvPr id="5" name="TextBox 4"/>
+              <a:t>5  ·  WHAT WE GOT WRONG AND WHY</a:t>
+            </a:r>
+          </a:p>
+        </p:txBody>
+      </p:sp>
+      <p:sp>
+        <p:nvSpPr>
+          <p:cNvPr id="4" name="TextBox 3"/>
           <p:cNvSpPr txBox="1"/>
           <p:nvPr/>
         </p:nvSpPr>
         <p:spPr>
           <a:xfrm>
-            <a:off x="548640" y="3200400"/>
-            <a:ext cx="6720840" cy="274320"/>
+            <a:off x="548640" y="1737360"/>
+            <a:ext cx="5486400" cy="274320"/>
           </a:xfrm>
           <a:prstGeom prst="rect">
             <a:avLst/>
@@ -9442,445 +7656,27 @@
               </a:spcAft>
             </a:pPr>
             <a:r>
-              <a:rPr sz="1200" b="1" i="0">
+              <a:rPr sz="1300" b="1" i="0">
                 <a:solidFill>
                   <a:srgbClr val="AEB8C6"/>
                 </a:solidFill>
                 <a:latin typeface="Calibri"/>
               </a:rPr>
-              <a:t>WHY  ·  THE FOUR RISKS WE REGISTERED BEFORE THE PRINT</a:t>
-            </a:r>
-          </a:p>
-        </p:txBody>
-      </p:sp>
-      <p:graphicFrame>
-        <p:nvGraphicFramePr>
-          <p:cNvPr id="6" name="Risk ledger"/>
-          <p:cNvGraphicFramePr>
-            <a:graphicFrameLocks noGrp="1"/>
-          </p:cNvGraphicFramePr>
-          <p:nvPr/>
-        </p:nvGraphicFramePr>
-        <p:xfrm>
-          <a:off x="548640" y="3520440"/>
-          <a:ext cx="6720840" cy="1737360"/>
-        </p:xfrm>
-        <a:graphic>
-          <a:graphicData uri="http://schemas.openxmlformats.org/drawingml/2006/table">
-            <a:tbl>
-              <a:tblPr firstRow="1" bandRow="1">
-                <a:tableStyleId>{5C22544A-7EE6-4342-B048-85BDC9FD1C3A}</a:tableStyleId>
-              </a:tblPr>
-              <a:tblGrid>
-                <a:gridCol w="2240280"/>
-                <a:gridCol w="2240280"/>
-                <a:gridCol w="2240280"/>
-              </a:tblGrid>
-              <a:tr h="347472">
-                <a:tc>
-                  <a:txBody>
-                    <a:bodyPr wrap="square"/>
-                    <a:lstStyle/>
-                    <a:p>
-                      <a:pPr algn="l"/>
-                      <a:r>
-                        <a:rPr sz="1300" b="1" i="0">
-                          <a:solidFill>
-                            <a:srgbClr val="FFFFFF"/>
-                          </a:solidFill>
-                          <a:latin typeface="Calibri"/>
-                        </a:rPr>
-                        <a:t>Risk</a:t>
-                      </a:r>
-                    </a:p>
-                  </a:txBody>
-                  <a:tcPr marL="91440" marR="91440" marT="45720" marB="45720" anchor="ctr">
-                    <a:solidFill>
-                      <a:srgbClr val="1F3B73"/>
-                    </a:solidFill>
-                  </a:tcPr>
-                </a:tc>
-                <a:tc>
-                  <a:txBody>
-                    <a:bodyPr wrap="square"/>
-                    <a:lstStyle/>
-                    <a:p>
-                      <a:pPr algn="l"/>
-                      <a:r>
-                        <a:rPr sz="1300" b="1" i="0">
-                          <a:solidFill>
-                            <a:srgbClr val="FFFFFF"/>
-                          </a:solidFill>
-                          <a:latin typeface="Calibri"/>
-                        </a:rPr>
-                        <a:t>We assumed</a:t>
-                      </a:r>
-                    </a:p>
-                  </a:txBody>
-                  <a:tcPr marL="91440" marR="91440" marT="45720" marB="45720" anchor="ctr">
-                    <a:solidFill>
-                      <a:srgbClr val="1F3B73"/>
-                    </a:solidFill>
-                  </a:tcPr>
-                </a:tc>
-                <a:tc>
-                  <a:txBody>
-                    <a:bodyPr wrap="square"/>
-                    <a:lstStyle/>
-                    <a:p>
-                      <a:pPr algn="l"/>
-                      <a:r>
-                        <a:rPr sz="1300" b="1" i="0">
-                          <a:solidFill>
-                            <a:srgbClr val="FFFFFF"/>
-                          </a:solidFill>
-                          <a:latin typeface="Calibri"/>
-                        </a:rPr>
-                        <a:t>What happened</a:t>
-                      </a:r>
-                    </a:p>
-                  </a:txBody>
-                  <a:tcPr marL="91440" marR="91440" marT="45720" marB="45720" anchor="ctr">
-                    <a:solidFill>
-                      <a:srgbClr val="1F3B73"/>
-                    </a:solidFill>
-                  </a:tcPr>
-                </a:tc>
-              </a:tr>
-              <a:tr h="347472">
-                <a:tc>
-                  <a:txBody>
-                    <a:bodyPr wrap="square"/>
-                    <a:lstStyle/>
-                    <a:p>
-                      <a:pPr algn="l"/>
-                      <a:r>
-                        <a:rPr sz="1400" b="1" i="0">
-                          <a:solidFill>
-                            <a:srgbClr val="D1495B"/>
-                          </a:solidFill>
-                          <a:latin typeface="Calibri"/>
-                        </a:rPr>
-                        <a:t>1  </a:t>
-                      </a:r>
-                      <a:r>
-                        <a:rPr sz="1400" b="1" i="0">
-                          <a:solidFill>
-                            <a:srgbClr val="FFFFFF"/>
-                          </a:solidFill>
-                          <a:latin typeface="Calibri"/>
-                        </a:rPr>
-                        <a:t>Trip factor</a:t>
-                      </a:r>
-                    </a:p>
-                  </a:txBody>
-                  <a:tcPr marL="91440" marR="91440" marT="45720" marB="45720" anchor="ctr">
-                    <a:solidFill>
-                      <a:srgbClr val="22324A"/>
-                    </a:solidFill>
-                  </a:tcPr>
-                </a:tc>
-                <a:tc>
-                  <a:txBody>
-                    <a:bodyPr wrap="square"/>
-                    <a:lstStyle/>
-                    <a:p>
-                      <a:pPr algn="l"/>
-                      <a:r>
-                        <a:rPr sz="1400" b="0" i="0">
-                          <a:solidFill>
-                            <a:srgbClr val="FFFFFF"/>
-                          </a:solidFill>
-                          <a:latin typeface="Calibri"/>
-                        </a:rPr>
-                        <a:t>1.3098 (+3.4% YoY)</a:t>
-                      </a:r>
-                    </a:p>
-                  </a:txBody>
-                  <a:tcPr marL="91440" marR="91440" marT="45720" marB="45720" anchor="ctr">
-                    <a:solidFill>
-                      <a:srgbClr val="22324A"/>
-                    </a:solidFill>
-                  </a:tcPr>
-                </a:tc>
-                <a:tc>
-                  <a:txBody>
-                    <a:bodyPr wrap="square"/>
-                    <a:lstStyle/>
-                    <a:p>
-                      <a:pPr algn="l"/>
-                      <a:r>
-                        <a:rPr sz="1400" b="0" i="1">
-                          <a:solidFill>
-                            <a:srgbClr val="E9A13B"/>
-                          </a:solidFill>
-                          <a:latin typeface="Calibri"/>
-                        </a:rPr>
-                        <a:t>[after the print]</a:t>
-                      </a:r>
-                    </a:p>
-                  </a:txBody>
-                  <a:tcPr marL="91440" marR="91440" marT="45720" marB="45720" anchor="ctr">
-                    <a:solidFill>
-                      <a:srgbClr val="22324A"/>
-                    </a:solidFill>
-                  </a:tcPr>
-                </a:tc>
-              </a:tr>
-              <a:tr h="347472">
-                <a:tc>
-                  <a:txBody>
-                    <a:bodyPr wrap="square"/>
-                    <a:lstStyle/>
-                    <a:p>
-                      <a:pPr algn="l"/>
-                      <a:r>
-                        <a:rPr sz="1400" b="1" i="0">
-                          <a:solidFill>
-                            <a:srgbClr val="D1495B"/>
-                          </a:solidFill>
-                          <a:latin typeface="Calibri"/>
-                        </a:rPr>
-                        <a:t>2  </a:t>
-                      </a:r>
-                      <a:r>
-                        <a:rPr sz="1400" b="1" i="0">
-                          <a:solidFill>
-                            <a:srgbClr val="FFFFFF"/>
-                          </a:solidFill>
-                          <a:latin typeface="Calibri"/>
-                        </a:rPr>
-                        <a:t>A one-off in the print</a:t>
-                      </a:r>
-                    </a:p>
-                  </a:txBody>
-                  <a:tcPr marL="91440" marR="91440" marT="45720" marB="45720" anchor="ctr">
-                    <a:solidFill>
-                      <a:srgbClr val="22324A"/>
-                    </a:solidFill>
-                  </a:tcPr>
-                </a:tc>
-                <a:tc>
-                  <a:txBody>
-                    <a:bodyPr wrap="square"/>
-                    <a:lstStyle/>
-                    <a:p>
-                      <a:pPr algn="l"/>
-                      <a:r>
-                        <a:rPr sz="1400" b="0" i="0">
-                          <a:solidFill>
-                            <a:srgbClr val="FFFFFF"/>
-                          </a:solidFill>
-                          <a:latin typeface="Calibri"/>
-                        </a:rPr>
-                        <a:t>none in Q3</a:t>
-                      </a:r>
-                    </a:p>
-                  </a:txBody>
-                  <a:tcPr marL="91440" marR="91440" marT="45720" marB="45720" anchor="ctr">
-                    <a:solidFill>
-                      <a:srgbClr val="22324A"/>
-                    </a:solidFill>
-                  </a:tcPr>
-                </a:tc>
-                <a:tc>
-                  <a:txBody>
-                    <a:bodyPr wrap="square"/>
-                    <a:lstStyle/>
-                    <a:p>
-                      <a:pPr algn="l"/>
-                      <a:r>
-                        <a:rPr sz="1400" b="0" i="1">
-                          <a:solidFill>
-                            <a:srgbClr val="E9A13B"/>
-                          </a:solidFill>
-                          <a:latin typeface="Calibri"/>
-                        </a:rPr>
-                        <a:t>[after the print]</a:t>
-                      </a:r>
-                    </a:p>
-                  </a:txBody>
-                  <a:tcPr marL="91440" marR="91440" marT="45720" marB="45720" anchor="ctr">
-                    <a:solidFill>
-                      <a:srgbClr val="22324A"/>
-                    </a:solidFill>
-                  </a:tcPr>
-                </a:tc>
-              </a:tr>
-              <a:tr h="347472">
-                <a:tc>
-                  <a:txBody>
-                    <a:bodyPr wrap="square"/>
-                    <a:lstStyle/>
-                    <a:p>
-                      <a:pPr algn="l"/>
-                      <a:r>
-                        <a:rPr sz="1400" b="1" i="0">
-                          <a:solidFill>
-                            <a:srgbClr val="D1495B"/>
-                          </a:solidFill>
-                          <a:latin typeface="Calibri"/>
-                        </a:rPr>
-                        <a:t>3  </a:t>
-                      </a:r>
-                      <a:r>
-                        <a:rPr sz="1400" b="1" i="0">
-                          <a:solidFill>
-                            <a:srgbClr val="FFFFFF"/>
-                          </a:solidFill>
-                          <a:latin typeface="Calibri"/>
-                        </a:rPr>
-                        <a:t>Capacity below guide</a:t>
-                      </a:r>
-                    </a:p>
-                  </a:txBody>
-                  <a:tcPr marL="91440" marR="91440" marT="45720" marB="45720" anchor="ctr">
-                    <a:solidFill>
-                      <a:srgbClr val="22324A"/>
-                    </a:solidFill>
-                  </a:tcPr>
-                </a:tc>
-                <a:tc>
-                  <a:txBody>
-                    <a:bodyPr wrap="square"/>
-                    <a:lstStyle/>
-                    <a:p>
-                      <a:pPr algn="l"/>
-                      <a:r>
-                        <a:rPr sz="1400" b="0" i="0">
-                          <a:solidFill>
-                            <a:srgbClr val="FFFFFF"/>
-                          </a:solidFill>
-                          <a:latin typeface="Calibri"/>
-                        </a:rPr>
-                        <a:t>ASMs −1% to flat</a:t>
-                      </a:r>
-                    </a:p>
-                  </a:txBody>
-                  <a:tcPr marL="91440" marR="91440" marT="45720" marB="45720" anchor="ctr">
-                    <a:solidFill>
-                      <a:srgbClr val="22324A"/>
-                    </a:solidFill>
-                  </a:tcPr>
-                </a:tc>
-                <a:tc>
-                  <a:txBody>
-                    <a:bodyPr wrap="square"/>
-                    <a:lstStyle/>
-                    <a:p>
-                      <a:pPr algn="l"/>
-                      <a:r>
-                        <a:rPr sz="1400" b="0" i="1">
-                          <a:solidFill>
-                            <a:srgbClr val="E9A13B"/>
-                          </a:solidFill>
-                          <a:latin typeface="Calibri"/>
-                        </a:rPr>
-                        <a:t>[after the print]</a:t>
-                      </a:r>
-                    </a:p>
-                  </a:txBody>
-                  <a:tcPr marL="91440" marR="91440" marT="45720" marB="45720" anchor="ctr">
-                    <a:solidFill>
-                      <a:srgbClr val="22324A"/>
-                    </a:solidFill>
-                  </a:tcPr>
-                </a:tc>
-              </a:tr>
-              <a:tr h="347472">
-                <a:tc>
-                  <a:txBody>
-                    <a:bodyPr wrap="square"/>
-                    <a:lstStyle/>
-                    <a:p>
-                      <a:pPr algn="l"/>
-                      <a:r>
-                        <a:rPr sz="1400" b="1" i="0">
-                          <a:solidFill>
-                            <a:srgbClr val="D1495B"/>
-                          </a:solidFill>
-                          <a:latin typeface="Calibri"/>
-                        </a:rPr>
-                        <a:t>4  </a:t>
-                      </a:r>
-                      <a:r>
-                        <a:rPr sz="1400" b="1" i="0">
-                          <a:solidFill>
-                            <a:srgbClr val="FFFFFF"/>
-                          </a:solidFill>
-                          <a:latin typeface="Calibri"/>
-                        </a:rPr>
-                        <a:t>Naive regression lower</a:t>
-                      </a:r>
-                    </a:p>
-                  </a:txBody>
-                  <a:tcPr marL="91440" marR="91440" marT="45720" marB="45720" anchor="ctr">
-                    <a:solidFill>
-                      <a:srgbClr val="22324A"/>
-                    </a:solidFill>
-                  </a:tcPr>
-                </a:tc>
-                <a:tc>
-                  <a:txBody>
-                    <a:bodyPr wrap="square"/>
-                    <a:lstStyle/>
-                    <a:p>
-                      <a:pPr algn="l"/>
-                      <a:r>
-                        <a:rPr sz="1400" b="0" i="0">
-                          <a:solidFill>
-                            <a:srgbClr val="FFFFFF"/>
-                          </a:solidFill>
-                          <a:latin typeface="Calibri"/>
-                        </a:rPr>
-                        <a:t>32,097k vs our 32,912k</a:t>
-                      </a:r>
-                    </a:p>
-                  </a:txBody>
-                  <a:tcPr marL="91440" marR="91440" marT="45720" marB="45720" anchor="ctr">
-                    <a:solidFill>
-                      <a:srgbClr val="22324A"/>
-                    </a:solidFill>
-                  </a:tcPr>
-                </a:tc>
-                <a:tc>
-                  <a:txBody>
-                    <a:bodyPr wrap="square"/>
-                    <a:lstStyle/>
-                    <a:p>
-                      <a:pPr algn="l"/>
-                      <a:r>
-                        <a:rPr sz="1400" b="0" i="1">
-                          <a:solidFill>
-                            <a:srgbClr val="E9A13B"/>
-                          </a:solidFill>
-                          <a:latin typeface="Calibri"/>
-                        </a:rPr>
-                        <a:t>[after the print]</a:t>
-                      </a:r>
-                    </a:p>
-                  </a:txBody>
-                  <a:tcPr marL="91440" marR="91440" marT="45720" marB="45720" anchor="ctr">
-                    <a:solidFill>
-                      <a:srgbClr val="22324A"/>
-                    </a:solidFill>
-                  </a:tcPr>
-                </a:tc>
-              </a:tr>
-            </a:tbl>
-          </a:graphicData>
-        </a:graphic>
-      </p:graphicFrame>
-      <p:sp>
-        <p:nvSpPr>
-          <p:cNvPr id="7" name="TextBox 6"/>
+              <a:t>PASSENGER MISS, SPLIT</a:t>
+            </a:r>
+          </a:p>
+        </p:txBody>
+      </p:sp>
+      <p:sp>
+        <p:nvSpPr>
+          <p:cNvPr id="5" name="TextBox 4"/>
           <p:cNvSpPr txBox="1"/>
           <p:nvPr/>
         </p:nvSpPr>
         <p:spPr>
           <a:xfrm>
-            <a:off x="548640" y="5440680"/>
-            <a:ext cx="6720840" cy="320040"/>
+            <a:off x="548640" y="2194560"/>
+            <a:ext cx="2011680" cy="640080"/>
           </a:xfrm>
           <a:prstGeom prst="rect">
             <a:avLst/>
@@ -9888,7 +7684,7 @@
           <a:noFill/>
         </p:spPr>
         <p:txBody>
-          <a:bodyPr wrap="square" lIns="0" rIns="0" tIns="0" bIns="0" anchor="t">
+          <a:bodyPr wrap="square" lIns="0" rIns="0" tIns="0" bIns="0" anchor="ctr">
             <a:spAutoFit/>
           </a:bodyPr>
           <a:lstStyle/>
@@ -9899,83 +7695,15 @@
               </a:spcAft>
             </a:pPr>
             <a:r>
-              <a:rPr sz="1400" b="1" i="0">
+              <a:rPr sz="2000" b="1" i="0">
                 <a:solidFill>
                   <a:srgbClr val="FFFFFF"/>
                 </a:solidFill>
                 <a:latin typeface="Calibri"/>
               </a:rPr>
-              <a:t>Passenger miss  </a:t>
-            </a:r>
-            <a:r>
-              <a:rPr sz="1400" b="0" i="1">
-                <a:solidFill>
-                  <a:srgbClr val="E9A13B"/>
-                </a:solidFill>
-                <a:latin typeface="Calibri"/>
-              </a:rPr>
-              <a:t>[total]</a:t>
-            </a:r>
-            <a:r>
-              <a:rPr sz="1400" b="0" i="0">
-                <a:solidFill>
-                  <a:srgbClr val="D5DCE6"/>
-                </a:solidFill>
-                <a:latin typeface="Calibri"/>
-              </a:rPr>
-              <a:t> = boardings </a:t>
-            </a:r>
-            <a:r>
-              <a:rPr sz="1400" b="0" i="1">
-                <a:solidFill>
-                  <a:srgbClr val="E9A13B"/>
-                </a:solidFill>
-                <a:latin typeface="Calibri"/>
-              </a:rPr>
-              <a:t>[TSA chain]</a:t>
-            </a:r>
-            <a:r>
-              <a:rPr sz="1400" b="0" i="0">
-                <a:solidFill>
-                  <a:srgbClr val="D5DCE6"/>
-                </a:solidFill>
-                <a:latin typeface="Calibri"/>
-              </a:rPr>
-              <a:t> + trip factor </a:t>
-            </a:r>
-            <a:r>
-              <a:rPr sz="1400" b="0" i="1">
-                <a:solidFill>
-                  <a:srgbClr val="E9A13B"/>
-                </a:solidFill>
-                <a:latin typeface="Calibri"/>
-              </a:rPr>
-              <a:t>[the bridge]</a:t>
-            </a:r>
-          </a:p>
-        </p:txBody>
-      </p:sp>
-      <p:sp>
-        <p:nvSpPr>
-          <p:cNvPr id="8" name="TextBox 7"/>
-          <p:cNvSpPr txBox="1"/>
-          <p:nvPr/>
-        </p:nvSpPr>
-        <p:spPr>
-          <a:xfrm>
-            <a:off x="548640" y="5806440"/>
-            <a:ext cx="6720840" cy="548640"/>
-          </a:xfrm>
-          <a:prstGeom prst="rect">
-            <a:avLst/>
-          </a:prstGeom>
-          <a:noFill/>
-        </p:spPr>
-        <p:txBody>
-          <a:bodyPr wrap="square" lIns="0" rIns="0" tIns="0" bIns="0" anchor="t">
-            <a:spAutoFit/>
-          </a:bodyPr>
-          <a:lstStyle/>
+              <a:t>Boardings</a:t>
+            </a:r>
+          </a:p>
           <a:p>
             <a:pPr algn="l">
               <a:spcAft>
@@ -9983,44 +7711,33 @@
               </a:spcAft>
             </a:pPr>
             <a:r>
-              <a:rPr sz="1400" b="1" i="0">
-                <a:solidFill>
-                  <a:srgbClr val="FFFFFF"/>
+              <a:rPr sz="1300" b="0" i="0">
+                <a:solidFill>
+                  <a:srgbClr val="AEB8C6"/>
                 </a:solidFill>
                 <a:latin typeface="Calibri"/>
               </a:rPr>
-              <a:t>Why  </a:t>
-            </a:r>
-            <a:r>
-              <a:rPr sz="1400" b="0" i="1">
-                <a:solidFill>
-                  <a:srgbClr val="E9A13B"/>
-                </a:solidFill>
-                <a:latin typeface="Calibri"/>
-              </a:rPr>
-              <a:t>[one sentence: which risk hit, and what it means for the Flag]</a:t>
-            </a:r>
-          </a:p>
-        </p:txBody>
-      </p:sp>
-      <p:sp>
-        <p:nvSpPr>
-          <p:cNvPr id="9" name="PoV card"/>
+              <a:t>TSA + T-100 data</a:t>
+            </a:r>
+          </a:p>
+        </p:txBody>
+      </p:sp>
+      <p:sp>
+        <p:nvSpPr>
+          <p:cNvPr id="6" name="Miss Boardings"/>
           <p:cNvSpPr/>
           <p:nvPr/>
         </p:nvSpPr>
         <p:spPr>
           <a:xfrm>
-            <a:off x="7680959" y="1188720"/>
-            <a:ext cx="3962095" cy="5166360"/>
-          </a:xfrm>
-          <a:prstGeom prst="roundRect">
-            <a:avLst>
-              <a:gd name="adj" fmla="val 6000"/>
-            </a:avLst>
+            <a:off x="2651760" y="2304288"/>
+            <a:ext cx="766366" cy="420624"/>
+          </a:xfrm>
+          <a:prstGeom prst="rect">
+            <a:avLst/>
           </a:prstGeom>
           <a:solidFill>
-            <a:srgbClr val="22324A"/>
+            <a:srgbClr val="2A9D8F"/>
           </a:solidFill>
           <a:ln>
             <a:noFill/>
@@ -10051,14 +7768,14 @@
       </p:sp>
       <p:sp>
         <p:nvSpPr>
-          <p:cNvPr id="10" name="TextBox 9"/>
+          <p:cNvPr id="7" name="TextBox 6"/>
           <p:cNvSpPr txBox="1"/>
           <p:nvPr/>
         </p:nvSpPr>
         <p:spPr>
           <a:xfrm>
-            <a:off x="8000999" y="1417320"/>
-            <a:ext cx="3322015" cy="274320"/>
+            <a:off x="3555286" y="2304288"/>
+            <a:ext cx="1280160" cy="420624"/>
           </a:xfrm>
           <a:prstGeom prst="rect">
             <a:avLst/>
@@ -10066,7 +7783,7 @@
           <a:noFill/>
         </p:spPr>
         <p:txBody>
-          <a:bodyPr wrap="square" lIns="0" rIns="0" tIns="0" bIns="0" anchor="t">
+          <a:bodyPr wrap="square" lIns="0" rIns="0" tIns="0" bIns="0" anchor="ctr">
             <a:spAutoFit/>
           </a:bodyPr>
           <a:lstStyle/>
@@ -10077,27 +7794,27 @@
               </a:spcAft>
             </a:pPr>
             <a:r>
-              <a:rPr sz="1200" b="1" i="0">
-                <a:solidFill>
-                  <a:srgbClr val="E9A13B"/>
+              <a:rPr sz="1800" b="1" i="0">
+                <a:solidFill>
+                  <a:srgbClr val="2A9D8F"/>
                 </a:solidFill>
                 <a:latin typeface="Calibri"/>
               </a:rPr>
-              <a:t>OUR POV  ·  TEAM FLAG</a:t>
-            </a:r>
-          </a:p>
-        </p:txBody>
-      </p:sp>
-      <p:sp>
-        <p:nvSpPr>
-          <p:cNvPr id="11" name="TextBox 10"/>
+              <a:t>0.5% low</a:t>
+            </a:r>
+          </a:p>
+        </p:txBody>
+      </p:sp>
+      <p:sp>
+        <p:nvSpPr>
+          <p:cNvPr id="8" name="TextBox 7"/>
           <p:cNvSpPr txBox="1"/>
           <p:nvPr/>
         </p:nvSpPr>
         <p:spPr>
           <a:xfrm>
-            <a:off x="8000999" y="1737360"/>
-            <a:ext cx="3322015" cy="1097280"/>
+            <a:off x="548640" y="3154680"/>
+            <a:ext cx="2011680" cy="640080"/>
           </a:xfrm>
           <a:prstGeom prst="rect">
             <a:avLst/>
@@ -10105,7 +7822,7 @@
           <a:noFill/>
         </p:spPr>
         <p:txBody>
-          <a:bodyPr wrap="square" lIns="0" rIns="0" tIns="0" bIns="0" anchor="t">
+          <a:bodyPr wrap="square" lIns="0" rIns="0" tIns="0" bIns="0" anchor="ctr">
             <a:spAutoFit/>
           </a:bodyPr>
           <a:lstStyle/>
@@ -10116,38 +7833,15 @@
               </a:spcAft>
             </a:pPr>
             <a:r>
-              <a:rPr sz="1600" b="1" i="0">
+              <a:rPr sz="2000" b="1" i="0">
                 <a:solidFill>
                   <a:srgbClr val="FFFFFF"/>
                 </a:solidFill>
                 <a:latin typeface="Calibri"/>
               </a:rPr>
-              <a:t>Sell the passenger nowcast and the fare attribution, with a regime flag. Don't sell the revenue point as beating naive.</a:t>
-            </a:r>
-          </a:p>
-        </p:txBody>
-      </p:sp>
-      <p:sp>
-        <p:nvSpPr>
-          <p:cNvPr id="12" name="TextBox 11"/>
-          <p:cNvSpPr txBox="1"/>
-          <p:nvPr/>
-        </p:nvSpPr>
-        <p:spPr>
-          <a:xfrm>
-            <a:off x="8000999" y="2926080"/>
-            <a:ext cx="3322015" cy="274320"/>
-          </a:xfrm>
-          <a:prstGeom prst="rect">
-            <a:avLst/>
-          </a:prstGeom>
-          <a:noFill/>
-        </p:spPr>
-        <p:txBody>
-          <a:bodyPr wrap="square" lIns="0" rIns="0" tIns="0" bIns="0" anchor="t">
-            <a:spAutoFit/>
-          </a:bodyPr>
-          <a:lstStyle/>
+              <a:t>Trip factor</a:t>
+            </a:r>
+          </a:p>
           <a:p>
             <a:pPr algn="l">
               <a:spcAft>
@@ -10155,27 +7849,71 @@
               </a:spcAft>
             </a:pPr>
             <a:r>
-              <a:rPr sz="1200" b="1" i="0">
+              <a:rPr sz="1300" b="0" i="0">
                 <a:solidFill>
                   <a:srgbClr val="AEB8C6"/>
                 </a:solidFill>
                 <a:latin typeface="Calibri"/>
               </a:rPr>
-              <a:t>DOWNGRADE TRIGGERS AFTER Q3</a:t>
-            </a:r>
-          </a:p>
-        </p:txBody>
-      </p:sp>
-      <p:sp>
-        <p:nvSpPr>
-          <p:cNvPr id="13" name="TextBox 12"/>
+              <a:t>the bridge</a:t>
+            </a:r>
+          </a:p>
+        </p:txBody>
+      </p:sp>
+      <p:sp>
+        <p:nvSpPr>
+          <p:cNvPr id="9" name="Miss Trip factor"/>
+          <p:cNvSpPr/>
+          <p:nvPr/>
+        </p:nvSpPr>
+        <p:spPr>
+          <a:xfrm>
+            <a:off x="2651760" y="3264408"/>
+            <a:ext cx="1976833" cy="420624"/>
+          </a:xfrm>
+          <a:prstGeom prst="rect">
+            <a:avLst/>
+          </a:prstGeom>
+          <a:solidFill>
+            <a:srgbClr val="D1495B"/>
+          </a:solidFill>
+          <a:ln>
+            <a:noFill/>
+          </a:ln>
+          <a:effectLst/>
+        </p:spPr>
+        <p:style>
+          <a:lnRef idx="1">
+            <a:schemeClr val="accent1"/>
+          </a:lnRef>
+          <a:fillRef idx="3">
+            <a:schemeClr val="accent1"/>
+          </a:fillRef>
+          <a:effectRef idx="2">
+            <a:schemeClr val="accent1"/>
+          </a:effectRef>
+          <a:fontRef idx="minor">
+            <a:schemeClr val="lt1"/>
+          </a:fontRef>
+        </p:style>
+        <p:txBody>
+          <a:bodyPr rtlCol="0" anchor="ctr"/>
+          <a:lstStyle/>
+          <a:p>
+            <a:pPr algn="ctr"/>
+          </a:p>
+        </p:txBody>
+      </p:sp>
+      <p:sp>
+        <p:nvSpPr>
+          <p:cNvPr id="10" name="TextBox 9"/>
           <p:cNvSpPr txBox="1"/>
           <p:nvPr/>
         </p:nvSpPr>
         <p:spPr>
           <a:xfrm>
-            <a:off x="8000999" y="3291840"/>
-            <a:ext cx="1996135" cy="548640"/>
+            <a:off x="4765753" y="3264408"/>
+            <a:ext cx="1280160" cy="420624"/>
           </a:xfrm>
           <a:prstGeom prst="rect">
             <a:avLst/>
@@ -10183,7 +7921,7 @@
           <a:noFill/>
         </p:spPr>
         <p:txBody>
-          <a:bodyPr wrap="square" lIns="0" rIns="0" tIns="0" bIns="0" anchor="t">
+          <a:bodyPr wrap="square" lIns="0" rIns="0" tIns="0" bIns="0" anchor="ctr">
             <a:spAutoFit/>
           </a:bodyPr>
           <a:lstStyle/>
@@ -10194,27 +7932,27 @@
               </a:spcAft>
             </a:pPr>
             <a:r>
-              <a:rPr sz="1400" b="0" i="0">
-                <a:solidFill>
-                  <a:srgbClr val="D5DCE6"/>
+              <a:rPr sz="1800" b="1" i="0">
+                <a:solidFill>
+                  <a:srgbClr val="D1495B"/>
                 </a:solidFill>
                 <a:latin typeface="Calibri"/>
               </a:rPr>
-              <a:t>Trip factor &gt;1.5 pt off forecast</a:t>
-            </a:r>
-          </a:p>
-        </p:txBody>
-      </p:sp>
-      <p:sp>
-        <p:nvSpPr>
-          <p:cNvPr id="14" name="TextBox 13"/>
+              <a:t>1.2% low</a:t>
+            </a:r>
+          </a:p>
+        </p:txBody>
+      </p:sp>
+      <p:sp>
+        <p:nvSpPr>
+          <p:cNvPr id="11" name="TextBox 10"/>
           <p:cNvSpPr txBox="1"/>
           <p:nvPr/>
         </p:nvSpPr>
         <p:spPr>
           <a:xfrm>
-            <a:off x="10042855" y="3291840"/>
-            <a:ext cx="1325880" cy="548640"/>
+            <a:off x="548640" y="4114800"/>
+            <a:ext cx="2011680" cy="640080"/>
           </a:xfrm>
           <a:prstGeom prst="rect">
             <a:avLst/>
@@ -10222,46 +7960,7 @@
           <a:noFill/>
         </p:spPr>
         <p:txBody>
-          <a:bodyPr wrap="square" lIns="0" rIns="0" tIns="0" bIns="0" anchor="t">
-            <a:spAutoFit/>
-          </a:bodyPr>
-          <a:lstStyle/>
-          <a:p>
-            <a:pPr algn="r">
-              <a:spcAft>
-                <a:spcPts val="0"/>
-              </a:spcAft>
-            </a:pPr>
-            <a:r>
-              <a:rPr sz="1300" b="0" i="1">
-                <a:solidFill>
-                  <a:srgbClr val="E9A13B"/>
-                </a:solidFill>
-                <a:latin typeface="Calibri"/>
-              </a:rPr>
-              <a:t>[after the print]</a:t>
-            </a:r>
-          </a:p>
-        </p:txBody>
-      </p:sp>
-      <p:sp>
-        <p:nvSpPr>
-          <p:cNvPr id="15" name="TextBox 14"/>
-          <p:cNvSpPr txBox="1"/>
-          <p:nvPr/>
-        </p:nvSpPr>
-        <p:spPr>
-          <a:xfrm>
-            <a:off x="8000999" y="3858768"/>
-            <a:ext cx="1996135" cy="548640"/>
-          </a:xfrm>
-          <a:prstGeom prst="rect">
-            <a:avLst/>
-          </a:prstGeom>
-          <a:noFill/>
-        </p:spPr>
-        <p:txBody>
-          <a:bodyPr wrap="square" lIns="0" rIns="0" tIns="0" bIns="0" anchor="t">
+          <a:bodyPr wrap="square" lIns="0" rIns="0" tIns="0" bIns="0" anchor="ctr">
             <a:spAutoFit/>
           </a:bodyPr>
           <a:lstStyle/>
@@ -10272,77 +7971,15 @@
               </a:spcAft>
             </a:pPr>
             <a:r>
-              <a:rPr sz="1400" b="0" i="0">
-                <a:solidFill>
-                  <a:srgbClr val="D5DCE6"/>
+              <a:rPr sz="2000" b="1" i="0">
+                <a:solidFill>
+                  <a:srgbClr val="FFFFFF"/>
                 </a:solidFill>
                 <a:latin typeface="Calibri"/>
               </a:rPr>
-              <a:t>TSA chain loses to B1</a:t>
-            </a:r>
-          </a:p>
-        </p:txBody>
-      </p:sp>
-      <p:sp>
-        <p:nvSpPr>
-          <p:cNvPr id="16" name="TextBox 15"/>
-          <p:cNvSpPr txBox="1"/>
-          <p:nvPr/>
-        </p:nvSpPr>
-        <p:spPr>
-          <a:xfrm>
-            <a:off x="10042855" y="3858768"/>
-            <a:ext cx="1325880" cy="548640"/>
-          </a:xfrm>
-          <a:prstGeom prst="rect">
-            <a:avLst/>
-          </a:prstGeom>
-          <a:noFill/>
-        </p:spPr>
-        <p:txBody>
-          <a:bodyPr wrap="square" lIns="0" rIns="0" tIns="0" bIns="0" anchor="t">
-            <a:spAutoFit/>
-          </a:bodyPr>
-          <a:lstStyle/>
-          <a:p>
-            <a:pPr algn="r">
-              <a:spcAft>
-                <a:spcPts val="0"/>
-              </a:spcAft>
-            </a:pPr>
-            <a:r>
-              <a:rPr sz="1300" b="0" i="1">
-                <a:solidFill>
-                  <a:srgbClr val="E9A13B"/>
-                </a:solidFill>
-                <a:latin typeface="Calibri"/>
-              </a:rPr>
-              <a:t>[after the print]</a:t>
-            </a:r>
-          </a:p>
-        </p:txBody>
-      </p:sp>
-      <p:sp>
-        <p:nvSpPr>
-          <p:cNvPr id="17" name="TextBox 16"/>
-          <p:cNvSpPr txBox="1"/>
-          <p:nvPr/>
-        </p:nvSpPr>
-        <p:spPr>
-          <a:xfrm>
-            <a:off x="8000999" y="4425696"/>
-            <a:ext cx="1996135" cy="548640"/>
-          </a:xfrm>
-          <a:prstGeom prst="rect">
-            <a:avLst/>
-          </a:prstGeom>
-          <a:noFill/>
-        </p:spPr>
-        <p:txBody>
-          <a:bodyPr wrap="square" lIns="0" rIns="0" tIns="0" bIns="0" anchor="t">
-            <a:spAutoFit/>
-          </a:bodyPr>
-          <a:lstStyle/>
+              <a:t>Total</a:t>
+            </a:r>
+          </a:p>
           <a:p>
             <a:pPr algn="l">
               <a:spcAft>
@@ -10350,27 +7987,71 @@
               </a:spcAft>
             </a:pPr>
             <a:r>
-              <a:rPr sz="1400" b="0" i="0">
-                <a:solidFill>
-                  <a:srgbClr val="D5DCE6"/>
+              <a:rPr sz="1300" b="0" i="0">
+                <a:solidFill>
+                  <a:srgbClr val="AEB8C6"/>
                 </a:solidFill>
                 <a:latin typeface="Calibri"/>
               </a:rPr>
-              <a:t>Chain and regression split &gt;2%</a:t>
-            </a:r>
-          </a:p>
-        </p:txBody>
-      </p:sp>
-      <p:sp>
-        <p:nvSpPr>
-          <p:cNvPr id="18" name="TextBox 17"/>
+              <a:t/>
+            </a:r>
+          </a:p>
+        </p:txBody>
+      </p:sp>
+      <p:sp>
+        <p:nvSpPr>
+          <p:cNvPr id="12" name="Miss Total"/>
+          <p:cNvSpPr/>
+          <p:nvPr/>
+        </p:nvSpPr>
+        <p:spPr>
+          <a:xfrm>
+            <a:off x="2651760" y="4224528"/>
+            <a:ext cx="2743200" cy="420624"/>
+          </a:xfrm>
+          <a:prstGeom prst="rect">
+            <a:avLst/>
+          </a:prstGeom>
+          <a:solidFill>
+            <a:srgbClr val="FFFFFF"/>
+          </a:solidFill>
+          <a:ln>
+            <a:noFill/>
+          </a:ln>
+          <a:effectLst/>
+        </p:spPr>
+        <p:style>
+          <a:lnRef idx="1">
+            <a:schemeClr val="accent1"/>
+          </a:lnRef>
+          <a:fillRef idx="3">
+            <a:schemeClr val="accent1"/>
+          </a:fillRef>
+          <a:effectRef idx="2">
+            <a:schemeClr val="accent1"/>
+          </a:effectRef>
+          <a:fontRef idx="minor">
+            <a:schemeClr val="lt1"/>
+          </a:fontRef>
+        </p:style>
+        <p:txBody>
+          <a:bodyPr rtlCol="0" anchor="ctr"/>
+          <a:lstStyle/>
+          <a:p>
+            <a:pPr algn="ctr"/>
+          </a:p>
+        </p:txBody>
+      </p:sp>
+      <p:sp>
+        <p:nvSpPr>
+          <p:cNvPr id="13" name="TextBox 12"/>
           <p:cNvSpPr txBox="1"/>
           <p:nvPr/>
         </p:nvSpPr>
         <p:spPr>
           <a:xfrm>
-            <a:off x="10042855" y="4425696"/>
-            <a:ext cx="1325880" cy="548640"/>
+            <a:off x="5532120" y="4224528"/>
+            <a:ext cx="1280160" cy="420624"/>
           </a:xfrm>
           <a:prstGeom prst="rect">
             <a:avLst/>
@@ -10378,46 +8059,7 @@
           <a:noFill/>
         </p:spPr>
         <p:txBody>
-          <a:bodyPr wrap="square" lIns="0" rIns="0" tIns="0" bIns="0" anchor="t">
-            <a:spAutoFit/>
-          </a:bodyPr>
-          <a:lstStyle/>
-          <a:p>
-            <a:pPr algn="r">
-              <a:spcAft>
-                <a:spcPts val="0"/>
-              </a:spcAft>
-            </a:pPr>
-            <a:r>
-              <a:rPr sz="1300" b="1" i="0">
-                <a:solidFill>
-                  <a:srgbClr val="E9A13B"/>
-                </a:solidFill>
-                <a:latin typeface="Calibri"/>
-              </a:rPr>
-              <a:t>raised (2.1%)</a:t>
-            </a:r>
-          </a:p>
-        </p:txBody>
-      </p:sp>
-      <p:sp>
-        <p:nvSpPr>
-          <p:cNvPr id="19" name="TextBox 18"/>
-          <p:cNvSpPr txBox="1"/>
-          <p:nvPr/>
-        </p:nvSpPr>
-        <p:spPr>
-          <a:xfrm>
-            <a:off x="8000999" y="4992624"/>
-            <a:ext cx="1996135" cy="548640"/>
-          </a:xfrm>
-          <a:prstGeom prst="rect">
-            <a:avLst/>
-          </a:prstGeom>
-          <a:noFill/>
-        </p:spPr>
-        <p:txBody>
-          <a:bodyPr wrap="square" lIns="0" rIns="0" tIns="0" bIns="0" anchor="t">
+          <a:bodyPr wrap="square" lIns="0" rIns="0" tIns="0" bIns="0" anchor="ctr">
             <a:spAutoFit/>
           </a:bodyPr>
           <a:lstStyle/>
@@ -10428,27 +8070,80 @@
               </a:spcAft>
             </a:pPr>
             <a:r>
-              <a:rPr sz="1400" b="0" i="0">
-                <a:solidFill>
-                  <a:srgbClr val="D5DCE6"/>
+              <a:rPr sz="1800" b="1" i="0">
+                <a:solidFill>
+                  <a:srgbClr val="FFFFFF"/>
                 </a:solidFill>
                 <a:latin typeface="Calibri"/>
               </a:rPr>
-              <a:t>Southwest's TSA share negative two months</a:t>
-            </a:r>
-          </a:p>
-        </p:txBody>
-      </p:sp>
-      <p:sp>
-        <p:nvSpPr>
-          <p:cNvPr id="20" name="TextBox 19"/>
+              <a:t>1.7% low</a:t>
+            </a:r>
+          </a:p>
+        </p:txBody>
+      </p:sp>
+      <p:sp>
+        <p:nvSpPr>
+          <p:cNvPr id="14" name="Oval 13"/>
+          <p:cNvSpPr/>
+          <p:nvPr/>
+        </p:nvSpPr>
+        <p:spPr>
+          <a:xfrm>
+            <a:off x="6858000" y="2286000"/>
+            <a:ext cx="420624" cy="420624"/>
+          </a:xfrm>
+          <a:prstGeom prst="ellipse">
+            <a:avLst/>
+          </a:prstGeom>
+          <a:solidFill>
+            <a:srgbClr val="D1495B"/>
+          </a:solidFill>
+          <a:ln>
+            <a:noFill/>
+          </a:ln>
+          <a:effectLst/>
+        </p:spPr>
+        <p:style>
+          <a:lnRef idx="1">
+            <a:schemeClr val="accent1"/>
+          </a:lnRef>
+          <a:fillRef idx="3">
+            <a:schemeClr val="accent1"/>
+          </a:fillRef>
+          <a:effectRef idx="2">
+            <a:schemeClr val="accent1"/>
+          </a:effectRef>
+          <a:fontRef idx="minor">
+            <a:schemeClr val="lt1"/>
+          </a:fontRef>
+        </p:style>
+        <p:txBody>
+          <a:bodyPr rtlCol="0" anchor="ctr" wrap="square" lIns="137160" rIns="137160" tIns="0" bIns="0"/>
+          <a:lstStyle/>
+          <a:p>
+            <a:pPr algn="ctr"/>
+            <a:r>
+              <a:rPr sz="1600" b="1">
+                <a:solidFill>
+                  <a:srgbClr val="FFFFFF"/>
+                </a:solidFill>
+                <a:latin typeface="Calibri"/>
+              </a:rPr>
+              <a:t>1</a:t>
+            </a:r>
+          </a:p>
+        </p:txBody>
+      </p:sp>
+      <p:sp>
+        <p:nvSpPr>
+          <p:cNvPr id="15" name="TextBox 14"/>
           <p:cNvSpPr txBox="1"/>
           <p:nvPr/>
         </p:nvSpPr>
         <p:spPr>
           <a:xfrm>
-            <a:off x="10042855" y="4992624"/>
-            <a:ext cx="1325880" cy="548640"/>
+            <a:off x="7498079" y="2194560"/>
+            <a:ext cx="4144975" cy="640080"/>
           </a:xfrm>
           <a:prstGeom prst="rect">
             <a:avLst/>
@@ -10456,46 +8151,7 @@
           <a:noFill/>
         </p:spPr>
         <p:txBody>
-          <a:bodyPr wrap="square" lIns="0" rIns="0" tIns="0" bIns="0" anchor="t">
-            <a:spAutoFit/>
-          </a:bodyPr>
-          <a:lstStyle/>
-          <a:p>
-            <a:pPr algn="r">
-              <a:spcAft>
-                <a:spcPts val="0"/>
-              </a:spcAft>
-            </a:pPr>
-            <a:r>
-              <a:rPr sz="1300" b="0" i="1">
-                <a:solidFill>
-                  <a:srgbClr val="AEB8C6"/>
-                </a:solidFill>
-                <a:latin typeface="Calibri"/>
-              </a:rPr>
-              <a:t>check T-100</a:t>
-            </a:r>
-          </a:p>
-        </p:txBody>
-      </p:sp>
-      <p:sp>
-        <p:nvSpPr>
-          <p:cNvPr id="21" name="TextBox 20"/>
-          <p:cNvSpPr txBox="1"/>
-          <p:nvPr/>
-        </p:nvSpPr>
-        <p:spPr>
-          <a:xfrm>
-            <a:off x="8000999" y="5559552"/>
-            <a:ext cx="1996135" cy="548640"/>
-          </a:xfrm>
-          <a:prstGeom prst="rect">
-            <a:avLst/>
-          </a:prstGeom>
-          <a:noFill/>
-        </p:spPr>
-        <p:txBody>
-          <a:bodyPr wrap="square" lIns="0" rIns="0" tIns="0" bIns="0" anchor="t">
+          <a:bodyPr wrap="square" lIns="0" rIns="0" tIns="0" bIns="0" anchor="ctr">
             <a:spAutoFit/>
           </a:bodyPr>
           <a:lstStyle/>
@@ -10506,27 +8162,80 @@
               </a:spcAft>
             </a:pPr>
             <a:r>
-              <a:rPr sz="1400" b="0" i="0">
-                <a:solidFill>
-                  <a:srgbClr val="D5DCE6"/>
+              <a:rPr sz="1700" b="0" i="0">
+                <a:solidFill>
+                  <a:srgbClr val="FFFFFF"/>
                 </a:solidFill>
                 <a:latin typeface="Calibri"/>
               </a:rPr>
-              <a:t>A funding lapse or TSA collection change</a:t>
-            </a:r>
-          </a:p>
-        </p:txBody>
-      </p:sp>
-      <p:sp>
-        <p:nvSpPr>
-          <p:cNvPr id="22" name="TextBox 21"/>
+              <a:t>Trip factor rose 2.2%, not the 3.4% we extrapolated.</a:t>
+            </a:r>
+          </a:p>
+        </p:txBody>
+      </p:sp>
+      <p:sp>
+        <p:nvSpPr>
+          <p:cNvPr id="16" name="Oval 15"/>
+          <p:cNvSpPr/>
+          <p:nvPr/>
+        </p:nvSpPr>
+        <p:spPr>
+          <a:xfrm>
+            <a:off x="6858000" y="3246120"/>
+            <a:ext cx="420624" cy="420624"/>
+          </a:xfrm>
+          <a:prstGeom prst="ellipse">
+            <a:avLst/>
+          </a:prstGeom>
+          <a:solidFill>
+            <a:srgbClr val="D1495B"/>
+          </a:solidFill>
+          <a:ln>
+            <a:noFill/>
+          </a:ln>
+          <a:effectLst/>
+        </p:spPr>
+        <p:style>
+          <a:lnRef idx="1">
+            <a:schemeClr val="accent1"/>
+          </a:lnRef>
+          <a:fillRef idx="3">
+            <a:schemeClr val="accent1"/>
+          </a:fillRef>
+          <a:effectRef idx="2">
+            <a:schemeClr val="accent1"/>
+          </a:effectRef>
+          <a:fontRef idx="minor">
+            <a:schemeClr val="lt1"/>
+          </a:fontRef>
+        </p:style>
+        <p:txBody>
+          <a:bodyPr rtlCol="0" anchor="ctr" wrap="square" lIns="137160" rIns="137160" tIns="0" bIns="0"/>
+          <a:lstStyle/>
+          <a:p>
+            <a:pPr algn="ctr"/>
+            <a:r>
+              <a:rPr sz="1600" b="1">
+                <a:solidFill>
+                  <a:srgbClr val="FFFFFF"/>
+                </a:solidFill>
+                <a:latin typeface="Calibri"/>
+              </a:rPr>
+              <a:t>2</a:t>
+            </a:r>
+          </a:p>
+        </p:txBody>
+      </p:sp>
+      <p:sp>
+        <p:nvSpPr>
+          <p:cNvPr id="17" name="TextBox 16"/>
           <p:cNvSpPr txBox="1"/>
           <p:nvPr/>
         </p:nvSpPr>
         <p:spPr>
           <a:xfrm>
-            <a:off x="10042855" y="5559552"/>
-            <a:ext cx="1325880" cy="548640"/>
+            <a:off x="7498079" y="3154680"/>
+            <a:ext cx="4144975" cy="640080"/>
           </a:xfrm>
           <a:prstGeom prst="rect">
             <a:avLst/>
@@ -10534,24 +8243,180 @@
           <a:noFill/>
         </p:spPr>
         <p:txBody>
-          <a:bodyPr wrap="square" lIns="0" rIns="0" tIns="0" bIns="0" anchor="t">
+          <a:bodyPr wrap="square" lIns="0" rIns="0" tIns="0" bIns="0" anchor="ctr">
             <a:spAutoFit/>
           </a:bodyPr>
           <a:lstStyle/>
           <a:p>
-            <a:pPr algn="r">
+            <a:pPr algn="l">
               <a:spcAft>
                 <a:spcPts val="0"/>
               </a:spcAft>
             </a:pPr>
             <a:r>
-              <a:rPr sz="1300" b="1" i="0">
-                <a:solidFill>
-                  <a:srgbClr val="2A9D8F"/>
+              <a:rPr sz="1700" b="0" i="0">
+                <a:solidFill>
+                  <a:srgbClr val="FFFFFF"/>
                 </a:solidFill>
                 <a:latin typeface="Calibri"/>
               </a:rPr>
-              <a:t>none in Q3</a:t>
+              <a:t>Fare 1.0% low: Southwest beat its own guide, unit revenue +21.6% vs +17.5–19.5%.</a:t>
+            </a:r>
+          </a:p>
+        </p:txBody>
+      </p:sp>
+      <p:sp>
+        <p:nvSpPr>
+          <p:cNvPr id="18" name="Oval 17"/>
+          <p:cNvSpPr/>
+          <p:nvPr/>
+        </p:nvSpPr>
+        <p:spPr>
+          <a:xfrm>
+            <a:off x="6858000" y="4206240"/>
+            <a:ext cx="420624" cy="420624"/>
+          </a:xfrm>
+          <a:prstGeom prst="ellipse">
+            <a:avLst/>
+          </a:prstGeom>
+          <a:solidFill>
+            <a:srgbClr val="D1495B"/>
+          </a:solidFill>
+          <a:ln>
+            <a:noFill/>
+          </a:ln>
+          <a:effectLst/>
+        </p:spPr>
+        <p:style>
+          <a:lnRef idx="1">
+            <a:schemeClr val="accent1"/>
+          </a:lnRef>
+          <a:fillRef idx="3">
+            <a:schemeClr val="accent1"/>
+          </a:fillRef>
+          <a:effectRef idx="2">
+            <a:schemeClr val="accent1"/>
+          </a:effectRef>
+          <a:fontRef idx="minor">
+            <a:schemeClr val="lt1"/>
+          </a:fontRef>
+        </p:style>
+        <p:txBody>
+          <a:bodyPr rtlCol="0" anchor="ctr" wrap="square" lIns="137160" rIns="137160" tIns="0" bIns="0"/>
+          <a:lstStyle/>
+          <a:p>
+            <a:pPr algn="ctr"/>
+            <a:r>
+              <a:rPr sz="1600" b="1">
+                <a:solidFill>
+                  <a:srgbClr val="FFFFFF"/>
+                </a:solidFill>
+                <a:latin typeface="Calibri"/>
+              </a:rPr>
+              <a:t>3</a:t>
+            </a:r>
+          </a:p>
+        </p:txBody>
+      </p:sp>
+      <p:sp>
+        <p:nvSpPr>
+          <p:cNvPr id="19" name="TextBox 18"/>
+          <p:cNvSpPr txBox="1"/>
+          <p:nvPr/>
+        </p:nvSpPr>
+        <p:spPr>
+          <a:xfrm>
+            <a:off x="7498079" y="4114800"/>
+            <a:ext cx="4144975" cy="640080"/>
+          </a:xfrm>
+          <a:prstGeom prst="rect">
+            <a:avLst/>
+          </a:prstGeom>
+          <a:noFill/>
+        </p:spPr>
+        <p:txBody>
+          <a:bodyPr wrap="square" lIns="0" rIns="0" tIns="0" bIns="0" anchor="ctr">
+            <a:spAutoFit/>
+          </a:bodyPr>
+          <a:lstStyle/>
+          <a:p>
+            <a:pPr algn="l">
+              <a:spcAft>
+                <a:spcPts val="0"/>
+              </a:spcAft>
+            </a:pPr>
+            <a:r>
+              <a:rPr sz="1700" b="0" i="0">
+                <a:solidFill>
+                  <a:srgbClr val="FFFFFF"/>
+                </a:solidFill>
+                <a:latin typeface="Calibri"/>
+              </a:rPr>
+              <a:t>Naive B1 beat our passenger count: 0.1% low vs 1.7% low, the second quarter running.</a:t>
+            </a:r>
+          </a:p>
+        </p:txBody>
+      </p:sp>
+      <p:sp>
+        <p:nvSpPr>
+          <p:cNvPr id="20" name="PoV"/>
+          <p:cNvSpPr/>
+          <p:nvPr/>
+        </p:nvSpPr>
+        <p:spPr>
+          <a:xfrm>
+            <a:off x="548640" y="5257800"/>
+            <a:ext cx="11094415" cy="868680"/>
+          </a:xfrm>
+          <a:prstGeom prst="roundRect">
+            <a:avLst>
+              <a:gd name="adj" fmla="val 12000"/>
+            </a:avLst>
+          </a:prstGeom>
+          <a:solidFill>
+            <a:srgbClr val="22324A"/>
+          </a:solidFill>
+          <a:ln>
+            <a:noFill/>
+          </a:ln>
+          <a:effectLst/>
+        </p:spPr>
+        <p:style>
+          <a:lnRef idx="1">
+            <a:schemeClr val="accent1"/>
+          </a:lnRef>
+          <a:fillRef idx="3">
+            <a:schemeClr val="accent1"/>
+          </a:fillRef>
+          <a:effectRef idx="2">
+            <a:schemeClr val="accent1"/>
+          </a:effectRef>
+          <a:fontRef idx="minor">
+            <a:schemeClr val="lt1"/>
+          </a:fontRef>
+        </p:style>
+        <p:txBody>
+          <a:bodyPr rtlCol="0" anchor="ctr" wrap="square" lIns="137160" rIns="137160" tIns="0" bIns="0"/>
+          <a:lstStyle/>
+          <a:p>
+            <a:pPr algn="l"/>
+            <a:r>
+              <a:rPr sz="1800" b="1">
+                <a:solidFill>
+                  <a:srgbClr val="E9A13B"/>
+                </a:solidFill>
+                <a:latin typeface="Calibri"/>
+              </a:rPr>
+              <a:t>PoV  </a:t>
+            </a:r>
+            <a:r>
+              <a:rPr sz="1800" b="0">
+                <a:solidFill>
+                  <a:srgbClr val="FFFFFF"/>
+                </a:solidFill>
+                <a:latin typeface="Calibri"/>
+              </a:rPr>
+              <a:t>Team Flag. Keep selling the boardings nowcast; downgrade the passenger count until the trip factor settles.</a:t>
             </a:r>
           </a:p>
         </p:txBody>

--- a/Presentation/southwest_q3_2026_presentation.pptx
+++ b/Presentation/southwest_q3_2026_presentation.pptx
@@ -4484,7 +4484,7 @@
                 </a:solidFill>
                 <a:latin typeface="Calibri"/>
               </a:rPr>
-              <a:t>Southwest Airlines (LUV), Q3 2026  ·  forecast locked Oct 20, scored against the Oct 21 release</a:t>
+              <a:t>Team Thurro EV  ·  Southwest Airlines (LUV), Q3 2026  ·  forecast locked Oct 20, scored against the Oct 21 release</a:t>
             </a:r>
           </a:p>
         </p:txBody>
